--- a/docs/paper/figure_sources/figure2_native_main/figure2_method.pptx
+++ b/docs/paper/figure_sources/figure2_native_main/figure2_method.pptx
@@ -4,10 +4,13 @@
   <p:sldMasterIdLst>
     <p:sldMasterId id="2147483648" r:id="rId1"/>
   </p:sldMasterIdLst>
+  <p:notesMasterIdLst>
+    <p:notesMasterId r:id="rId3"/>
+  </p:notesMasterIdLst>
   <p:sldIdLst>
     <p:sldId id="257" r:id="rId2"/>
   </p:sldIdLst>
-  <p:sldSz cx="14630400" cy="6858000"/>
+  <p:sldSz cx="17881600" cy="5130800"/>
   <p:notesSz cx="6858000" cy="9144000"/>
   <p:defaultTextStyle>
     <a:defPPr>
@@ -112,6 +115,439 @@
 </p:presentation>
 </file>
 
+<file path=ppt/notesMasters/notesMaster1.xml><?xml version="1.0" encoding="utf-8"?>
+<p:notesMaster xmlns:a="http://schemas.openxmlformats.org/drawingml/2006/main" xmlns:r="http://schemas.openxmlformats.org/officeDocument/2006/relationships" xmlns:p="http://schemas.openxmlformats.org/presentationml/2006/main">
+  <p:cSld>
+    <p:bg>
+      <p:bgRef idx="1001">
+        <a:schemeClr val="bg1"/>
+      </p:bgRef>
+    </p:bg>
+    <p:spTree>
+      <p:nvGrpSpPr>
+        <p:cNvPr id="1" name=""/>
+        <p:cNvGrpSpPr/>
+        <p:nvPr/>
+      </p:nvGrpSpPr>
+      <p:grpSpPr>
+        <a:xfrm>
+          <a:off x="0" y="0"/>
+          <a:ext cx="0" cy="0"/>
+          <a:chOff x="0" y="0"/>
+          <a:chExt cx="0" cy="0"/>
+        </a:xfrm>
+      </p:grpSpPr>
+      <p:sp>
+        <p:nvSpPr>
+          <p:cNvPr id="2" name="Header Placeholder 1"/>
+          <p:cNvSpPr>
+            <a:spLocks noGrp="1"/>
+          </p:cNvSpPr>
+          <p:nvPr>
+            <p:ph type="hdr" sz="quarter"/>
+          </p:nvPr>
+        </p:nvSpPr>
+        <p:spPr>
+          <a:xfrm>
+            <a:off x="0" y="0"/>
+            <a:ext cx="2971800" cy="458788"/>
+          </a:xfrm>
+          <a:prstGeom prst="rect">
+            <a:avLst/>
+          </a:prstGeom>
+        </p:spPr>
+        <p:txBody>
+          <a:bodyPr vert="horz" lIns="91440" tIns="45720" rIns="91440" bIns="45720" rtlCol="0"/>
+          <a:lstStyle>
+            <a:lvl1pPr algn="l">
+              <a:defRPr sz="1200"/>
+            </a:lvl1pPr>
+          </a:lstStyle>
+          <a:p>
+            <a:endParaRPr lang="en-US"/>
+          </a:p>
+        </p:txBody>
+      </p:sp>
+      <p:sp>
+        <p:nvSpPr>
+          <p:cNvPr id="3" name="Date Placeholder 2"/>
+          <p:cNvSpPr>
+            <a:spLocks noGrp="1"/>
+          </p:cNvSpPr>
+          <p:nvPr>
+            <p:ph type="dt" idx="1"/>
+          </p:nvPr>
+        </p:nvSpPr>
+        <p:spPr>
+          <a:xfrm>
+            <a:off x="3884613" y="0"/>
+            <a:ext cx="2971800" cy="458788"/>
+          </a:xfrm>
+          <a:prstGeom prst="rect">
+            <a:avLst/>
+          </a:prstGeom>
+        </p:spPr>
+        <p:txBody>
+          <a:bodyPr vert="horz" lIns="91440" tIns="45720" rIns="91440" bIns="45720" rtlCol="0"/>
+          <a:lstStyle>
+            <a:lvl1pPr algn="r">
+              <a:defRPr sz="1200"/>
+            </a:lvl1pPr>
+          </a:lstStyle>
+          <a:p>
+            <a:fld id="{A1D241DC-3C91-5049-94D6-89A200CD372D}" type="datetimeFigureOut">
+              <a:rPr lang="en-US" smtClean="0"/>
+              <a:t>9/23/26</a:t>
+            </a:fld>
+            <a:endParaRPr lang="en-US"/>
+          </a:p>
+        </p:txBody>
+      </p:sp>
+      <p:sp>
+        <p:nvSpPr>
+          <p:cNvPr id="4" name="Slide Image Placeholder 3"/>
+          <p:cNvSpPr>
+            <a:spLocks noGrp="1" noRot="1" noChangeAspect="1"/>
+          </p:cNvSpPr>
+          <p:nvPr>
+            <p:ph type="sldImg" idx="2"/>
+          </p:nvPr>
+        </p:nvSpPr>
+        <p:spPr>
+          <a:xfrm>
+            <a:off x="-1947863" y="1143000"/>
+            <a:ext cx="10753726" cy="3086100"/>
+          </a:xfrm>
+          <a:prstGeom prst="rect">
+            <a:avLst/>
+          </a:prstGeom>
+          <a:noFill/>
+          <a:ln w="12700">
+            <a:solidFill>
+              <a:prstClr val="black"/>
+            </a:solidFill>
+          </a:ln>
+        </p:spPr>
+        <p:txBody>
+          <a:bodyPr vert="horz" lIns="91440" tIns="45720" rIns="91440" bIns="45720" rtlCol="0" anchor="ctr"/>
+          <a:lstStyle/>
+          <a:p>
+            <a:endParaRPr lang="en-US"/>
+          </a:p>
+        </p:txBody>
+      </p:sp>
+      <p:sp>
+        <p:nvSpPr>
+          <p:cNvPr id="5" name="Notes Placeholder 4"/>
+          <p:cNvSpPr>
+            <a:spLocks noGrp="1"/>
+          </p:cNvSpPr>
+          <p:nvPr>
+            <p:ph type="body" sz="quarter" idx="3"/>
+          </p:nvPr>
+        </p:nvSpPr>
+        <p:spPr>
+          <a:xfrm>
+            <a:off x="685800" y="4400550"/>
+            <a:ext cx="5486400" cy="3600450"/>
+          </a:xfrm>
+          <a:prstGeom prst="rect">
+            <a:avLst/>
+          </a:prstGeom>
+        </p:spPr>
+        <p:txBody>
+          <a:bodyPr vert="horz" lIns="91440" tIns="45720" rIns="91440" bIns="45720" rtlCol="0"/>
+          <a:lstStyle/>
+          <a:p>
+            <a:pPr lvl="0"/>
+            <a:r>
+              <a:rPr lang="en-US"/>
+              <a:t>Click to edit Master text styles</a:t>
+            </a:r>
+          </a:p>
+          <a:p>
+            <a:pPr lvl="1"/>
+            <a:r>
+              <a:rPr lang="en-US"/>
+              <a:t>Second level</a:t>
+            </a:r>
+          </a:p>
+          <a:p>
+            <a:pPr lvl="2"/>
+            <a:r>
+              <a:rPr lang="en-US"/>
+              <a:t>Third level</a:t>
+            </a:r>
+          </a:p>
+          <a:p>
+            <a:pPr lvl="3"/>
+            <a:r>
+              <a:rPr lang="en-US"/>
+              <a:t>Fourth level</a:t>
+            </a:r>
+          </a:p>
+          <a:p>
+            <a:pPr lvl="4"/>
+            <a:r>
+              <a:rPr lang="en-US"/>
+              <a:t>Fifth level</a:t>
+            </a:r>
+          </a:p>
+        </p:txBody>
+      </p:sp>
+      <p:sp>
+        <p:nvSpPr>
+          <p:cNvPr id="6" name="Footer Placeholder 5"/>
+          <p:cNvSpPr>
+            <a:spLocks noGrp="1"/>
+          </p:cNvSpPr>
+          <p:nvPr>
+            <p:ph type="ftr" sz="quarter" idx="4"/>
+          </p:nvPr>
+        </p:nvSpPr>
+        <p:spPr>
+          <a:xfrm>
+            <a:off x="0" y="8685213"/>
+            <a:ext cx="2971800" cy="458787"/>
+          </a:xfrm>
+          <a:prstGeom prst="rect">
+            <a:avLst/>
+          </a:prstGeom>
+        </p:spPr>
+        <p:txBody>
+          <a:bodyPr vert="horz" lIns="91440" tIns="45720" rIns="91440" bIns="45720" rtlCol="0" anchor="b"/>
+          <a:lstStyle>
+            <a:lvl1pPr algn="l">
+              <a:defRPr sz="1200"/>
+            </a:lvl1pPr>
+          </a:lstStyle>
+          <a:p>
+            <a:endParaRPr lang="en-US"/>
+          </a:p>
+        </p:txBody>
+      </p:sp>
+      <p:sp>
+        <p:nvSpPr>
+          <p:cNvPr id="7" name="Slide Number Placeholder 6"/>
+          <p:cNvSpPr>
+            <a:spLocks noGrp="1"/>
+          </p:cNvSpPr>
+          <p:nvPr>
+            <p:ph type="sldNum" sz="quarter" idx="5"/>
+          </p:nvPr>
+        </p:nvSpPr>
+        <p:spPr>
+          <a:xfrm>
+            <a:off x="3884613" y="8685213"/>
+            <a:ext cx="2971800" cy="458787"/>
+          </a:xfrm>
+          <a:prstGeom prst="rect">
+            <a:avLst/>
+          </a:prstGeom>
+        </p:spPr>
+        <p:txBody>
+          <a:bodyPr vert="horz" lIns="91440" tIns="45720" rIns="91440" bIns="45720" rtlCol="0" anchor="b"/>
+          <a:lstStyle>
+            <a:lvl1pPr algn="r">
+              <a:defRPr sz="1200"/>
+            </a:lvl1pPr>
+          </a:lstStyle>
+          <a:p>
+            <a:fld id="{90AA0E84-4C93-DF42-8319-FD1F43F49621}" type="slidenum">
+              <a:rPr lang="en-US" smtClean="0"/>
+              <a:t>‹#›</a:t>
+            </a:fld>
+            <a:endParaRPr lang="en-US"/>
+          </a:p>
+        </p:txBody>
+      </p:sp>
+    </p:spTree>
+    <p:extLst>
+      <p:ext uri="{BB962C8B-B14F-4D97-AF65-F5344CB8AC3E}">
+        <p14:creationId xmlns:p14="http://schemas.microsoft.com/office/powerpoint/2010/main" val="608510215"/>
+      </p:ext>
+    </p:extLst>
+  </p:cSld>
+  <p:clrMap bg1="lt1" tx1="dk1" bg2="lt2" tx2="dk2" accent1="accent1" accent2="accent2" accent3="accent3" accent4="accent4" accent5="accent5" accent6="accent6" hlink="hlink" folHlink="folHlink"/>
+  <p:notesStyle>
+    <a:lvl1pPr marL="0" algn="l" defTabSz="914400" rtl="0" eaLnBrk="1" latinLnBrk="0" hangingPunct="1">
+      <a:defRPr sz="1200" kern="1200">
+        <a:solidFill>
+          <a:schemeClr val="tx1"/>
+        </a:solidFill>
+        <a:latin typeface="+mn-lt"/>
+        <a:ea typeface="+mn-ea"/>
+        <a:cs typeface="+mn-cs"/>
+      </a:defRPr>
+    </a:lvl1pPr>
+    <a:lvl2pPr marL="457200" algn="l" defTabSz="914400" rtl="0" eaLnBrk="1" latinLnBrk="0" hangingPunct="1">
+      <a:defRPr sz="1200" kern="1200">
+        <a:solidFill>
+          <a:schemeClr val="tx1"/>
+        </a:solidFill>
+        <a:latin typeface="+mn-lt"/>
+        <a:ea typeface="+mn-ea"/>
+        <a:cs typeface="+mn-cs"/>
+      </a:defRPr>
+    </a:lvl2pPr>
+    <a:lvl3pPr marL="914400" algn="l" defTabSz="914400" rtl="0" eaLnBrk="1" latinLnBrk="0" hangingPunct="1">
+      <a:defRPr sz="1200" kern="1200">
+        <a:solidFill>
+          <a:schemeClr val="tx1"/>
+        </a:solidFill>
+        <a:latin typeface="+mn-lt"/>
+        <a:ea typeface="+mn-ea"/>
+        <a:cs typeface="+mn-cs"/>
+      </a:defRPr>
+    </a:lvl3pPr>
+    <a:lvl4pPr marL="1371600" algn="l" defTabSz="914400" rtl="0" eaLnBrk="1" latinLnBrk="0" hangingPunct="1">
+      <a:defRPr sz="1200" kern="1200">
+        <a:solidFill>
+          <a:schemeClr val="tx1"/>
+        </a:solidFill>
+        <a:latin typeface="+mn-lt"/>
+        <a:ea typeface="+mn-ea"/>
+        <a:cs typeface="+mn-cs"/>
+      </a:defRPr>
+    </a:lvl4pPr>
+    <a:lvl5pPr marL="1828800" algn="l" defTabSz="914400" rtl="0" eaLnBrk="1" latinLnBrk="0" hangingPunct="1">
+      <a:defRPr sz="1200" kern="1200">
+        <a:solidFill>
+          <a:schemeClr val="tx1"/>
+        </a:solidFill>
+        <a:latin typeface="+mn-lt"/>
+        <a:ea typeface="+mn-ea"/>
+        <a:cs typeface="+mn-cs"/>
+      </a:defRPr>
+    </a:lvl5pPr>
+    <a:lvl6pPr marL="2286000" algn="l" defTabSz="914400" rtl="0" eaLnBrk="1" latinLnBrk="0" hangingPunct="1">
+      <a:defRPr sz="1200" kern="1200">
+        <a:solidFill>
+          <a:schemeClr val="tx1"/>
+        </a:solidFill>
+        <a:latin typeface="+mn-lt"/>
+        <a:ea typeface="+mn-ea"/>
+        <a:cs typeface="+mn-cs"/>
+      </a:defRPr>
+    </a:lvl6pPr>
+    <a:lvl7pPr marL="2743200" algn="l" defTabSz="914400" rtl="0" eaLnBrk="1" latinLnBrk="0" hangingPunct="1">
+      <a:defRPr sz="1200" kern="1200">
+        <a:solidFill>
+          <a:schemeClr val="tx1"/>
+        </a:solidFill>
+        <a:latin typeface="+mn-lt"/>
+        <a:ea typeface="+mn-ea"/>
+        <a:cs typeface="+mn-cs"/>
+      </a:defRPr>
+    </a:lvl7pPr>
+    <a:lvl8pPr marL="3200400" algn="l" defTabSz="914400" rtl="0" eaLnBrk="1" latinLnBrk="0" hangingPunct="1">
+      <a:defRPr sz="1200" kern="1200">
+        <a:solidFill>
+          <a:schemeClr val="tx1"/>
+        </a:solidFill>
+        <a:latin typeface="+mn-lt"/>
+        <a:ea typeface="+mn-ea"/>
+        <a:cs typeface="+mn-cs"/>
+      </a:defRPr>
+    </a:lvl8pPr>
+    <a:lvl9pPr marL="3657600" algn="l" defTabSz="914400" rtl="0" eaLnBrk="1" latinLnBrk="0" hangingPunct="1">
+      <a:defRPr sz="1200" kern="1200">
+        <a:solidFill>
+          <a:schemeClr val="tx1"/>
+        </a:solidFill>
+        <a:latin typeface="+mn-lt"/>
+        <a:ea typeface="+mn-ea"/>
+        <a:cs typeface="+mn-cs"/>
+      </a:defRPr>
+    </a:lvl9pPr>
+  </p:notesStyle>
+</p:notesMaster>
+</file>
+
+<file path=ppt/notesSlides/notesSlide1.xml><?xml version="1.0" encoding="utf-8"?>
+<p:notes xmlns:a="http://schemas.openxmlformats.org/drawingml/2006/main" xmlns:r="http://schemas.openxmlformats.org/officeDocument/2006/relationships" xmlns:p="http://schemas.openxmlformats.org/presentationml/2006/main">
+  <p:cSld>
+    <p:spTree>
+      <p:nvGrpSpPr>
+        <p:cNvPr id="1" name=""/>
+        <p:cNvGrpSpPr/>
+        <p:nvPr/>
+      </p:nvGrpSpPr>
+      <p:grpSpPr>
+        <a:xfrm>
+          <a:off x="0" y="0"/>
+          <a:ext cx="0" cy="0"/>
+          <a:chOff x="0" y="0"/>
+          <a:chExt cx="0" cy="0"/>
+        </a:xfrm>
+      </p:grpSpPr>
+      <p:sp>
+        <p:nvSpPr>
+          <p:cNvPr id="2" name="Slide Image Placeholder 1"/>
+          <p:cNvSpPr>
+            <a:spLocks noGrp="1" noRot="1" noChangeAspect="1"/>
+          </p:cNvSpPr>
+          <p:nvPr>
+            <p:ph type="sldImg"/>
+          </p:nvPr>
+        </p:nvSpPr>
+        <p:spPr/>
+      </p:sp>
+      <p:sp>
+        <p:nvSpPr>
+          <p:cNvPr id="3" name="Notes Placeholder 2"/>
+          <p:cNvSpPr>
+            <a:spLocks noGrp="1"/>
+          </p:cNvSpPr>
+          <p:nvPr>
+            <p:ph type="body" idx="1"/>
+          </p:nvPr>
+        </p:nvSpPr>
+        <p:spPr/>
+        <p:txBody>
+          <a:bodyPr/>
+          <a:lstStyle/>
+          <a:p>
+            <a:endParaRPr lang="en-US" dirty="0"/>
+          </a:p>
+        </p:txBody>
+      </p:sp>
+      <p:sp>
+        <p:nvSpPr>
+          <p:cNvPr id="4" name="Slide Number Placeholder 3"/>
+          <p:cNvSpPr>
+            <a:spLocks noGrp="1"/>
+          </p:cNvSpPr>
+          <p:nvPr>
+            <p:ph type="sldNum" sz="quarter" idx="5"/>
+          </p:nvPr>
+        </p:nvSpPr>
+        <p:spPr/>
+        <p:txBody>
+          <a:bodyPr/>
+          <a:lstStyle/>
+          <a:p>
+            <a:fld id="{90AA0E84-4C93-DF42-8319-FD1F43F49621}" type="slidenum">
+              <a:rPr lang="en-US" smtClean="0"/>
+              <a:t>1</a:t>
+            </a:fld>
+            <a:endParaRPr lang="en-US"/>
+          </a:p>
+        </p:txBody>
+      </p:sp>
+    </p:spTree>
+    <p:extLst>
+      <p:ext uri="{BB962C8B-B14F-4D97-AF65-F5344CB8AC3E}">
+        <p14:creationId xmlns:p14="http://schemas.microsoft.com/office/powerpoint/2010/main" val="21506646"/>
+      </p:ext>
+    </p:extLst>
+  </p:cSld>
+  <p:clrMapOvr>
+    <a:masterClrMapping/>
+  </p:clrMapOvr>
+</p:notes>
+</file>
+
 <file path=ppt/slideLayouts/slideLayout1.xml><?xml version="1.0" encoding="utf-8"?>
 <p:sldLayout xmlns:a="http://schemas.openxmlformats.org/drawingml/2006/main" xmlns:r="http://schemas.openxmlformats.org/officeDocument/2006/relationships" xmlns:p="http://schemas.openxmlformats.org/presentationml/2006/main" type="title" preserve="1">
   <p:cSld name="Title Slide">
@@ -259,7 +695,7 @@
           <a:p>
             <a:fld id="{E33B7762-F530-8641-8C82-FC24CB528642}" type="datetimeFigureOut">
               <a:rPr lang="en-US" smtClean="0"/>
-              <a:t>9/21/26</a:t>
+              <a:t>9/23/26</a:t>
             </a:fld>
             <a:endParaRPr lang="en-US"/>
           </a:p>
@@ -457,7 +893,7 @@
           <a:p>
             <a:fld id="{E33B7762-F530-8641-8C82-FC24CB528642}" type="datetimeFigureOut">
               <a:rPr lang="en-US" smtClean="0"/>
-              <a:t>9/21/26</a:t>
+              <a:t>9/23/26</a:t>
             </a:fld>
             <a:endParaRPr lang="en-US"/>
           </a:p>
@@ -665,7 +1101,7 @@
           <a:p>
             <a:fld id="{E33B7762-F530-8641-8C82-FC24CB528642}" type="datetimeFigureOut">
               <a:rPr lang="en-US" smtClean="0"/>
-              <a:t>9/21/26</a:t>
+              <a:t>9/23/26</a:t>
             </a:fld>
             <a:endParaRPr lang="en-US"/>
           </a:p>
@@ -863,7 +1299,7 @@
           <a:p>
             <a:fld id="{E33B7762-F530-8641-8C82-FC24CB528642}" type="datetimeFigureOut">
               <a:rPr lang="en-US" smtClean="0"/>
-              <a:t>9/21/26</a:t>
+              <a:t>9/23/26</a:t>
             </a:fld>
             <a:endParaRPr lang="en-US"/>
           </a:p>
@@ -1138,7 +1574,7 @@
           <a:p>
             <a:fld id="{E33B7762-F530-8641-8C82-FC24CB528642}" type="datetimeFigureOut">
               <a:rPr lang="en-US" smtClean="0"/>
-              <a:t>9/21/26</a:t>
+              <a:t>9/23/26</a:t>
             </a:fld>
             <a:endParaRPr lang="en-US"/>
           </a:p>
@@ -1403,7 +1839,7 @@
           <a:p>
             <a:fld id="{E33B7762-F530-8641-8C82-FC24CB528642}" type="datetimeFigureOut">
               <a:rPr lang="en-US" smtClean="0"/>
-              <a:t>9/21/26</a:t>
+              <a:t>9/23/26</a:t>
             </a:fld>
             <a:endParaRPr lang="en-US"/>
           </a:p>
@@ -1815,7 +2251,7 @@
           <a:p>
             <a:fld id="{E33B7762-F530-8641-8C82-FC24CB528642}" type="datetimeFigureOut">
               <a:rPr lang="en-US" smtClean="0"/>
-              <a:t>9/21/26</a:t>
+              <a:t>9/23/26</a:t>
             </a:fld>
             <a:endParaRPr lang="en-US"/>
           </a:p>
@@ -1956,7 +2392,7 @@
           <a:p>
             <a:fld id="{E33B7762-F530-8641-8C82-FC24CB528642}" type="datetimeFigureOut">
               <a:rPr lang="en-US" smtClean="0"/>
-              <a:t>9/21/26</a:t>
+              <a:t>9/23/26</a:t>
             </a:fld>
             <a:endParaRPr lang="en-US"/>
           </a:p>
@@ -2069,7 +2505,7 @@
           <a:p>
             <a:fld id="{E33B7762-F530-8641-8C82-FC24CB528642}" type="datetimeFigureOut">
               <a:rPr lang="en-US" smtClean="0"/>
-              <a:t>9/21/26</a:t>
+              <a:t>9/23/26</a:t>
             </a:fld>
             <a:endParaRPr lang="en-US"/>
           </a:p>
@@ -2380,7 +2816,7 @@
           <a:p>
             <a:fld id="{E33B7762-F530-8641-8C82-FC24CB528642}" type="datetimeFigureOut">
               <a:rPr lang="en-US" smtClean="0"/>
-              <a:t>9/21/26</a:t>
+              <a:t>9/23/26</a:t>
             </a:fld>
             <a:endParaRPr lang="en-US"/>
           </a:p>
@@ -2668,7 +3104,7 @@
           <a:p>
             <a:fld id="{E33B7762-F530-8641-8C82-FC24CB528642}" type="datetimeFigureOut">
               <a:rPr lang="en-US" smtClean="0"/>
-              <a:t>9/21/26</a:t>
+              <a:t>9/23/26</a:t>
             </a:fld>
             <a:endParaRPr lang="en-US"/>
           </a:p>
@@ -2909,7 +3345,7 @@
           <a:p>
             <a:fld id="{E33B7762-F530-8641-8C82-FC24CB528642}" type="datetimeFigureOut">
               <a:rPr lang="en-US" smtClean="0"/>
-              <a:t>9/21/26</a:t>
+              <a:t>9/23/26</a:t>
             </a:fld>
             <a:endParaRPr lang="en-US"/>
           </a:p>
@@ -3328,700 +3764,31 @@
       </p:grpSpPr>
       <p:sp>
         <p:nvSpPr>
-          <p:cNvPr id="137" name="h_i shared trunk"/>
+          <p:cNvPr id="619" name="Rectangle 618">
+            <a:extLst>
+              <a:ext uri="{FF2B5EF4-FFF2-40B4-BE49-F238E27FC236}">
+                <a16:creationId xmlns:a16="http://schemas.microsoft.com/office/drawing/2014/main" id="{D13A3069-F6DF-2242-C991-B30CE529D5FC}"/>
+              </a:ext>
+            </a:extLst>
+          </p:cNvPr>
           <p:cNvSpPr/>
           <p:nvPr/>
         </p:nvSpPr>
         <p:spPr>
           <a:xfrm>
-            <a:off x="6987807" y="2455100"/>
-            <a:ext cx="276593" cy="13"/>
-          </a:xfrm>
-          <a:custGeom>
-            <a:avLst/>
-            <a:gdLst/>
-            <a:ahLst/>
-            <a:cxnLst/>
-            <a:rect l="0" t="0" r="r" b="b"/>
-            <a:pathLst>
-              <a:path w="276593" h="13" fill="none" stroke="1">
-                <a:moveTo>
-                  <a:pt x="0" y="0"/>
-                </a:moveTo>
-                <a:lnTo>
-                  <a:pt x="276593" y="0"/>
-                </a:lnTo>
-              </a:path>
-            </a:pathLst>
-          </a:custGeom>
-          <a:noFill/>
-          <a:ln w="22860">
-            <a:solidFill>
-              <a:srgbClr val="000000"/>
-            </a:solidFill>
-            <a:prstDash val="solid"/>
-            <a:round/>
-          </a:ln>
-        </p:spPr>
-      </p:sp>
-      <p:sp>
-        <p:nvSpPr>
-          <p:cNvPr id="138" name="h_i parallel head bus"/>
-          <p:cNvSpPr/>
-          <p:nvPr/>
-        </p:nvSpPr>
-        <p:spPr>
-          <a:xfrm>
-            <a:off x="7264400" y="2230145"/>
-            <a:ext cx="2324100" cy="1160755"/>
-          </a:xfrm>
-          <a:custGeom>
-            <a:avLst/>
-            <a:gdLst/>
-            <a:ahLst/>
-            <a:cxnLst/>
-            <a:rect l="0" t="0" r="r" b="b"/>
-            <a:pathLst>
-              <a:path w="2324100" h="1160755" fill="none" stroke="1">
-                <a:moveTo>
-                  <a:pt x="0" y="0"/>
-                </a:moveTo>
-                <a:lnTo>
-                  <a:pt x="0" y="1160755"/>
-                </a:lnTo>
-                <a:lnTo>
-                  <a:pt x="2324100" y="1160755"/>
-                </a:lnTo>
-              </a:path>
-            </a:pathLst>
-          </a:custGeom>
-          <a:noFill/>
-          <a:ln w="22860">
-            <a:solidFill>
-              <a:srgbClr val="000000"/>
-            </a:solidFill>
-            <a:prstDash val="solid"/>
-            <a:round/>
-          </a:ln>
-        </p:spPr>
-      </p:sp>
-      <p:sp>
-        <p:nvSpPr>
-          <p:cNvPr id="139" name="h_i to ICBHI native head"/>
-          <p:cNvSpPr/>
-          <p:nvPr/>
-        </p:nvSpPr>
-        <p:spPr>
-          <a:xfrm>
-            <a:off x="7264400" y="2230145"/>
-            <a:ext cx="351028" cy="13"/>
-          </a:xfrm>
-          <a:custGeom>
-            <a:avLst/>
-            <a:gdLst/>
-            <a:ahLst/>
-            <a:cxnLst/>
-            <a:rect l="0" t="0" r="r" b="b"/>
-            <a:pathLst>
-              <a:path w="351028" h="13" fill="none" stroke="1">
-                <a:moveTo>
-                  <a:pt x="0" y="0"/>
-                </a:moveTo>
-                <a:lnTo>
-                  <a:pt x="351028" y="0"/>
-                </a:lnTo>
-              </a:path>
-            </a:pathLst>
-          </a:custGeom>
-          <a:noFill/>
-          <a:ln w="22860">
-            <a:solidFill>
-              <a:srgbClr val="000000"/>
-            </a:solidFill>
-            <a:prstDash val="solid"/>
-            <a:round/>
-            <a:tailEnd type="triangle" w="sm" len="sm"/>
-          </a:ln>
-        </p:spPr>
-      </p:sp>
-      <p:sp>
-        <p:nvSpPr>
-          <p:cNvPr id="140" name="h_i to SPRSound native head"/>
-          <p:cNvSpPr/>
-          <p:nvPr/>
-        </p:nvSpPr>
-        <p:spPr>
-          <a:xfrm>
-            <a:off x="7264400" y="2770530"/>
-            <a:ext cx="351028" cy="13"/>
-          </a:xfrm>
-          <a:custGeom>
-            <a:avLst/>
-            <a:gdLst/>
-            <a:ahLst/>
-            <a:cxnLst/>
-            <a:rect l="0" t="0" r="r" b="b"/>
-            <a:pathLst>
-              <a:path w="351028" h="13" fill="none" stroke="1">
-                <a:moveTo>
-                  <a:pt x="0" y="0"/>
-                </a:moveTo>
-                <a:lnTo>
-                  <a:pt x="351028" y="0"/>
-                </a:lnTo>
-              </a:path>
-            </a:pathLst>
-          </a:custGeom>
-          <a:noFill/>
-          <a:ln w="22860">
-            <a:solidFill>
-              <a:srgbClr val="000000"/>
-            </a:solidFill>
-            <a:prstDash val="solid"/>
-            <a:round/>
-            <a:tailEnd type="triangle" w="sm" len="sm"/>
-          </a:ln>
-        </p:spPr>
-      </p:sp>
-      <p:sp>
-        <p:nvSpPr>
-          <p:cNvPr id="141" name="h_i to Crackle auxiliary head"/>
-          <p:cNvSpPr/>
-          <p:nvPr/>
-        </p:nvSpPr>
-        <p:spPr>
-          <a:xfrm>
-            <a:off x="8191500" y="3390900"/>
-            <a:ext cx="13" cy="88900"/>
-          </a:xfrm>
-          <a:custGeom>
-            <a:avLst/>
-            <a:gdLst/>
-            <a:ahLst/>
-            <a:cxnLst/>
-            <a:rect l="0" t="0" r="r" b="b"/>
-            <a:pathLst>
-              <a:path w="13" h="88900" fill="none" stroke="1">
-                <a:moveTo>
-                  <a:pt x="0" y="0"/>
-                </a:moveTo>
-                <a:lnTo>
-                  <a:pt x="0" y="88900"/>
-                </a:lnTo>
-              </a:path>
-            </a:pathLst>
-          </a:custGeom>
-          <a:noFill/>
-          <a:ln w="22860">
-            <a:solidFill>
-              <a:srgbClr val="000000"/>
-            </a:solidFill>
-            <a:prstDash val="solid"/>
-            <a:round/>
-            <a:tailEnd type="triangle" w="sm" len="sm"/>
-          </a:ln>
-        </p:spPr>
-      </p:sp>
-      <p:sp>
-        <p:nvSpPr>
-          <p:cNvPr id="142" name="h_i to Wheeze auxiliary head"/>
-          <p:cNvSpPr/>
-          <p:nvPr/>
-        </p:nvSpPr>
-        <p:spPr>
-          <a:xfrm>
-            <a:off x="9588500" y="3390900"/>
-            <a:ext cx="13" cy="88900"/>
-          </a:xfrm>
-          <a:custGeom>
-            <a:avLst/>
-            <a:gdLst/>
-            <a:ahLst/>
-            <a:cxnLst/>
-            <a:rect l="0" t="0" r="r" b="b"/>
-            <a:pathLst>
-              <a:path w="13" h="88900" fill="none" stroke="1">
-                <a:moveTo>
-                  <a:pt x="0" y="0"/>
-                </a:moveTo>
-                <a:lnTo>
-                  <a:pt x="0" y="88900"/>
-                </a:lnTo>
-              </a:path>
-            </a:pathLst>
-          </a:custGeom>
-          <a:noFill/>
-          <a:ln w="22860">
-            <a:solidFill>
-              <a:srgbClr val="000000"/>
-            </a:solidFill>
-            <a:prstDash val="solid"/>
-            <a:round/>
-            <a:tailEnd type="triangle" w="sm" len="sm"/>
-          </a:ln>
-        </p:spPr>
-      </p:sp>
-      <p:sp>
-        <p:nvSpPr>
-          <p:cNvPr id="143" name="Shared h_i branch"/>
-          <p:cNvSpPr/>
-          <p:nvPr/>
-        </p:nvSpPr>
-        <p:spPr>
-          <a:xfrm>
-            <a:off x="7245350" y="2436050"/>
-            <a:ext cx="38100" cy="38100"/>
-          </a:xfrm>
-          <a:prstGeom prst="ellipse">
-            <a:avLst/>
-          </a:prstGeom>
-          <a:solidFill>
-            <a:srgbClr val="000000"/>
-          </a:solidFill>
-          <a:ln>
-            <a:noFill/>
-          </a:ln>
-        </p:spPr>
-      </p:sp>
-      <p:sp>
-        <p:nvSpPr>
-          <p:cNvPr id="144" name="Shared h_i branch"/>
-          <p:cNvSpPr/>
-          <p:nvPr/>
-        </p:nvSpPr>
-        <p:spPr>
-          <a:xfrm>
-            <a:off x="7245350" y="2751480"/>
-            <a:ext cx="38100" cy="38100"/>
-          </a:xfrm>
-          <a:prstGeom prst="ellipse">
-            <a:avLst/>
-          </a:prstGeom>
-          <a:solidFill>
-            <a:srgbClr val="000000"/>
-          </a:solidFill>
-          <a:ln>
-            <a:noFill/>
-          </a:ln>
-        </p:spPr>
-      </p:sp>
-      <p:sp>
-        <p:nvSpPr>
-          <p:cNvPr id="145" name="Shared h_i branch"/>
-          <p:cNvSpPr/>
-          <p:nvPr/>
-        </p:nvSpPr>
-        <p:spPr>
-          <a:xfrm>
-            <a:off x="8172450" y="3371850"/>
-            <a:ext cx="38100" cy="38100"/>
-          </a:xfrm>
-          <a:prstGeom prst="ellipse">
-            <a:avLst/>
-          </a:prstGeom>
-          <a:solidFill>
-            <a:srgbClr val="000000"/>
-          </a:solidFill>
-          <a:ln>
-            <a:noFill/>
-          </a:ln>
-        </p:spPr>
-      </p:sp>
-      <p:sp>
-        <p:nvSpPr>
-          <p:cNvPr id="146" name="ICBHI head to native ICBHI output"/>
-          <p:cNvSpPr/>
-          <p:nvPr/>
-        </p:nvSpPr>
-        <p:spPr>
-          <a:xfrm>
-            <a:off x="9520428" y="2230145"/>
-            <a:ext cx="1448816" cy="13"/>
-          </a:xfrm>
-          <a:custGeom>
-            <a:avLst/>
-            <a:gdLst/>
-            <a:ahLst/>
-            <a:cxnLst/>
-            <a:rect l="0" t="0" r="r" b="b"/>
-            <a:pathLst>
-              <a:path w="1448816" h="13" fill="none" stroke="1">
-                <a:moveTo>
-                  <a:pt x="0" y="0"/>
-                </a:moveTo>
-                <a:lnTo>
-                  <a:pt x="1448816" y="0"/>
-                </a:lnTo>
-              </a:path>
-            </a:pathLst>
-          </a:custGeom>
-          <a:noFill/>
-          <a:ln w="22860">
-            <a:solidFill>
-              <a:srgbClr val="000000"/>
-            </a:solidFill>
-            <a:prstDash val="solid"/>
-            <a:round/>
-            <a:tailEnd type="triangle" w="sm" len="sm"/>
-          </a:ln>
-        </p:spPr>
-      </p:sp>
-      <p:sp>
-        <p:nvSpPr>
-          <p:cNvPr id="147" name="ICBHI-only external readout bus"/>
-          <p:cNvSpPr/>
-          <p:nvPr/>
-        </p:nvSpPr>
-        <p:spPr>
-          <a:xfrm>
-            <a:off x="10782300" y="2230145"/>
-            <a:ext cx="13" cy="1245684"/>
-          </a:xfrm>
-          <a:custGeom>
-            <a:avLst/>
-            <a:gdLst/>
-            <a:ahLst/>
-            <a:cxnLst/>
-            <a:rect l="0" t="0" r="r" b="b"/>
-            <a:pathLst>
-              <a:path w="13" h="1245684" fill="none" stroke="1">
-                <a:moveTo>
-                  <a:pt x="0" y="0"/>
-                </a:moveTo>
-                <a:lnTo>
-                  <a:pt x="0" y="1245684"/>
-                </a:lnTo>
-              </a:path>
-            </a:pathLst>
-          </a:custGeom>
-          <a:noFill/>
-          <a:ln w="22860">
-            <a:solidFill>
-              <a:srgbClr val="000000"/>
-            </a:solidFill>
-            <a:prstDash val="solid"/>
-            <a:round/>
-          </a:ln>
-        </p:spPr>
-      </p:sp>
-      <p:sp>
-        <p:nvSpPr>
-          <p:cNvPr id="148" name="ICBHI head to KAUH output"/>
-          <p:cNvSpPr/>
-          <p:nvPr/>
-        </p:nvSpPr>
-        <p:spPr>
-          <a:xfrm>
-            <a:off x="10782300" y="3475830"/>
-            <a:ext cx="186944" cy="13"/>
-          </a:xfrm>
-          <a:custGeom>
-            <a:avLst/>
-            <a:gdLst/>
-            <a:ahLst/>
-            <a:cxnLst/>
-            <a:rect l="0" t="0" r="r" b="b"/>
-            <a:pathLst>
-              <a:path w="186944" h="13" fill="none" stroke="1">
-                <a:moveTo>
-                  <a:pt x="0" y="0"/>
-                </a:moveTo>
-                <a:lnTo>
-                  <a:pt x="186944" y="0"/>
-                </a:lnTo>
-              </a:path>
-            </a:pathLst>
-          </a:custGeom>
-          <a:noFill/>
-          <a:ln w="22860">
-            <a:solidFill>
-              <a:srgbClr val="000000"/>
-            </a:solidFill>
-            <a:prstDash val="solid"/>
-            <a:round/>
-            <a:tailEnd type="triangle" w="sm" len="sm"/>
-          </a:ln>
-        </p:spPr>
-      </p:sp>
-      <p:sp>
-        <p:nvSpPr>
-          <p:cNvPr id="149" name="ICBHI head to HF output"/>
-          <p:cNvSpPr/>
-          <p:nvPr/>
-        </p:nvSpPr>
-        <p:spPr>
-          <a:xfrm>
-            <a:off x="10782300" y="2845204"/>
-            <a:ext cx="186944" cy="13"/>
-          </a:xfrm>
-          <a:custGeom>
-            <a:avLst/>
-            <a:gdLst/>
-            <a:ahLst/>
-            <a:cxnLst/>
-            <a:rect l="0" t="0" r="r" b="b"/>
-            <a:pathLst>
-              <a:path w="186944" h="13" fill="none" stroke="1">
-                <a:moveTo>
-                  <a:pt x="0" y="0"/>
-                </a:moveTo>
-                <a:lnTo>
-                  <a:pt x="186944" y="0"/>
-                </a:lnTo>
-              </a:path>
-            </a:pathLst>
-          </a:custGeom>
-          <a:noFill/>
-          <a:ln w="22860">
-            <a:solidFill>
-              <a:srgbClr val="000000"/>
-            </a:solidFill>
-            <a:prstDash val="solid"/>
-            <a:round/>
-            <a:tailEnd type="triangle" w="sm" len="sm"/>
-          </a:ln>
-        </p:spPr>
-      </p:sp>
-      <p:sp>
-        <p:nvSpPr>
-          <p:cNvPr id="150" name="ICBHI output branch"/>
-          <p:cNvSpPr/>
-          <p:nvPr/>
-        </p:nvSpPr>
-        <p:spPr>
-          <a:xfrm>
-            <a:off x="10763250" y="2211095"/>
-            <a:ext cx="38100" cy="38100"/>
-          </a:xfrm>
-          <a:prstGeom prst="ellipse">
-            <a:avLst/>
-          </a:prstGeom>
-          <a:solidFill>
-            <a:srgbClr val="000000"/>
-          </a:solidFill>
-          <a:ln>
-            <a:noFill/>
-          </a:ln>
-        </p:spPr>
-      </p:sp>
-      <p:sp>
-        <p:nvSpPr>
-          <p:cNvPr id="151" name="ICBHI output branch"/>
-          <p:cNvSpPr/>
-          <p:nvPr/>
-        </p:nvSpPr>
-        <p:spPr>
-          <a:xfrm>
-            <a:off x="10763250" y="2826154"/>
-            <a:ext cx="38100" cy="38100"/>
-          </a:xfrm>
-          <a:prstGeom prst="ellipse">
-            <a:avLst/>
-          </a:prstGeom>
-          <a:solidFill>
-            <a:srgbClr val="000000"/>
-          </a:solidFill>
-          <a:ln>
-            <a:noFill/>
-          </a:ln>
-        </p:spPr>
-      </p:sp>
-      <p:sp>
-        <p:nvSpPr>
-          <p:cNvPr id="152" name="Separate SPRSound output route"/>
-          <p:cNvSpPr/>
-          <p:nvPr/>
-        </p:nvSpPr>
-        <p:spPr>
-          <a:xfrm>
-            <a:off x="9520428" y="2770530"/>
-            <a:ext cx="1448816" cy="1335925"/>
-          </a:xfrm>
-          <a:custGeom>
-            <a:avLst/>
-            <a:gdLst/>
-            <a:ahLst/>
-            <a:cxnLst/>
-            <a:rect l="0" t="0" r="r" b="b"/>
-            <a:pathLst>
-              <a:path w="1448816" h="1335925" fill="none" stroke="1">
-                <a:moveTo>
-                  <a:pt x="0" y="0"/>
-                </a:moveTo>
-                <a:lnTo>
-                  <a:pt x="1045972" y="0"/>
-                </a:lnTo>
-                <a:lnTo>
-                  <a:pt x="1045972" y="1335925"/>
-                </a:lnTo>
-                <a:lnTo>
-                  <a:pt x="1448816" y="1335925"/>
-                </a:lnTo>
-              </a:path>
-            </a:pathLst>
-          </a:custGeom>
-          <a:noFill/>
-          <a:ln w="22860">
-            <a:solidFill>
-              <a:srgbClr val="000000"/>
-            </a:solidFill>
-            <a:prstDash val="solid"/>
-            <a:round/>
-            <a:tailEnd type="triangle" w="sm" len="sm"/>
-          </a:ln>
-        </p:spPr>
-      </p:sp>
-      <p:sp>
-        <p:nvSpPr>
-          <p:cNvPr id="153" name="Native task heads to classification loss"/>
-          <p:cNvSpPr/>
-          <p:nvPr/>
-        </p:nvSpPr>
-        <p:spPr>
-          <a:xfrm>
-            <a:off x="9652000" y="3043936"/>
-            <a:ext cx="723900" cy="1159764"/>
-          </a:xfrm>
-          <a:custGeom>
-            <a:avLst/>
-            <a:gdLst/>
-            <a:ahLst/>
-            <a:cxnLst/>
-            <a:rect l="0" t="0" r="r" b="b"/>
-            <a:pathLst>
-              <a:path w="723900" h="1159764" fill="none" stroke="1">
-                <a:moveTo>
-                  <a:pt x="0" y="0"/>
-                </a:moveTo>
-                <a:lnTo>
-                  <a:pt x="723900" y="0"/>
-                </a:lnTo>
-                <a:lnTo>
-                  <a:pt x="723900" y="1159764"/>
-                </a:lnTo>
-                <a:lnTo>
-                  <a:pt x="635000" y="1159764"/>
-                </a:lnTo>
-              </a:path>
-            </a:pathLst>
-          </a:custGeom>
-          <a:noFill/>
-          <a:ln w="19050">
-            <a:solidFill>
-              <a:schemeClr val="accent6">
-                <a:lumMod val="50000"/>
-              </a:schemeClr>
-            </a:solidFill>
-            <a:prstDash val="dash"/>
-            <a:round/>
-            <a:tailEnd type="triangle" w="sm" len="sm"/>
-          </a:ln>
-        </p:spPr>
-      </p:sp>
-      <p:sp>
-        <p:nvSpPr>
-          <p:cNvPr id="154" name="Crackle auxiliary to training loss only"/>
-          <p:cNvSpPr/>
-          <p:nvPr/>
-        </p:nvSpPr>
-        <p:spPr>
-          <a:xfrm>
-            <a:off x="8191500" y="3797300"/>
-            <a:ext cx="13" cy="177800"/>
-          </a:xfrm>
-          <a:custGeom>
-            <a:avLst/>
-            <a:gdLst/>
-            <a:ahLst/>
-            <a:cxnLst/>
-            <a:rect l="0" t="0" r="r" b="b"/>
-            <a:pathLst>
-              <a:path w="13" h="177800" fill="none" stroke="1">
-                <a:moveTo>
-                  <a:pt x="0" y="0"/>
-                </a:moveTo>
-                <a:lnTo>
-                  <a:pt x="0" y="177800"/>
-                </a:lnTo>
-              </a:path>
-            </a:pathLst>
-          </a:custGeom>
-          <a:noFill/>
-          <a:ln w="19050">
-            <a:solidFill>
-              <a:schemeClr val="accent6">
-                <a:lumMod val="50000"/>
-              </a:schemeClr>
-            </a:solidFill>
-            <a:prstDash val="dash"/>
-            <a:round/>
-            <a:tailEnd type="triangle" w="sm" len="sm"/>
-          </a:ln>
-        </p:spPr>
-      </p:sp>
-      <p:sp>
-        <p:nvSpPr>
-          <p:cNvPr id="155" name="Wheeze auxiliary to training loss only"/>
-          <p:cNvSpPr/>
-          <p:nvPr/>
-        </p:nvSpPr>
-        <p:spPr>
-          <a:xfrm>
-            <a:off x="9588500" y="3797300"/>
-            <a:ext cx="13" cy="177800"/>
-          </a:xfrm>
-          <a:custGeom>
-            <a:avLst/>
-            <a:gdLst/>
-            <a:ahLst/>
-            <a:cxnLst/>
-            <a:rect l="0" t="0" r="r" b="b"/>
-            <a:pathLst>
-              <a:path w="13" h="177800" fill="none" stroke="1">
-                <a:moveTo>
-                  <a:pt x="0" y="0"/>
-                </a:moveTo>
-                <a:lnTo>
-                  <a:pt x="0" y="177800"/>
-                </a:lnTo>
-              </a:path>
-            </a:pathLst>
-          </a:custGeom>
-          <a:noFill/>
-          <a:ln w="19050">
-            <a:solidFill>
-              <a:schemeClr val="accent6">
-                <a:lumMod val="50000"/>
-              </a:schemeClr>
-            </a:solidFill>
-            <a:prstDash val="dash"/>
-            <a:round/>
-            <a:tailEnd type="triangle" w="sm" len="sm"/>
-          </a:ln>
-        </p:spPr>
-      </p:sp>
-      <p:sp>
-        <p:nvSpPr>
-          <p:cNvPr id="135" name="Auxiliary heads boundary"/>
-          <p:cNvSpPr/>
-          <p:nvPr/>
-        </p:nvSpPr>
-        <p:spPr>
-          <a:xfrm>
-            <a:off x="7493000" y="3422650"/>
-            <a:ext cx="2794000" cy="425450"/>
+            <a:off x="12509319" y="768361"/>
+            <a:ext cx="3412553" cy="3326090"/>
           </a:xfrm>
           <a:prstGeom prst="rect">
             <a:avLst/>
           </a:prstGeom>
-          <a:noFill/>
-          <a:ln w="28575">
-            <a:solidFill>
-              <a:schemeClr val="accent6">
-                <a:lumMod val="75000"/>
-              </a:schemeClr>
-            </a:solidFill>
-            <a:prstDash val="sysDash"/>
+          <a:solidFill>
+            <a:srgbClr val="DCEAF7">
+              <a:alpha val="61176"/>
+            </a:srgbClr>
+          </a:solidFill>
+          <a:ln>
+            <a:noFill/>
           </a:ln>
         </p:spPr>
         <p:style>
@@ -4051,10 +3818,10 @@
       </p:sp>
       <p:sp>
         <p:nvSpPr>
-          <p:cNvPr id="85" name="Rectangle 84">
+          <p:cNvPr id="81" name="Rectangle 80">
             <a:extLst>
               <a:ext uri="{FF2B5EF4-FFF2-40B4-BE49-F238E27FC236}">
-                <a16:creationId xmlns:a16="http://schemas.microsoft.com/office/drawing/2014/main" id="{38DA66CA-D03E-A7DE-DDCF-0726C84C6C9B}"/>
+                <a16:creationId xmlns:a16="http://schemas.microsoft.com/office/drawing/2014/main" id="{394C3EFC-498F-3A8E-4D8F-DF4AF6F26350}"/>
               </a:ext>
             </a:extLst>
           </p:cNvPr>
@@ -4063,20 +3830,19 @@
         </p:nvSpPr>
         <p:spPr>
           <a:xfrm>
-            <a:off x="7493000" y="1960118"/>
-            <a:ext cx="2159000" cy="1083818"/>
+            <a:off x="6083261" y="1851265"/>
+            <a:ext cx="2717800" cy="926573"/>
           </a:xfrm>
           <a:prstGeom prst="rect">
             <a:avLst/>
           </a:prstGeom>
-          <a:noFill/>
-          <a:ln w="28575">
-            <a:solidFill>
-              <a:schemeClr val="accent6">
-                <a:lumMod val="75000"/>
-              </a:schemeClr>
-            </a:solidFill>
-            <a:prstDash val="sysDash"/>
+          <a:solidFill>
+            <a:srgbClr val="D8F2CF">
+              <a:alpha val="47059"/>
+            </a:srgbClr>
+          </a:solidFill>
+          <a:ln>
+            <a:noFill/>
           </a:ln>
         </p:spPr>
         <p:style>
@@ -4106,6 +3872,106 @@
       </p:sp>
       <p:sp>
         <p:nvSpPr>
+          <p:cNvPr id="56" name="Rectangle 55">
+            <a:extLst>
+              <a:ext uri="{FF2B5EF4-FFF2-40B4-BE49-F238E27FC236}">
+                <a16:creationId xmlns:a16="http://schemas.microsoft.com/office/drawing/2014/main" id="{5A20A57B-416D-CBD4-80B3-6933241E0059}"/>
+              </a:ext>
+            </a:extLst>
+          </p:cNvPr>
+          <p:cNvSpPr/>
+          <p:nvPr/>
+        </p:nvSpPr>
+        <p:spPr>
+          <a:xfrm>
+            <a:off x="6096000" y="643326"/>
+            <a:ext cx="2717800" cy="926573"/>
+          </a:xfrm>
+          <a:prstGeom prst="rect">
+            <a:avLst/>
+          </a:prstGeom>
+          <a:solidFill>
+            <a:srgbClr val="D8F2CF">
+              <a:alpha val="47059"/>
+            </a:srgbClr>
+          </a:solidFill>
+          <a:ln>
+            <a:noFill/>
+          </a:ln>
+        </p:spPr>
+        <p:style>
+          <a:lnRef idx="2">
+            <a:schemeClr val="accent1">
+              <a:shade val="15000"/>
+            </a:schemeClr>
+          </a:lnRef>
+          <a:fillRef idx="1">
+            <a:schemeClr val="accent1"/>
+          </a:fillRef>
+          <a:effectRef idx="0">
+            <a:schemeClr val="accent1"/>
+          </a:effectRef>
+          <a:fontRef idx="minor">
+            <a:schemeClr val="lt1"/>
+          </a:fontRef>
+        </p:style>
+        <p:txBody>
+          <a:bodyPr rtlCol="0" anchor="ctr"/>
+          <a:lstStyle/>
+          <a:p>
+            <a:pPr algn="ctr"/>
+            <a:endParaRPr lang="en-US"/>
+          </a:p>
+        </p:txBody>
+      </p:sp>
+      <p:sp>
+        <p:nvSpPr>
+          <p:cNvPr id="200" name="Audio to BEATs"/>
+          <p:cNvSpPr/>
+          <p:nvPr/>
+        </p:nvSpPr>
+        <p:spPr>
+          <a:xfrm>
+            <a:off x="1892287" y="1212853"/>
+            <a:ext cx="13" cy="673100"/>
+          </a:xfrm>
+          <a:custGeom>
+            <a:avLst/>
+            <a:gdLst/>
+            <a:ahLst/>
+            <a:cxnLst/>
+            <a:rect l="0" t="0" r="r" b="b"/>
+            <a:pathLst>
+              <a:path w="13" h="673100" fill="none">
+                <a:moveTo>
+                  <a:pt x="0" y="0"/>
+                </a:moveTo>
+                <a:lnTo>
+                  <a:pt x="0" y="673100"/>
+                </a:lnTo>
+              </a:path>
+            </a:pathLst>
+          </a:custGeom>
+          <a:noFill/>
+          <a:ln w="28575">
+            <a:solidFill>
+              <a:srgbClr val="000000"/>
+            </a:solidFill>
+            <a:prstDash val="solid"/>
+            <a:round/>
+            <a:tailEnd type="arrow" w="med" len="med"/>
+          </a:ln>
+        </p:spPr>
+        <p:txBody>
+          <a:bodyPr/>
+          <a:lstStyle/>
+          <a:p>
+            <a:endParaRPr lang="en-US"/>
+          </a:p>
+        </p:txBody>
+      </p:sp>
+      <p:sp>
+        <p:nvSpPr>
           <p:cNvPr id="4" name="Rectangle 3">
             <a:extLst>
               <a:ext uri="{FF2B5EF4-FFF2-40B4-BE49-F238E27FC236}">
@@ -4118,8 +3984,8 @@
         </p:nvSpPr>
         <p:spPr>
           <a:xfrm>
-            <a:off x="5232574" y="2181851"/>
-            <a:ext cx="1755227" cy="546538"/>
+            <a:off x="3390900" y="1155700"/>
+            <a:ext cx="2057400" cy="558800"/>
           </a:xfrm>
           <a:prstGeom prst="rect">
             <a:avLst/>
@@ -4187,124 +4053,6 @@
           </a:p>
         </p:txBody>
       </p:sp>
-      <p:sp>
-        <p:nvSpPr>
-          <p:cNvPr id="5" name="Trapezoid 4">
-            <a:extLst>
-              <a:ext uri="{FF2B5EF4-FFF2-40B4-BE49-F238E27FC236}">
-                <a16:creationId xmlns:a16="http://schemas.microsoft.com/office/drawing/2014/main" id="{E88512CF-F65D-A594-8804-E4CF7DAE210E}"/>
-              </a:ext>
-            </a:extLst>
-          </p:cNvPr>
-          <p:cNvSpPr/>
-          <p:nvPr/>
-        </p:nvSpPr>
-        <p:spPr>
-          <a:xfrm rot="5400000">
-            <a:off x="3174122" y="1897261"/>
-            <a:ext cx="1228135" cy="1429409"/>
-          </a:xfrm>
-          <a:prstGeom prst="trapezoid">
-            <a:avLst>
-              <a:gd name="adj" fmla="val 23288"/>
-            </a:avLst>
-          </a:prstGeom>
-          <a:solidFill>
-            <a:schemeClr val="bg2"/>
-          </a:solidFill>
-          <a:ln w="19050">
-            <a:solidFill>
-              <a:srgbClr val="3E6D85"/>
-            </a:solidFill>
-          </a:ln>
-        </p:spPr>
-        <p:style>
-          <a:lnRef idx="2">
-            <a:schemeClr val="accent1">
-              <a:shade val="15000"/>
-            </a:schemeClr>
-          </a:lnRef>
-          <a:fillRef idx="1">
-            <a:schemeClr val="accent1"/>
-          </a:fillRef>
-          <a:effectRef idx="0">
-            <a:schemeClr val="accent1"/>
-          </a:effectRef>
-          <a:fontRef idx="minor">
-            <a:schemeClr val="lt1"/>
-          </a:fontRef>
-        </p:style>
-        <p:txBody>
-          <a:bodyPr rtlCol="0" anchor="ctr"/>
-          <a:lstStyle/>
-          <a:p>
-            <a:pPr algn="ctr"/>
-            <a:endParaRPr lang="en-US" dirty="0">
-              <a:latin typeface="Arial" panose="020B0604020202020204" pitchFamily="34" charset="0"/>
-              <a:cs typeface="Arial" panose="020B0604020202020204" pitchFamily="34" charset="0"/>
-            </a:endParaRPr>
-          </a:p>
-        </p:txBody>
-      </p:sp>
-      <p:sp>
-        <p:nvSpPr>
-          <p:cNvPr id="8" name="TextBox 7">
-            <a:extLst>
-              <a:ext uri="{FF2B5EF4-FFF2-40B4-BE49-F238E27FC236}">
-                <a16:creationId xmlns:a16="http://schemas.microsoft.com/office/drawing/2014/main" id="{0D7D9726-5393-837A-CC69-6739933CDFA6}"/>
-              </a:ext>
-            </a:extLst>
-          </p:cNvPr>
-          <p:cNvSpPr txBox="1"/>
-          <p:nvPr/>
-        </p:nvSpPr>
-        <p:spPr>
-          <a:xfrm>
-            <a:off x="3073485" y="2150353"/>
-            <a:ext cx="1128835" cy="861774"/>
-          </a:xfrm>
-          <a:prstGeom prst="rect">
-            <a:avLst/>
-          </a:prstGeom>
-          <a:noFill/>
-        </p:spPr>
-        <p:txBody>
-          <a:bodyPr wrap="none" rtlCol="0">
-            <a:spAutoFit/>
-          </a:bodyPr>
-          <a:lstStyle/>
-          <a:p>
-            <a:r>
-              <a:rPr lang="en-US" b="1" dirty="0">
-                <a:latin typeface="Arial" panose="020B0604020202020204" pitchFamily="34" charset="0"/>
-                <a:cs typeface="Arial" panose="020B0604020202020204" pitchFamily="34" charset="0"/>
-              </a:rPr>
-              <a:t>BEATs </a:t>
-            </a:r>
-          </a:p>
-          <a:p>
-            <a:r>
-              <a:rPr lang="en-US" b="1" dirty="0">
-                <a:latin typeface="Arial" panose="020B0604020202020204" pitchFamily="34" charset="0"/>
-                <a:cs typeface="Arial" panose="020B0604020202020204" pitchFamily="34" charset="0"/>
-              </a:rPr>
-              <a:t>Encoder</a:t>
-            </a:r>
-          </a:p>
-          <a:p>
-            <a:r>
-              <a:rPr lang="en-US" sz="1400" dirty="0">
-                <a:solidFill>
-                  <a:srgbClr val="3E6D85"/>
-                </a:solidFill>
-                <a:latin typeface="Arial" panose="020B0604020202020204" pitchFamily="34" charset="0"/>
-                <a:cs typeface="Arial" panose="020B0604020202020204" pitchFamily="34" charset="0"/>
-              </a:rPr>
-              <a:t>(Pretrained)</a:t>
-            </a:r>
-          </a:p>
-        </p:txBody>
-      </p:sp>
       <mc:AlternateContent xmlns:mc="http://schemas.openxmlformats.org/markup-compatibility/2006" xmlns:a14="http://schemas.microsoft.com/office/drawing/2010/main">
         <mc:Choice Requires="a14">
           <p:sp>
@@ -4321,8 +4069,8 @@
             </p:nvSpPr>
             <p:spPr>
               <a:xfrm>
-                <a:off x="5232574" y="3006913"/>
-                <a:ext cx="1755227" cy="546538"/>
+                <a:off x="3390900" y="2454839"/>
+                <a:ext cx="2057400" cy="558800"/>
               </a:xfrm>
               <a:prstGeom prst="rect">
                 <a:avLst/>
@@ -4425,16 +4173,16 @@
             </p:nvSpPr>
             <p:spPr>
               <a:xfrm>
-                <a:off x="5232574" y="3006913"/>
-                <a:ext cx="1755227" cy="546538"/>
+                <a:off x="3390900" y="2454839"/>
+                <a:ext cx="2057400" cy="558800"/>
               </a:xfrm>
               <a:prstGeom prst="rect">
                 <a:avLst/>
               </a:prstGeom>
               <a:blipFill>
-                <a:blip r:embed="rId2"/>
+                <a:blip r:embed="rId3"/>
                 <a:stretch>
-                  <a:fillRect t="-6522" b="-8696"/>
+                  <a:fillRect t="-4255" b="-8511"/>
                 </a:stretch>
               </a:blipFill>
               <a:ln>
@@ -4472,8 +4220,8 @@
         </p:nvSpPr>
         <p:spPr>
           <a:xfrm>
-            <a:off x="7615428" y="2007616"/>
-            <a:ext cx="1905000" cy="445059"/>
+            <a:off x="6210300" y="685800"/>
+            <a:ext cx="2489200" cy="374650"/>
           </a:xfrm>
           <a:prstGeom prst="rect">
             <a:avLst/>
@@ -4509,20 +4257,38 @@
           </a:fontRef>
         </p:style>
         <p:txBody>
-          <a:bodyPr rtlCol="0" anchor="ctr" wrap="none">
+          <a:bodyPr wrap="none" rtlCol="0" anchor="ctr">
             <a:noAutofit/>
           </a:bodyPr>
           <a:lstStyle/>
           <a:p>
             <a:pPr algn="ctr"/>
             <a:r>
-              <a:rPr lang="en-US" sz="1400" b="0" i="0">
+              <a:rPr lang="en-US" sz="1600" b="0" i="0" dirty="0">
                 <a:solidFill>
                   <a:srgbClr val="000000"/>
                 </a:solidFill>
                 <a:latin typeface="Arial"/>
               </a:rPr>
-              <a:t>ICBHI</a:t>
+              <a:t>ICBHI Native </a:t>
+            </a:r>
+            <a:r>
+              <a:rPr lang="en-US" sz="1600" dirty="0">
+                <a:solidFill>
+                  <a:srgbClr val="000000"/>
+                </a:solidFill>
+                <a:latin typeface="Arial"/>
+              </a:rPr>
+              <a:t>H</a:t>
+            </a:r>
+            <a:r>
+              <a:rPr lang="en-US" sz="1600" b="0" i="0" dirty="0">
+                <a:solidFill>
+                  <a:srgbClr val="000000"/>
+                </a:solidFill>
+                <a:latin typeface="Arial"/>
+              </a:rPr>
+              <a:t>ead</a:t>
             </a:r>
           </a:p>
         </p:txBody>
@@ -4541,8 +4307,8 @@
         </p:nvSpPr>
         <p:spPr>
           <a:xfrm>
-            <a:off x="7615428" y="2548001"/>
-            <a:ext cx="1905000" cy="445059"/>
+            <a:off x="6210300" y="1132841"/>
+            <a:ext cx="2489200" cy="365760"/>
           </a:xfrm>
           <a:prstGeom prst="rect">
             <a:avLst/>
@@ -4578,20 +4344,29 @@
           </a:fontRef>
         </p:style>
         <p:txBody>
-          <a:bodyPr rtlCol="0" anchor="ctr" wrap="none">
+          <a:bodyPr wrap="none" rtlCol="0" anchor="ctr">
             <a:noAutofit/>
           </a:bodyPr>
           <a:lstStyle/>
           <a:p>
             <a:pPr algn="ctr"/>
             <a:r>
-              <a:rPr lang="en-US" sz="1400" b="0" i="0">
+              <a:rPr lang="en-US" sz="1600" b="0" i="0" dirty="0" err="1">
                 <a:solidFill>
                   <a:srgbClr val="000000"/>
                 </a:solidFill>
                 <a:latin typeface="Arial"/>
               </a:rPr>
               <a:t>SPRSound</a:t>
+            </a:r>
+            <a:r>
+              <a:rPr lang="en-US" sz="1600" b="0" i="0" dirty="0">
+                <a:solidFill>
+                  <a:srgbClr val="000000"/>
+                </a:solidFill>
+                <a:latin typeface="Arial"/>
+              </a:rPr>
+              <a:t> Native Head</a:t>
             </a:r>
           </a:p>
         </p:txBody>
@@ -4612,8 +4387,8 @@
         </p:nvSpPr>
         <p:spPr>
           <a:xfrm>
-            <a:off x="904541" y="2420265"/>
-            <a:ext cx="1670707" cy="414133"/>
+            <a:off x="1117600" y="768361"/>
+            <a:ext cx="1676400" cy="419100"/>
           </a:xfrm>
           <a:custGeom>
             <a:avLst/>
@@ -5199,8 +4974,8 @@
         </p:nvSpPr>
         <p:spPr>
           <a:xfrm>
-            <a:off x="608943" y="2029912"/>
-            <a:ext cx="2261902" cy="369332"/>
+            <a:off x="914400" y="370173"/>
+            <a:ext cx="2260600" cy="368300"/>
           </a:xfrm>
           <a:prstGeom prst="rect">
             <a:avLst/>
@@ -5224,94 +4999,6 @@
           </a:p>
         </p:txBody>
       </p:sp>
-      <p:cxnSp>
-        <p:nvCxnSpPr>
-          <p:cNvPr id="19" name="Straight Arrow Connector 18">
-            <a:extLst>
-              <a:ext uri="{FF2B5EF4-FFF2-40B4-BE49-F238E27FC236}">
-                <a16:creationId xmlns:a16="http://schemas.microsoft.com/office/drawing/2014/main" id="{23628CDD-9697-1FF4-2341-6249F9A0B937}"/>
-              </a:ext>
-            </a:extLst>
-          </p:cNvPr>
-          <p:cNvCxnSpPr>
-            <a:cxnSpLocks/>
-          </p:cNvCxnSpPr>
-          <p:nvPr/>
-        </p:nvCxnSpPr>
-        <p:spPr>
-          <a:xfrm>
-            <a:off x="2616285" y="2599113"/>
-            <a:ext cx="457200" cy="0"/>
-          </a:xfrm>
-          <a:prstGeom prst="straightConnector1">
-            <a:avLst/>
-          </a:prstGeom>
-          <a:ln w="28575">
-            <a:solidFill>
-              <a:schemeClr val="tx1"/>
-            </a:solidFill>
-            <a:tailEnd type="triangle"/>
-          </a:ln>
-        </p:spPr>
-        <p:style>
-          <a:lnRef idx="2">
-            <a:schemeClr val="accent1"/>
-          </a:lnRef>
-          <a:fillRef idx="0">
-            <a:schemeClr val="accent1"/>
-          </a:fillRef>
-          <a:effectRef idx="1">
-            <a:schemeClr val="accent1"/>
-          </a:effectRef>
-          <a:fontRef idx="minor">
-            <a:schemeClr val="tx1"/>
-          </a:fontRef>
-        </p:style>
-      </p:cxnSp>
-      <p:cxnSp>
-        <p:nvCxnSpPr>
-          <p:cNvPr id="22" name="Straight Arrow Connector 21">
-            <a:extLst>
-              <a:ext uri="{FF2B5EF4-FFF2-40B4-BE49-F238E27FC236}">
-                <a16:creationId xmlns:a16="http://schemas.microsoft.com/office/drawing/2014/main" id="{8AD859DB-9C5D-0AE6-39CB-0DC2299AD2AA}"/>
-              </a:ext>
-            </a:extLst>
-          </p:cNvPr>
-          <p:cNvCxnSpPr>
-            <a:cxnSpLocks/>
-          </p:cNvCxnSpPr>
-          <p:nvPr/>
-        </p:nvCxnSpPr>
-        <p:spPr>
-          <a:xfrm>
-            <a:off x="4502894" y="2453566"/>
-            <a:ext cx="731520" cy="0"/>
-          </a:xfrm>
-          <a:prstGeom prst="straightConnector1">
-            <a:avLst/>
-          </a:prstGeom>
-          <a:ln w="28575">
-            <a:solidFill>
-              <a:schemeClr val="tx1"/>
-            </a:solidFill>
-            <a:tailEnd type="triangle"/>
-          </a:ln>
-        </p:spPr>
-        <p:style>
-          <a:lnRef idx="2">
-            <a:schemeClr val="accent1"/>
-          </a:lnRef>
-          <a:fillRef idx="0">
-            <a:schemeClr val="accent1"/>
-          </a:fillRef>
-          <a:effectRef idx="1">
-            <a:schemeClr val="accent1"/>
-          </a:effectRef>
-          <a:fontRef idx="minor">
-            <a:schemeClr val="tx1"/>
-          </a:fontRef>
-        </p:style>
-      </p:cxnSp>
       <p:sp>
         <p:nvSpPr>
           <p:cNvPr id="23" name="TextBox 22">
@@ -5326,8 +5013,8 @@
         </p:nvSpPr>
         <p:spPr>
           <a:xfrm>
-            <a:off x="7366000" y="1568171"/>
-            <a:ext cx="2413000" cy="369329"/>
+            <a:off x="6083300" y="298457"/>
+            <a:ext cx="2743200" cy="365760"/>
           </a:xfrm>
           <a:prstGeom prst="rect">
             <a:avLst/>
@@ -5335,20 +5022,22 @@
           <a:noFill/>
         </p:spPr>
         <p:txBody>
-          <a:bodyPr wrap="none" rtlCol="0" anchor="ctr" tIns="0" bIns="0">
+          <a:bodyPr wrap="none" tIns="0" bIns="0" rtlCol="0" anchor="b">
             <a:noAutofit/>
           </a:bodyPr>
           <a:lstStyle/>
           <a:p>
             <a:pPr algn="ctr"/>
             <a:r>
-              <a:rPr lang="en-US" sz="1600" b="1" i="0">
+              <a:rPr lang="en-US" b="1" i="0" dirty="0">
                 <a:solidFill>
-                  <a:srgbClr val="000000"/>
+                  <a:schemeClr val="accent6">
+                    <a:lumMod val="50000"/>
+                  </a:schemeClr>
                 </a:solidFill>
                 <a:latin typeface="Arial"/>
               </a:rPr>
-              <a:t>Native task heads</a:t>
+              <a:t>Task Heads</a:t>
             </a:r>
           </a:p>
         </p:txBody>
@@ -5367,8 +5056,8 @@
         </p:nvSpPr>
         <p:spPr>
           <a:xfrm>
-            <a:off x="702588" y="3781135"/>
-            <a:ext cx="1860894" cy="523220"/>
+            <a:off x="861065" y="3601757"/>
+            <a:ext cx="1827231" cy="477054"/>
           </a:xfrm>
           <a:prstGeom prst="rect">
             <a:avLst/>
@@ -5376,7 +5065,7 @@
           <a:noFill/>
         </p:spPr>
         <p:txBody>
-          <a:bodyPr wrap="none" rtlCol="0">
+          <a:bodyPr wrap="none" bIns="0" rtlCol="0">
             <a:spAutoFit/>
           </a:bodyPr>
           <a:lstStyle/>
@@ -5392,16 +5081,6 @@
               <a:t>∗:</a:t>
             </a:r>
             <a:r>
-              <a:rPr lang="en-US" altLang="zh-CN" sz="1400" dirty="0">
-                <a:solidFill>
-                  <a:schemeClr val="bg2">
-                    <a:lumMod val="50000"/>
-                  </a:schemeClr>
-                </a:solidFill>
-              </a:rPr>
-              <a:t> </a:t>
-            </a:r>
-            <a:r>
               <a:rPr lang="en-US" sz="1400" dirty="0">
                 <a:solidFill>
                   <a:schemeClr val="bg2">
@@ -5424,16 +5103,6 @@
               <a:t>#:</a:t>
             </a:r>
             <a:r>
-              <a:rPr lang="en-US" altLang="zh-CN" sz="1400" dirty="0">
-                <a:solidFill>
-                  <a:schemeClr val="bg2">
-                    <a:lumMod val="50000"/>
-                  </a:schemeClr>
-                </a:solidFill>
-              </a:rPr>
-              <a:t> </a:t>
-            </a:r>
-            <a:r>
               <a:rPr lang="en-US" sz="1400" dirty="0">
                 <a:solidFill>
                   <a:schemeClr val="bg2">
@@ -5442,144 +5111,6 @@
                 </a:solidFill>
               </a:rPr>
               <a:t>Inference Only</a:t>
-            </a:r>
-          </a:p>
-        </p:txBody>
-      </p:sp>
-      <p:sp>
-        <p:nvSpPr>
-          <p:cNvPr id="28" name="Rectangle 27">
-            <a:extLst>
-              <a:ext uri="{FF2B5EF4-FFF2-40B4-BE49-F238E27FC236}">
-                <a16:creationId xmlns:a16="http://schemas.microsoft.com/office/drawing/2014/main" id="{14554C06-8AD1-9F3E-F2A5-EF79EDFA84CE}"/>
-              </a:ext>
-            </a:extLst>
-          </p:cNvPr>
-          <p:cNvSpPr/>
-          <p:nvPr/>
-        </p:nvSpPr>
-        <p:spPr>
-          <a:xfrm>
-            <a:off x="7556500" y="3479800"/>
-            <a:ext cx="1270000" cy="317500"/>
-          </a:xfrm>
-          <a:prstGeom prst="rect">
-            <a:avLst/>
-          </a:prstGeom>
-          <a:solidFill>
-            <a:schemeClr val="accent6">
-              <a:lumMod val="20000"/>
-              <a:lumOff val="80000"/>
-            </a:schemeClr>
-          </a:solidFill>
-          <a:ln>
-            <a:solidFill>
-              <a:schemeClr val="accent6">
-                <a:lumMod val="50000"/>
-              </a:schemeClr>
-            </a:solidFill>
-          </a:ln>
-        </p:spPr>
-        <p:style>
-          <a:lnRef idx="2">
-            <a:schemeClr val="accent1">
-              <a:shade val="15000"/>
-            </a:schemeClr>
-          </a:lnRef>
-          <a:fillRef idx="1">
-            <a:schemeClr val="accent1"/>
-          </a:fillRef>
-          <a:effectRef idx="0">
-            <a:schemeClr val="accent1"/>
-          </a:effectRef>
-          <a:fontRef idx="minor">
-            <a:schemeClr val="lt1"/>
-          </a:fontRef>
-        </p:style>
-        <p:txBody>
-          <a:bodyPr rtlCol="0" anchor="ctr" wrap="none">
-            <a:noAutofit/>
-          </a:bodyPr>
-          <a:lstStyle/>
-          <a:p>
-            <a:pPr algn="ctr"/>
-            <a:r>
-              <a:rPr lang="en-US" sz="1400" b="0" i="0">
-                <a:solidFill>
-                  <a:srgbClr val="000000"/>
-                </a:solidFill>
-                <a:latin typeface="Arial"/>
-              </a:rPr>
-              <a:t>C: Crackle</a:t>
-            </a:r>
-          </a:p>
-        </p:txBody>
-      </p:sp>
-      <p:sp xmlns:a14="http://schemas.microsoft.com/office/drawing/2010/main">
-        <p:nvSpPr>
-          <p:cNvPr id="29" name="Rectangle 28">
-            <a:extLst>
-              <a:ext uri="{FF2B5EF4-FFF2-40B4-BE49-F238E27FC236}">
-                <a16:creationId xmlns:a16="http://schemas.microsoft.com/office/drawing/2014/main" id="{A3B33EB4-1B8D-E213-9AB1-D0A54E790C74}"/>
-              </a:ext>
-            </a:extLst>
-          </p:cNvPr>
-          <p:cNvSpPr/>
-          <p:nvPr/>
-        </p:nvSpPr>
-        <p:spPr>
-          <a:xfrm>
-            <a:off x="8953500" y="3479800"/>
-            <a:ext cx="1270000" cy="317500"/>
-          </a:xfrm>
-          <a:prstGeom prst="rect">
-            <a:avLst/>
-          </a:prstGeom>
-          <a:solidFill>
-            <a:schemeClr val="accent6">
-              <a:lumMod val="20000"/>
-              <a:lumOff val="80000"/>
-            </a:schemeClr>
-          </a:solidFill>
-          <a:ln>
-            <a:solidFill>
-              <a:schemeClr val="accent6">
-                <a:lumMod val="50000"/>
-              </a:schemeClr>
-            </a:solidFill>
-          </a:ln>
-        </p:spPr>
-        <p:style>
-          <a:lnRef idx="2">
-            <a:schemeClr val="accent1">
-              <a:shade val="15000"/>
-            </a:schemeClr>
-          </a:lnRef>
-          <a:fillRef idx="1">
-            <a:schemeClr val="accent1"/>
-          </a:fillRef>
-          <a:effectRef idx="0">
-            <a:schemeClr val="accent1"/>
-          </a:effectRef>
-          <a:fontRef idx="minor">
-            <a:schemeClr val="lt1"/>
-          </a:fontRef>
-        </p:style>
-        <p:txBody>
-          <a:bodyPr rtlCol="0" anchor="ctr" wrap="none">
-            <a:noAutofit/>
-          </a:bodyPr>
-          <a:lstStyle/>
-          <a:p>
-            <a:pPr algn="ctr"/>
-            <a:r>
-              <a:rPr lang="en-US" sz="1400" b="0" i="0">
-                <a:solidFill>
-                  <a:srgbClr val="000000"/>
-                </a:solidFill>
-                <a:latin typeface="Arial"/>
-              </a:rPr>
-              <a:t>W: Wheeze</a:t>
             </a:r>
           </a:p>
         </p:txBody>
@@ -5600,8 +5131,8 @@
             </p:nvSpPr>
             <p:spPr>
               <a:xfrm>
-                <a:off x="10969285" y="1939512"/>
-                <a:ext cx="3052171" cy="550131"/>
+                <a:off x="12596205" y="873125"/>
+                <a:ext cx="3251200" cy="640080"/>
               </a:xfrm>
               <a:prstGeom prst="rect">
                 <a:avLst/>
@@ -5646,7 +5177,7 @@
                     <m:sSup>
                       <m:sSupPr>
                         <m:ctrlPr>
-                          <a:rPr lang="en-US" sz="1400" b="1" i="0" dirty="0" smtClean="0">
+                          <a:rPr lang="en-US" sz="1600" b="1" i="0" dirty="0" smtClean="0">
                             <a:solidFill>
                               <a:schemeClr val="tx1"/>
                             </a:solidFill>
@@ -5660,7 +5191,7 @@
                           <m:rPr>
                             <m:nor/>
                           </m:rPr>
-                          <a:rPr lang="en-US" sz="1400" b="1" i="0" dirty="0" smtClean="0">
+                          <a:rPr lang="en-US" sz="1600" b="1" i="0" dirty="0" smtClean="0">
                             <a:solidFill>
                               <a:schemeClr val="tx1"/>
                             </a:solidFill>
@@ -5672,7 +5203,7 @@
                       </m:e>
                       <m:sup>
                         <m:r>
-                          <a:rPr lang="en-US" sz="1400" b="1" i="1" smtClean="0">
+                          <a:rPr lang="en-US" sz="1600" b="1" i="1" smtClean="0">
                             <a:solidFill>
                               <a:schemeClr val="tx1"/>
                             </a:solidFill>
@@ -5686,7 +5217,7 @@
                   </m:oMath>
                 </a14:m>
                 <a:r>
-                  <a:rPr lang="en-US" sz="1400" dirty="0">
+                  <a:rPr lang="en-US" sz="1600" dirty="0">
                     <a:solidFill>
                       <a:schemeClr val="tx1"/>
                     </a:solidFill>
@@ -5698,7 +5229,7 @@
               </a:p>
               <a:p>
                 <a:r>
-                  <a:rPr lang="en-US" sz="1400" dirty="0">
+                  <a:rPr lang="en-US" sz="1600" dirty="0">
                     <a:solidFill>
                       <a:schemeClr val="tx1"/>
                     </a:solidFill>
@@ -5710,7 +5241,7 @@
                 <a14:m>
                   <m:oMath xmlns:m="http://schemas.openxmlformats.org/officeDocument/2006/math">
                     <m:r>
-                      <a:rPr lang="en-US" sz="1400" i="1" smtClean="0">
+                      <a:rPr lang="en-US" sz="1600" i="1" smtClean="0">
                         <a:solidFill>
                           <a:schemeClr val="tx1"/>
                         </a:solidFill>
@@ -5723,7 +5254,7 @@
                   </m:oMath>
                 </a14:m>
                 <a:r>
-                  <a:rPr lang="en-US" sz="1400" dirty="0">
+                  <a:rPr lang="en-US" sz="1600" dirty="0">
                     <a:solidFill>
                       <a:schemeClr val="tx1"/>
                     </a:solidFill>
@@ -5735,7 +5266,7 @@
                 <a14:m>
                   <m:oMath xmlns:m="http://schemas.openxmlformats.org/officeDocument/2006/math">
                     <m:r>
-                      <a:rPr lang="en-US" sz="1400" i="1" smtClean="0">
+                      <a:rPr lang="en-US" sz="1600" i="1" smtClean="0">
                         <a:solidFill>
                           <a:schemeClr val="tx1"/>
                         </a:solidFill>
@@ -5748,7 +5279,7 @@
                   </m:oMath>
                 </a14:m>
                 <a:r>
-                  <a:rPr lang="en-US" sz="1400" dirty="0">
+                  <a:rPr lang="en-US" sz="1600" dirty="0">
                     <a:solidFill>
                       <a:schemeClr val="tx1"/>
                     </a:solidFill>
@@ -5760,7 +5291,7 @@
                 <a14:m>
                   <m:oMath xmlns:m="http://schemas.openxmlformats.org/officeDocument/2006/math">
                     <m:r>
-                      <a:rPr lang="en-US" sz="1400" i="1" smtClean="0">
+                      <a:rPr lang="en-US" sz="1600" i="1" smtClean="0">
                         <a:solidFill>
                           <a:schemeClr val="tx1"/>
                         </a:solidFill>
@@ -5773,7 +5304,7 @@
                   </m:oMath>
                 </a14:m>
                 <a:r>
-                  <a:rPr lang="en-US" sz="1400" dirty="0">
+                  <a:rPr lang="en-US" sz="1600" dirty="0">
                     <a:solidFill>
                       <a:schemeClr val="tx1"/>
                     </a:solidFill>
@@ -5803,16 +5334,16 @@
             </p:nvSpPr>
             <p:spPr>
               <a:xfrm>
-                <a:off x="10969285" y="1939512"/>
-                <a:ext cx="3052171" cy="550131"/>
+                <a:off x="12596205" y="873125"/>
+                <a:ext cx="3251200" cy="640080"/>
               </a:xfrm>
               <a:prstGeom prst="rect">
                 <a:avLst/>
               </a:prstGeom>
               <a:blipFill>
-                <a:blip r:embed="rId5"/>
+                <a:blip r:embed="rId4"/>
                 <a:stretch>
-                  <a:fillRect l="-413" b="-4348"/>
+                  <a:fillRect l="-775" r="-775" b="-5660"/>
                 </a:stretch>
               </a:blipFill>
               <a:ln>
@@ -5853,8 +5384,8 @@
         </p:nvSpPr>
         <p:spPr>
           <a:xfrm>
-            <a:off x="10826576" y="1568171"/>
-            <a:ext cx="2997974" cy="369332"/>
+            <a:off x="12596205" y="340507"/>
+            <a:ext cx="3251200" cy="323165"/>
           </a:xfrm>
           <a:prstGeom prst="rect">
             <a:avLst/>
@@ -5862,7 +5393,7 @@
           <a:noFill/>
         </p:spPr>
         <p:txBody>
-          <a:bodyPr wrap="square" rtlCol="0">
+          <a:bodyPr wrap="square" bIns="0" rtlCol="0" anchor="b">
             <a:spAutoFit/>
           </a:bodyPr>
           <a:lstStyle/>
@@ -5870,6 +5401,12 @@
             <a:pPr algn="ctr"/>
             <a:r>
               <a:rPr lang="en-US" b="1" dirty="0">
+                <a:solidFill>
+                  <a:schemeClr val="tx2">
+                    <a:lumMod val="90000"/>
+                    <a:lumOff val="10000"/>
+                  </a:schemeClr>
+                </a:solidFill>
                 <a:latin typeface="Arial" panose="020B0604020202020204" pitchFamily="34" charset="0"/>
                 <a:cs typeface="Arial" panose="020B0604020202020204" pitchFamily="34" charset="0"/>
               </a:rPr>
@@ -5894,8 +5431,8 @@
             </p:nvSpPr>
             <p:spPr>
               <a:xfrm>
-                <a:off x="10969285" y="3831390"/>
-                <a:ext cx="3052171" cy="550131"/>
+                <a:off x="12596205" y="3329744"/>
+                <a:ext cx="3251200" cy="640080"/>
               </a:xfrm>
               <a:prstGeom prst="rect">
                 <a:avLst/>
@@ -5940,7 +5477,7 @@
                     <m:sSup>
                       <m:sSupPr>
                         <m:ctrlPr>
-                          <a:rPr lang="en-US" sz="1400" b="1" i="0" dirty="0" smtClean="0">
+                          <a:rPr lang="en-US" sz="1600" b="1" i="0" dirty="0">
                             <a:solidFill>
                               <a:schemeClr val="tx1"/>
                             </a:solidFill>
@@ -5954,67 +5491,57 @@
                           <m:rPr>
                             <m:nor/>
                           </m:rPr>
-                          <a:rPr lang="en-US" sz="1400" b="1" i="0" dirty="0" smtClean="0">
+                          <a:rPr lang="en-US" sz="1600" b="1" i="0" dirty="0">
                             <a:solidFill>
                               <a:schemeClr val="tx1"/>
                             </a:solidFill>
                             <a:latin typeface="Arial" panose="020B0604020202020204" pitchFamily="34" charset="0"/>
                             <a:cs typeface="Arial" panose="020B0604020202020204" pitchFamily="34" charset="0"/>
                           </a:rPr>
-                          <m:t>SPRSound</m:t>
+                          <m:t>HF test</m:t>
                         </m:r>
                       </m:e>
                       <m:sup>
                         <m:r>
-                          <a:rPr lang="en-US" sz="1400" b="1" i="1" smtClean="0">
+                          <a:rPr lang="en-US" sz="1600" b="1" i="1" dirty="0">
                             <a:solidFill>
                               <a:schemeClr val="tx1"/>
                             </a:solidFill>
                             <a:latin typeface="Cambria Math" panose="02040503050406030204" pitchFamily="18" charset="0"/>
                             <a:cs typeface="Arial" panose="020B0604020202020204" pitchFamily="34" charset="0"/>
                           </a:rPr>
-                          <m:t>∗</m:t>
+                          <m:t>#</m:t>
                         </m:r>
                       </m:sup>
                     </m:sSup>
-                    <m:r>
-                      <a:rPr lang="en-US" sz="1400" b="1" i="1" smtClean="0">
-                        <a:solidFill>
-                          <a:schemeClr val="tx1"/>
-                        </a:solidFill>
-                        <a:latin typeface="Cambria Math" panose="02040503050406030204" pitchFamily="18" charset="0"/>
-                        <a:cs typeface="Arial" panose="020B0604020202020204" pitchFamily="34" charset="0"/>
-                      </a:rPr>
-                      <m:t> </m:t>
-                    </m:r>
                   </m:oMath>
                 </a14:m>
                 <a:r>
-                  <a:rPr lang="en-US" sz="1400" dirty="0">
+                  <a:rPr lang="en-US" sz="1600" dirty="0">
                     <a:solidFill>
                       <a:schemeClr val="tx1"/>
                     </a:solidFill>
                     <a:latin typeface="Arial" panose="020B0604020202020204" pitchFamily="34" charset="0"/>
                     <a:cs typeface="Arial" panose="020B0604020202020204" pitchFamily="34" charset="0"/>
                   </a:rPr>
-                  <a:t>: </a:t>
+                  <a:t>:</a:t>
                 </a:r>
               </a:p>
               <a:p>
                 <a:r>
-                  <a:rPr lang="en-US" sz="1400" dirty="0">
+                  <a:rPr lang="en-US" sz="1600">
                     <a:solidFill>
                       <a:schemeClr val="tx1"/>
                     </a:solidFill>
                     <a:latin typeface="Arial" panose="020B0604020202020204" pitchFamily="34" charset="0"/>
                     <a:cs typeface="Arial" panose="020B0604020202020204" pitchFamily="34" charset="0"/>
                   </a:rPr>
-                  <a:t>Normal </a:t>
+                  <a:t>Wheeze </a:t>
                 </a:r>
                 <a14:m>
                   <m:oMath xmlns:m="http://schemas.openxmlformats.org/officeDocument/2006/math">
                     <m:r>
-                      <a:rPr lang="en-US" sz="1400" i="1" smtClean="0">
+                      <a:rPr lang="en-US" sz="1600" i="1">
                         <a:solidFill>
                           <a:schemeClr val="tx1"/>
                         </a:solidFill>
@@ -6027,14 +5554,14 @@
                   </m:oMath>
                 </a14:m>
                 <a:r>
-                  <a:rPr lang="en-US" sz="1400" dirty="0">
+                  <a:rPr lang="en-US" sz="1600" dirty="0">
                     <a:solidFill>
                       <a:schemeClr val="tx1"/>
                     </a:solidFill>
                     <a:latin typeface="Arial" panose="020B0604020202020204" pitchFamily="34" charset="0"/>
                     <a:cs typeface="Arial" panose="020B0604020202020204" pitchFamily="34" charset="0"/>
                   </a:rPr>
-                  <a:t> Adventitious( Abnormal)</a:t>
+                  <a:t> Both</a:t>
                 </a:r>
               </a:p>
             </p:txBody>
@@ -6057,16 +5584,16 @@
             </p:nvSpPr>
             <p:spPr>
               <a:xfrm>
-                <a:off x="10969285" y="3831390"/>
-                <a:ext cx="3052171" cy="550131"/>
+                <a:off x="12596205" y="3329744"/>
+                <a:ext cx="3251200" cy="640080"/>
               </a:xfrm>
               <a:prstGeom prst="rect">
                 <a:avLst/>
               </a:prstGeom>
               <a:blipFill>
-                <a:blip r:embed="rId6"/>
+                <a:blip r:embed="rId5"/>
                 <a:stretch>
-                  <a:fillRect l="-413" b="-6667"/>
+                  <a:fillRect l="-775" b="-5660"/>
                 </a:stretch>
               </a:blipFill>
               <a:ln>
@@ -6093,8 +5620,8 @@
           </p:sp>
         </mc:Fallback>
       </mc:AlternateContent>
-      <mc:AlternateContent xmlns:mc="http://schemas.openxmlformats.org/markup-compatibility/2006">
-        <mc:Choice xmlns:a14="http://schemas.microsoft.com/office/drawing/2010/main" Requires="a14">
+      <mc:AlternateContent xmlns:mc="http://schemas.openxmlformats.org/markup-compatibility/2006" xmlns:a14="http://schemas.microsoft.com/office/drawing/2010/main">
+        <mc:Choice Requires="a14">
           <p:sp>
             <p:nvSpPr>
               <p:cNvPr id="33" name="Rectangle 32">
@@ -6109,8 +5636,8 @@
             </p:nvSpPr>
             <p:spPr>
               <a:xfrm>
-                <a:off x="10969285" y="2570138"/>
-                <a:ext cx="3052171" cy="550131"/>
+                <a:off x="12596205" y="1691998"/>
+                <a:ext cx="3251200" cy="640080"/>
               </a:xfrm>
               <a:prstGeom prst="rect">
                 <a:avLst/>
@@ -6155,7 +5682,7 @@
                     <m:sSup>
                       <m:sSupPr>
                         <m:ctrlPr>
-                          <a:rPr lang="en-US" sz="1400" b="1" i="0" dirty="0" smtClean="0">
+                          <a:rPr lang="en-US" sz="1600" b="1" i="0" dirty="0">
                             <a:solidFill>
                               <a:schemeClr val="tx1"/>
                             </a:solidFill>
@@ -6169,43 +5696,33 @@
                           <m:rPr>
                             <m:nor/>
                           </m:rPr>
-                          <a:rPr lang="en-US" sz="1400" b="1" i="0" dirty="0" smtClean="0">
+                          <a:rPr lang="en-US" sz="1600" b="1" i="0" dirty="0">
                             <a:solidFill>
                               <a:schemeClr val="tx1"/>
                             </a:solidFill>
                             <a:latin typeface="Arial" panose="020B0604020202020204" pitchFamily="34" charset="0"/>
                             <a:cs typeface="Arial" panose="020B0604020202020204" pitchFamily="34" charset="0"/>
                           </a:rPr>
-                          <m:t>HF test</m:t>
+                          <m:t>SPRSound</m:t>
                         </m:r>
                       </m:e>
                       <m:sup>
                         <m:r>
-                          <a:rPr lang="en-US" sz="1400" b="1" i="1" dirty="0" smtClean="0">
+                          <a:rPr lang="en-US" sz="1600" b="1" i="1">
                             <a:solidFill>
                               <a:schemeClr val="tx1"/>
                             </a:solidFill>
                             <a:latin typeface="Cambria Math" panose="02040503050406030204" pitchFamily="18" charset="0"/>
                             <a:cs typeface="Arial" panose="020B0604020202020204" pitchFamily="34" charset="0"/>
                           </a:rPr>
-                          <m:t>#</m:t>
+                          <m:t>∗</m:t>
                         </m:r>
                       </m:sup>
                     </m:sSup>
-                    <m:r>
-                      <a:rPr lang="en-US" sz="1400" b="1" i="1" smtClean="0">
-                        <a:solidFill>
-                          <a:schemeClr val="tx1"/>
-                        </a:solidFill>
-                        <a:latin typeface="Cambria Math" panose="02040503050406030204" pitchFamily="18" charset="0"/>
-                        <a:cs typeface="Arial" panose="020B0604020202020204" pitchFamily="34" charset="0"/>
-                      </a:rPr>
-                      <m:t> </m:t>
-                    </m:r>
                   </m:oMath>
                 </a14:m>
                 <a:r>
-                  <a:rPr lang="en-US" sz="1400" dirty="0">
+                  <a:rPr lang="en-US" sz="1600" dirty="0">
                     <a:solidFill>
                       <a:schemeClr val="tx1"/>
                     </a:solidFill>
@@ -6217,59 +5734,19 @@
               </a:p>
               <a:p>
                 <a:r>
-                  <a:rPr lang="en-US" sz="1400">
+                  <a:rPr lang="en-US" sz="1600" dirty="0">
                     <a:solidFill>
                       <a:schemeClr val="tx1"/>
                     </a:solidFill>
                     <a:latin typeface="Arial" panose="020B0604020202020204" pitchFamily="34" charset="0"/>
                     <a:cs typeface="Arial" panose="020B0604020202020204" pitchFamily="34" charset="0"/>
                   </a:rPr>
-                  <a:t>Wheeze(or Rhonchi</a:t>
-                </a:r>
-                <a:r>
-                  <a:rPr lang="en-US" altLang="zh-CN" sz="1400">
-                    <a:solidFill>
-                      <a:schemeClr val="tx1"/>
-                    </a:solidFill>
-                    <a:latin typeface="Arial" panose="020B0604020202020204" pitchFamily="34" charset="0"/>
-                    <a:cs typeface="Arial" panose="020B0604020202020204" pitchFamily="34" charset="0"/>
-                  </a:rPr>
-                  <a:t>/</a:t>
-                </a:r>
-                <a:r>
-                  <a:rPr lang="en-US" sz="1400">
-                    <a:solidFill>
-                      <a:schemeClr val="tx1"/>
-                    </a:solidFill>
-                    <a:latin typeface="Arial" panose="020B0604020202020204" pitchFamily="34" charset="0"/>
-                    <a:cs typeface="Arial" panose="020B0604020202020204" pitchFamily="34" charset="0"/>
-                  </a:rPr>
-                  <a:t>Stridor</a:t>
-                </a:r>
-                <a:r>
-                  <a:rPr lang="en-US" sz="1400" dirty="0">
-                    <a:solidFill>
-                      <a:schemeClr val="tx1"/>
-                    </a:solidFill>
-                    <a:latin typeface="Arial" panose="020B0604020202020204" pitchFamily="34" charset="0"/>
-                    <a:cs typeface="Arial" panose="020B0604020202020204" pitchFamily="34" charset="0"/>
-                  </a:rPr>
-                  <a:t>)</a:t>
-                </a:r>
-                <a:r>
-                  <a:rPr lang="en-US" sz="1400" dirty="0">
-                    <a:solidFill>
-                      <a:schemeClr val="tx1"/>
-                    </a:solidFill>
-                    <a:ea typeface="Cambria Math" panose="02040503050406030204" pitchFamily="18" charset="0"/>
-                    <a:cs typeface="Arial" panose="020B0604020202020204" pitchFamily="34" charset="0"/>
-                  </a:rPr>
-                  <a:t> </a:t>
+                  <a:t>Normal </a:t>
                 </a:r>
                 <a14:m>
                   <m:oMath xmlns:m="http://schemas.openxmlformats.org/officeDocument/2006/math">
                     <m:r>
-                      <a:rPr lang="en-US" sz="1400" i="1">
+                      <a:rPr lang="en-US" sz="1600" i="1">
                         <a:solidFill>
                           <a:schemeClr val="tx1"/>
                         </a:solidFill>
@@ -6282,20 +5759,40 @@
                   </m:oMath>
                 </a14:m>
                 <a:r>
-                  <a:rPr lang="en-US" sz="1400" dirty="0">
+                  <a:rPr lang="en-US" sz="1600" dirty="0">
                     <a:solidFill>
                       <a:schemeClr val="tx1"/>
                     </a:solidFill>
                     <a:latin typeface="Arial" panose="020B0604020202020204" pitchFamily="34" charset="0"/>
                     <a:cs typeface="Arial" panose="020B0604020202020204" pitchFamily="34" charset="0"/>
                   </a:rPr>
-                  <a:t> Other</a:t>
+                  <a:t> Adventitious</a:t>
+                </a:r>
+                <a:r>
+                  <a:rPr lang="zh-CN" altLang="en-US" sz="1600" dirty="0">
+                    <a:solidFill>
+                      <a:schemeClr val="tx1"/>
+                    </a:solidFill>
+                    <a:latin typeface="Arial" panose="020B0604020202020204" pitchFamily="34" charset="0"/>
+                    <a:cs typeface="Arial" panose="020B0604020202020204" pitchFamily="34" charset="0"/>
+                  </a:rPr>
+                  <a:t> </a:t>
+                </a:r>
+                <a:r>
+                  <a:rPr lang="en-US" sz="1600" dirty="0">
+                    <a:solidFill>
+                      <a:schemeClr val="tx1"/>
+                    </a:solidFill>
+                    <a:latin typeface="Arial" panose="020B0604020202020204" pitchFamily="34" charset="0"/>
+                    <a:cs typeface="Arial" panose="020B0604020202020204" pitchFamily="34" charset="0"/>
+                  </a:rPr>
+                  <a:t>(Abnormal)</a:t>
                 </a:r>
               </a:p>
             </p:txBody>
           </p:sp>
         </mc:Choice>
-        <mc:Fallback>
+        <mc:Fallback xmlns="">
           <p:sp>
             <p:nvSpPr>
               <p:cNvPr id="33" name="Rectangle 32">
@@ -6312,16 +5809,16 @@
             </p:nvSpPr>
             <p:spPr>
               <a:xfrm>
-                <a:off x="10969285" y="2570138"/>
-                <a:ext cx="3052171" cy="550131"/>
+                <a:off x="12596205" y="1691998"/>
+                <a:ext cx="3251200" cy="640080"/>
               </a:xfrm>
               <a:prstGeom prst="rect">
                 <a:avLst/>
               </a:prstGeom>
               <a:blipFill>
-                <a:blip r:embed="rId7"/>
+                <a:blip r:embed="rId6"/>
                 <a:stretch>
-                  <a:fillRect l="-413" b="-4348"/>
+                  <a:fillRect l="-775" b="-7547"/>
                 </a:stretch>
               </a:blipFill>
               <a:ln>
@@ -6364,8 +5861,8 @@
             </p:nvSpPr>
             <p:spPr>
               <a:xfrm>
-                <a:off x="10969285" y="3200764"/>
-                <a:ext cx="3052171" cy="550131"/>
+                <a:off x="12596205" y="2510871"/>
+                <a:ext cx="3251200" cy="640080"/>
               </a:xfrm>
               <a:prstGeom prst="rect">
                 <a:avLst/>
@@ -6410,7 +5907,7 @@
                     <m:sSup>
                       <m:sSupPr>
                         <m:ctrlPr>
-                          <a:rPr lang="en-US" sz="1400" b="1" i="0" dirty="0" smtClean="0">
+                          <a:rPr lang="en-US" sz="1600" b="1" i="0" dirty="0" smtClean="0">
                             <a:solidFill>
                               <a:schemeClr val="tx1"/>
                             </a:solidFill>
@@ -6424,7 +5921,7 @@
                           <m:rPr>
                             <m:nor/>
                           </m:rPr>
-                          <a:rPr lang="en-US" sz="1400" b="1" i="0" dirty="0" smtClean="0">
+                          <a:rPr lang="en-US" sz="1600" b="1" i="0" dirty="0" smtClean="0">
                             <a:solidFill>
                               <a:schemeClr val="tx1"/>
                             </a:solidFill>
@@ -6436,7 +5933,7 @@
                       </m:e>
                       <m:sup>
                         <m:r>
-                          <a:rPr lang="en-US" sz="1400" b="1" i="1" dirty="0" smtClean="0">
+                          <a:rPr lang="en-US" sz="1600" b="1" i="1" dirty="0" smtClean="0">
                             <a:solidFill>
                               <a:schemeClr val="tx1"/>
                             </a:solidFill>
@@ -6447,20 +5944,10 @@
                         </m:r>
                       </m:sup>
                     </m:sSup>
-                    <m:r>
-                      <a:rPr lang="en-US" sz="1400" b="1" i="1" smtClean="0">
-                        <a:solidFill>
-                          <a:schemeClr val="tx1"/>
-                        </a:solidFill>
-                        <a:latin typeface="Cambria Math" panose="02040503050406030204" pitchFamily="18" charset="0"/>
-                        <a:cs typeface="Arial" panose="020B0604020202020204" pitchFamily="34" charset="0"/>
-                      </a:rPr>
-                      <m:t> </m:t>
-                    </m:r>
                   </m:oMath>
                 </a14:m>
                 <a:r>
-                  <a:rPr lang="en-US" sz="1400" dirty="0">
+                  <a:rPr lang="en-US" sz="1600" dirty="0">
                     <a:solidFill>
                       <a:schemeClr val="tx1"/>
                     </a:solidFill>
@@ -6472,7 +5959,7 @@
               </a:p>
               <a:p>
                 <a:r>
-                  <a:rPr lang="en-US" sz="1400" dirty="0">
+                  <a:rPr lang="en-US" sz="1600" dirty="0">
                     <a:solidFill>
                       <a:schemeClr val="tx1"/>
                     </a:solidFill>
@@ -6484,7 +5971,7 @@
                 <a14:m>
                   <m:oMath xmlns:m="http://schemas.openxmlformats.org/officeDocument/2006/math">
                     <m:r>
-                      <a:rPr lang="en-US" sz="1400" i="1" smtClean="0">
+                      <a:rPr lang="en-US" sz="1600" i="1" smtClean="0">
                         <a:solidFill>
                           <a:schemeClr val="tx1"/>
                         </a:solidFill>
@@ -6497,7 +5984,7 @@
                   </m:oMath>
                 </a14:m>
                 <a:r>
-                  <a:rPr lang="en-US" sz="1400" dirty="0">
+                  <a:rPr lang="en-US" sz="1600" dirty="0">
                     <a:solidFill>
                       <a:schemeClr val="tx1"/>
                     </a:solidFill>
@@ -6527,16 +6014,16 @@
             </p:nvSpPr>
             <p:spPr>
               <a:xfrm>
-                <a:off x="10969285" y="3200764"/>
-                <a:ext cx="3052171" cy="550131"/>
+                <a:off x="12596205" y="2510871"/>
+                <a:ext cx="3251200" cy="640080"/>
               </a:xfrm>
               <a:prstGeom prst="rect">
                 <a:avLst/>
               </a:prstGeom>
               <a:blipFill>
-                <a:blip r:embed="rId8"/>
+                <a:blip r:embed="rId7"/>
                 <a:stretch>
-                  <a:fillRect l="-413" b="-6522"/>
+                  <a:fillRect l="-775" b="-5660"/>
                 </a:stretch>
               </a:blipFill>
               <a:ln>
@@ -6581,7 +6068,7 @@
             </p:nvSpPr>
             <p:spPr>
               <a:xfrm>
-                <a:off x="4734645" y="2238876"/>
+                <a:off x="2641051" y="2297485"/>
                 <a:ext cx="254000" cy="152400"/>
               </a:xfrm>
               <a:prstGeom prst="rect">
@@ -6615,7 +6102,7 @@
                       <m:sSub>
                         <m:sSubPr>
                           <m:ctrlPr>
-                            <a:rPr lang="en-US" sz="1400" b="0" i="1" smtClean="0">
+                            <a:rPr lang="en-US" sz="1600" b="0" i="1" smtClean="0">
                               <a:solidFill>
                                 <a:srgbClr val="242424"/>
                               </a:solidFill>
@@ -6626,7 +6113,7 @@
                         </m:sSubPr>
                         <m:e>
                           <m:r>
-                            <a:rPr lang="en-US" sz="1400" b="0" i="1" smtClean="0">
+                            <a:rPr lang="en-US" sz="1600" b="0" i="1" smtClean="0">
                               <a:solidFill>
                                 <a:srgbClr val="242424"/>
                               </a:solidFill>
@@ -6638,7 +6125,7 @@
                         </m:e>
                         <m:sub>
                           <m:r>
-                            <a:rPr lang="en-US" sz="1400" b="0" i="1" smtClean="0">
+                            <a:rPr lang="en-US" sz="1600" b="0" i="1" smtClean="0">
                               <a:solidFill>
                                 <a:srgbClr val="242424"/>
                               </a:solidFill>
@@ -6652,7 +6139,7 @@
                     </m:oMath>
                   </m:oMathPara>
                 </a14:m>
-                <a:endParaRPr sz="900" b="0" i="1" baseline="-20000" dirty="0">
+                <a:endParaRPr sz="1000" b="0" i="1" baseline="-20000" dirty="0">
                   <a:solidFill>
                     <a:srgbClr val="242424"/>
                   </a:solidFill>
@@ -6681,16 +6168,16 @@
             </p:nvSpPr>
             <p:spPr>
               <a:xfrm>
-                <a:off x="4734645" y="2238876"/>
+                <a:off x="2641051" y="2297485"/>
                 <a:ext cx="254000" cy="152400"/>
               </a:xfrm>
               <a:prstGeom prst="rect">
                 <a:avLst/>
               </a:prstGeom>
               <a:blipFill>
-                <a:blip r:embed="rId9"/>
+                <a:blip r:embed="rId8"/>
                 <a:stretch>
-                  <a:fillRect l="-4762" t="-7692" b="-46154"/>
+                  <a:fillRect l="-13636" t="-15385" b="-61538"/>
                 </a:stretch>
               </a:blipFill>
               <a:ln w="0">
@@ -6728,8 +6215,8 @@
             </p:nvSpPr>
             <p:spPr>
               <a:xfrm>
-                <a:off x="4480719" y="2460613"/>
-                <a:ext cx="514351" cy="276999"/>
+                <a:off x="2454294" y="2582446"/>
+                <a:ext cx="514350" cy="338554"/>
               </a:xfrm>
               <a:prstGeom prst="rect">
                 <a:avLst/>
@@ -6750,7 +6237,7 @@
                         <m:boxPr>
                           <m:noBreak m:val="on"/>
                           <m:ctrlPr>
-                            <a:rPr lang="en-US" sz="1200" i="1" dirty="0" smtClean="0">
+                            <a:rPr lang="en-US" sz="1600" i="1" dirty="0" smtClean="0">
                               <a:latin typeface="Cambria Math" panose="02040503050406030204" pitchFamily="18" charset="0"/>
                               <a:ea typeface="Cambria Math" panose="02040503050406030204" pitchFamily="18" charset="0"/>
                             </a:rPr>
@@ -6760,7 +6247,7 @@
                           <m:sSub>
                             <m:sSubPr>
                               <m:ctrlPr>
-                                <a:rPr lang="en-US" sz="1200" i="1" dirty="0" smtClean="0">
+                                <a:rPr lang="en-US" sz="1600" i="1" dirty="0" smtClean="0">
                                   <a:latin typeface="Cambria Math" panose="02040503050406030204" pitchFamily="18" charset="0"/>
                                   <a:ea typeface="Cambria Math" panose="02040503050406030204" pitchFamily="18" charset="0"/>
                                 </a:rPr>
@@ -6771,7 +6258,7 @@
                                 <m:rPr>
                                   <m:sty m:val="p"/>
                                 </m:rPr>
-                                <a:rPr lang="en-US" sz="1200" i="1" dirty="0" smtClean="0">
+                                <a:rPr lang="en-US" sz="1600" i="1" dirty="0" smtClean="0">
                                   <a:latin typeface="Cambria Math" panose="02040503050406030204" pitchFamily="18" charset="0"/>
                                   <a:ea typeface="Cambria Math" panose="02040503050406030204" pitchFamily="18" charset="0"/>
                                 </a:rPr>
@@ -6783,7 +6270,7 @@
                                 <m:rPr>
                                   <m:sty m:val="p"/>
                                 </m:rPr>
-                                <a:rPr lang="en-US" sz="1200" i="1" dirty="0" smtClean="0">
+                                <a:rPr lang="en-US" sz="1600" i="1" dirty="0" smtClean="0">
                                   <a:latin typeface="Cambria Math" panose="02040503050406030204" pitchFamily="18" charset="0"/>
                                   <a:ea typeface="Cambria Math" panose="02040503050406030204" pitchFamily="18" charset="0"/>
                                 </a:rPr>
@@ -6792,7 +6279,7 @@
                             </m:sub>
                           </m:sSub>
                           <m:r>
-                            <a:rPr lang="en-US" sz="1200" i="1" smtClean="0">
+                            <a:rPr lang="en-US" sz="1600" i="1" smtClean="0">
                               <a:latin typeface="Cambria Math" panose="02040503050406030204" pitchFamily="18" charset="0"/>
                               <a:ea typeface="Cambria Math" panose="02040503050406030204" pitchFamily="18" charset="0"/>
                             </a:rPr>
@@ -6802,7 +6289,7 @@
                             <m:rPr>
                               <m:sty m:val="p"/>
                             </m:rPr>
-                            <a:rPr lang="en-US" altLang="zh-CN" sz="1200" i="1">
+                            <a:rPr lang="en-US" altLang="zh-CN" sz="1600" i="1">
                               <a:latin typeface="Cambria Math" panose="02040503050406030204" pitchFamily="18" charset="0"/>
                               <a:ea typeface="Cambria Math" panose="02040503050406030204" pitchFamily="18" charset="0"/>
                             </a:rPr>
@@ -6813,7 +6300,7 @@
                     </m:oMath>
                   </m:oMathPara>
                 </a14:m>
-                <a:endParaRPr lang="en-US" sz="1200" dirty="0"/>
+                <a:endParaRPr lang="en-US" sz="1600" dirty="0"/>
               </a:p>
             </p:txBody>
           </p:sp>
@@ -6835,16 +6322,16 @@
             </p:nvSpPr>
             <p:spPr>
               <a:xfrm>
-                <a:off x="4480719" y="2460613"/>
-                <a:ext cx="514351" cy="276999"/>
+                <a:off x="2454294" y="2582446"/>
+                <a:ext cx="514350" cy="338554"/>
               </a:xfrm>
               <a:prstGeom prst="rect">
                 <a:avLst/>
               </a:prstGeom>
               <a:blipFill>
-                <a:blip r:embed="rId10"/>
+                <a:blip r:embed="rId9"/>
                 <a:stretch>
-                  <a:fillRect/>
+                  <a:fillRect r="-17073"/>
                 </a:stretch>
               </a:blipFill>
             </p:spPr>
@@ -6863,54 +6350,7 @@
           </p:sp>
         </mc:Fallback>
       </mc:AlternateContent>
-      <p:cxnSp>
-        <p:nvCxnSpPr>
-          <p:cNvPr id="90" name="Elbow Connector 89">
-            <a:extLst>
-              <a:ext uri="{FF2B5EF4-FFF2-40B4-BE49-F238E27FC236}">
-                <a16:creationId xmlns:a16="http://schemas.microsoft.com/office/drawing/2014/main" id="{9D5C7C15-C9B6-E712-A58A-AB9017AA12A7}"/>
-              </a:ext>
-            </a:extLst>
-          </p:cNvPr>
-          <p:cNvCxnSpPr>
-            <a:cxnSpLocks/>
-            <a:endCxn id="12" idx="1"/>
-          </p:cNvCxnSpPr>
-          <p:nvPr/>
-        </p:nvCxnSpPr>
-        <p:spPr>
-          <a:xfrm>
-            <a:off x="4488594" y="2459011"/>
-            <a:ext cx="743980" cy="821171"/>
-          </a:xfrm>
-          <a:prstGeom prst="bentConnector3">
-            <a:avLst>
-              <a:gd name="adj1" fmla="val 70297"/>
-            </a:avLst>
-          </a:prstGeom>
-          <a:ln w="28575">
-            <a:solidFill>
-              <a:schemeClr val="tx1"/>
-            </a:solidFill>
-            <a:tailEnd type="triangle"/>
-          </a:ln>
-        </p:spPr>
-        <p:style>
-          <a:lnRef idx="2">
-            <a:schemeClr val="accent1"/>
-          </a:lnRef>
-          <a:fillRef idx="0">
-            <a:schemeClr val="accent1"/>
-          </a:fillRef>
-          <a:effectRef idx="1">
-            <a:schemeClr val="accent1"/>
-          </a:effectRef>
-          <a:fontRef idx="minor">
-            <a:schemeClr val="tx1"/>
-          </a:fontRef>
-        </p:style>
-      </p:cxnSp>
-      <p:sp xmlns:a14="http://schemas.microsoft.com/office/drawing/2010/main">
+      <p:sp>
         <p:nvSpPr>
           <p:cNvPr id="97" name="Rectangle 96">
             <a:extLst>
@@ -6924,20 +6364,21 @@
         </p:nvSpPr>
         <p:spPr>
           <a:xfrm>
-            <a:off x="3876363" y="4673600"/>
-            <a:ext cx="6595478" cy="558800"/>
+            <a:off x="3175000" y="3422650"/>
+            <a:ext cx="9114692" cy="375024"/>
           </a:xfrm>
           <a:prstGeom prst="rect">
             <a:avLst/>
           </a:prstGeom>
           <a:solidFill>
-            <a:schemeClr val="bg2"/>
+            <a:srgbClr val="E8E8E8">
+              <a:alpha val="100000"/>
+            </a:srgbClr>
           </a:solidFill>
           <a:ln>
-            <a:solidFill>
-              <a:srgbClr val="3E6D85"/>
-            </a:solidFill>
+            <a:noFill/>
           </a:ln>
+          <a:effectLst/>
         </p:spPr>
         <p:style>
           <a:lnRef idx="2">
@@ -6956,404 +6397,13 @@
           </a:fontRef>
         </p:style>
         <p:txBody>
-          <a:bodyPr rtlCol="0" anchor="ctr"/>
+          <a:bodyPr/>
           <a:lstStyle/>
           <a:p>
-            <a:pPr algn="ctr"/>
-            <a14:m>
-              <m:oMathPara xmlns:m="http://schemas.openxmlformats.org/officeDocument/2006/math">
-                <m:oMath>
-                  <m:r>
-                    <a:rPr lang="en-US" i="1" smtClean="0">
-                      <a:solidFill>
-                        <a:schemeClr val="tx1"/>
-                      </a:solidFill>
-                      <a:latin typeface="Cambria Math" panose="02040503050406030204" pitchFamily="18" charset="0"/>
-                      <a:ea typeface="Cambria Math" panose="02040503050406030204" pitchFamily="18" charset="0"/>
-                    </a:rPr>
-                    <m:t>ℒ</m:t>
-                  </m:r>
-                  <m:r>
-                    <a:rPr lang="en-US" b="0" i="1" smtClean="0">
-                      <a:solidFill>
-                        <a:schemeClr val="tx1"/>
-                      </a:solidFill>
-                      <a:latin typeface="Cambria Math" panose="02040503050406030204" pitchFamily="18" charset="0"/>
-                      <a:ea typeface="Cambria Math" panose="02040503050406030204" pitchFamily="18" charset="0"/>
-                    </a:rPr>
-                    <m:t>=</m:t>
-                  </m:r>
-                  <m:sSub>
-                    <m:sSubPr>
-                      <m:ctrlPr>
-                        <a:rPr lang="en-US" b="0" i="1" smtClean="0">
-                          <a:solidFill>
-                            <a:schemeClr val="tx1"/>
-                          </a:solidFill>
-                          <a:latin typeface="Cambria Math" panose="02040503050406030204" pitchFamily="18" charset="0"/>
-                          <a:ea typeface="Cambria Math" panose="02040503050406030204" pitchFamily="18" charset="0"/>
-                        </a:rPr>
-                      </m:ctrlPr>
-                    </m:sSubPr>
-                    <m:e>
-                      <m:r>
-                        <a:rPr lang="en-US" b="0" i="1" smtClean="0">
-                          <a:solidFill>
-                            <a:schemeClr val="tx1"/>
-                          </a:solidFill>
-                          <a:latin typeface="Cambria Math" panose="02040503050406030204" pitchFamily="18" charset="0"/>
-                          <a:ea typeface="Cambria Math" panose="02040503050406030204" pitchFamily="18" charset="0"/>
-                        </a:rPr>
-                        <m:t>𝜆</m:t>
-                      </m:r>
-                    </m:e>
-                    <m:sub>
-                      <m:r>
-                        <m:rPr>
-                          <m:sty m:val="p"/>
-                        </m:rPr>
-                        <a:rPr lang="en-US" b="0" i="1" smtClean="0">
-                          <a:solidFill>
-                            <a:schemeClr val="tx1"/>
-                          </a:solidFill>
-                          <a:latin typeface="Cambria Math" panose="02040503050406030204" pitchFamily="18" charset="0"/>
-                          <a:ea typeface="Cambria Math" panose="02040503050406030204" pitchFamily="18" charset="0"/>
-                        </a:rPr>
-                        <m:t>p</m:t>
-                      </m:r>
-                    </m:sub>
-                  </m:sSub>
-                  <m:sSub>
-                    <m:sSubPr>
-                      <m:ctrlPr>
-                        <a:rPr lang="en-US" b="0" i="1" smtClean="0">
-                          <a:solidFill>
-                            <a:schemeClr val="tx1"/>
-                          </a:solidFill>
-                          <a:latin typeface="Cambria Math" panose="02040503050406030204" pitchFamily="18" charset="0"/>
-                          <a:ea typeface="Cambria Math" panose="02040503050406030204" pitchFamily="18" charset="0"/>
-                        </a:rPr>
-                      </m:ctrlPr>
-                    </m:sSubPr>
-                    <m:e>
-                      <m:r>
-                        <a:rPr lang="en-US" b="0" i="1" smtClean="0">
-                          <a:solidFill>
-                            <a:schemeClr val="tx1"/>
-                          </a:solidFill>
-                          <a:latin typeface="Cambria Math" panose="02040503050406030204" pitchFamily="18" charset="0"/>
-                          <a:ea typeface="Cambria Math" panose="02040503050406030204" pitchFamily="18" charset="0"/>
-                        </a:rPr>
-                        <m:t>ℒ</m:t>
-                      </m:r>
-                    </m:e>
-                    <m:sub>
-                      <m:r>
-                        <m:rPr>
-                          <m:sty m:val="p"/>
-                        </m:rPr>
-                        <a:rPr lang="en-US" b="0" i="1" smtClean="0">
-                          <a:solidFill>
-                            <a:schemeClr val="tx1"/>
-                          </a:solidFill>
-                          <a:latin typeface="Cambria Math" panose="02040503050406030204" pitchFamily="18" charset="0"/>
-                          <a:ea typeface="Cambria Math" panose="02040503050406030204" pitchFamily="18" charset="0"/>
-                        </a:rPr>
-                        <m:t>PCSL</m:t>
-                      </m:r>
-                    </m:sub>
-                  </m:sSub>
-                  <m:r>
-                    <m:rPr>
-                      <m:nor/>
-                    </m:rPr>
-                    <a:rPr lang="en-US" i="1" smtClean="0">
-                      <a:solidFill>
-                        <a:schemeClr val="tx1"/>
-                      </a:solidFill>
-                      <a:latin typeface="Cambria Math" panose="02040503050406030204" pitchFamily="18" charset="0"/>
-                      <a:ea typeface="Cambria Math" panose="02040503050406030204" pitchFamily="18" charset="0"/>
-                    </a:rPr>
-                    <m:t> + </m:t>
-                  </m:r>
-                  <m:sSub>
-                    <m:sSubPr>
-                      <m:ctrlPr>
-                        <a:rPr lang="en-US" b="0" i="1" smtClean="0">
-                          <a:solidFill>
-                            <a:srgbClr val="7030A0"/>
-                          </a:solidFill>
-                          <a:latin typeface="Cambria Math" panose="02040503050406030204" pitchFamily="18" charset="0"/>
-                          <a:ea typeface="Cambria Math" panose="02040503050406030204" pitchFamily="18" charset="0"/>
-                        </a:rPr>
-                      </m:ctrlPr>
-                    </m:sSubPr>
-                    <m:e>
-                      <m:r>
-                        <a:rPr lang="en-US" b="0" i="1" smtClean="0">
-                          <a:solidFill>
-                            <a:srgbClr val="7030A0"/>
-                          </a:solidFill>
-                          <a:latin typeface="Cambria Math" panose="02040503050406030204" pitchFamily="18" charset="0"/>
-                          <a:ea typeface="Cambria Math" panose="02040503050406030204" pitchFamily="18" charset="0"/>
-                        </a:rPr>
-                        <m:t>𝜆</m:t>
-                      </m:r>
-                    </m:e>
-                    <m:sub>
-                      <m:r>
-                        <a:rPr lang="en-US" b="0" i="1" smtClean="0">
-                          <a:solidFill>
-                            <a:srgbClr val="7030A0"/>
-                          </a:solidFill>
-                          <a:latin typeface="Cambria Math" panose="02040503050406030204" pitchFamily="18" charset="0"/>
-                          <a:ea typeface="Cambria Math" panose="02040503050406030204" pitchFamily="18" charset="0"/>
-                          <a:cs typeface="Arial" panose="020B0604020202020204" pitchFamily="34" charset="0"/>
-                        </a:rPr>
-                        <m:t>𝑔</m:t>
-                      </m:r>
-                    </m:sub>
-                  </m:sSub>
-                  <m:sSub>
-                    <m:sSubPr>
-                      <m:ctrlPr>
-                        <a:rPr lang="en-US" b="0" i="1" smtClean="0">
-                          <a:solidFill>
-                            <a:srgbClr val="7030A0"/>
-                          </a:solidFill>
-                          <a:latin typeface="Cambria Math" panose="02040503050406030204" pitchFamily="18" charset="0"/>
-                          <a:ea typeface="Cambria Math" panose="02040503050406030204" pitchFamily="18" charset="0"/>
-                        </a:rPr>
-                      </m:ctrlPr>
-                    </m:sSubPr>
-                    <m:e>
-                      <m:r>
-                        <a:rPr lang="en-US" b="0" i="1" smtClean="0">
-                          <a:solidFill>
-                            <a:srgbClr val="7030A0"/>
-                          </a:solidFill>
-                          <a:latin typeface="Cambria Math" panose="02040503050406030204" pitchFamily="18" charset="0"/>
-                          <a:ea typeface="Cambria Math" panose="02040503050406030204" pitchFamily="18" charset="0"/>
-                        </a:rPr>
-                        <m:t>ℒ</m:t>
-                      </m:r>
-                    </m:e>
-                    <m:sub>
-                      <m:r>
-                        <m:rPr>
-                          <m:sty m:val="p"/>
-                        </m:rPr>
-                        <a:rPr lang="en-US" b="0" i="1" smtClean="0">
-                          <a:solidFill>
-                            <a:srgbClr val="7030A0"/>
-                          </a:solidFill>
-                          <a:latin typeface="Cambria Math" panose="02040503050406030204" pitchFamily="18" charset="0"/>
-                          <a:ea typeface="Cambria Math" panose="02040503050406030204" pitchFamily="18" charset="0"/>
-                        </a:rPr>
-                        <m:t>GPAL</m:t>
-                      </m:r>
-                    </m:sub>
-                  </m:sSub>
-                  <m:r>
-                    <m:rPr>
-                      <m:nor/>
-                    </m:rPr>
-                    <a:rPr lang="en-US" i="1" smtClean="0">
-                      <a:solidFill>
-                        <a:schemeClr val="tx1"/>
-                      </a:solidFill>
-                      <a:latin typeface="Cambria Math" panose="02040503050406030204" pitchFamily="18" charset="0"/>
-                      <a:ea typeface="Cambria Math" panose="02040503050406030204" pitchFamily="18" charset="0"/>
-                    </a:rPr>
-                    <m:t> + </m:t>
-                  </m:r>
-                  <m:sSub>
-                    <m:sSubPr>
-                      <m:ctrlPr>
-                        <a:rPr lang="en-US" b="0" i="1" smtClean="0">
-                          <a:solidFill>
-                            <a:srgbClr val="B6993A"/>
-                          </a:solidFill>
-                          <a:latin typeface="Cambria Math" panose="02040503050406030204" pitchFamily="18" charset="0"/>
-                          <a:ea typeface="Cambria Math" panose="02040503050406030204" pitchFamily="18" charset="0"/>
-                        </a:rPr>
-                      </m:ctrlPr>
-                    </m:sSubPr>
-                    <m:e>
-                      <m:r>
-                        <a:rPr lang="en-US" b="0" i="1" smtClean="0">
-                          <a:solidFill>
-                            <a:srgbClr val="B6993A"/>
-                          </a:solidFill>
-                          <a:latin typeface="Cambria Math" panose="02040503050406030204" pitchFamily="18" charset="0"/>
-                          <a:ea typeface="Cambria Math" panose="02040503050406030204" pitchFamily="18" charset="0"/>
-                        </a:rPr>
-                        <m:t>𝜆</m:t>
-                      </m:r>
-                    </m:e>
-                    <m:sub>
-                      <m:r>
-                        <m:rPr>
-                          <m:sty m:val="p"/>
-                        </m:rPr>
-                        <a:rPr lang="en-US" b="0" i="1" smtClean="0">
-                          <a:solidFill>
-                            <a:srgbClr val="B6993A"/>
-                          </a:solidFill>
-                          <a:latin typeface="Cambria Math" panose="02040503050406030204" pitchFamily="18" charset="0"/>
-                          <a:ea typeface="Cambria Math" panose="02040503050406030204" pitchFamily="18" charset="0"/>
-                        </a:rPr>
-                        <m:t>HF</m:t>
-                      </m:r>
-                    </m:sub>
-                  </m:sSub>
-                  <m:sSub>
-                    <m:sSubPr>
-                      <m:ctrlPr>
-                        <a:rPr lang="en-US" b="0" i="1" smtClean="0">
-                          <a:solidFill>
-                            <a:srgbClr val="B6993A"/>
-                          </a:solidFill>
-                          <a:latin typeface="Cambria Math" panose="02040503050406030204" pitchFamily="18" charset="0"/>
-                          <a:ea typeface="Cambria Math" panose="02040503050406030204" pitchFamily="18" charset="0"/>
-                        </a:rPr>
-                      </m:ctrlPr>
-                    </m:sSubPr>
-                    <m:e>
-                      <m:r>
-                        <a:rPr lang="en-US" b="0" i="1" smtClean="0">
-                          <a:solidFill>
-                            <a:srgbClr val="B6993A"/>
-                          </a:solidFill>
-                          <a:latin typeface="Cambria Math" panose="02040503050406030204" pitchFamily="18" charset="0"/>
-                          <a:ea typeface="Cambria Math" panose="02040503050406030204" pitchFamily="18" charset="0"/>
-                        </a:rPr>
-                        <m:t>ℒ</m:t>
-                      </m:r>
-                    </m:e>
-                    <m:sub>
-                      <m:r>
-                        <m:rPr>
-                          <m:sty m:val="p"/>
-                        </m:rPr>
-                        <a:rPr lang="en-US" b="0" i="1" smtClean="0">
-                          <a:solidFill>
-                            <a:srgbClr val="B6993A"/>
-                          </a:solidFill>
-                          <a:latin typeface="Cambria Math" panose="02040503050406030204" pitchFamily="18" charset="0"/>
-                          <a:ea typeface="Cambria Math" panose="02040503050406030204" pitchFamily="18" charset="0"/>
-                        </a:rPr>
-                        <m:t>HF</m:t>
-                      </m:r>
-                    </m:sub>
-                  </m:sSub>
-                  <m:r>
-                    <m:rPr>
-                      <m:nor/>
-                    </m:rPr>
-                    <a:rPr lang="en-US" i="1" smtClean="0">
-                      <a:solidFill>
-                        <a:schemeClr val="tx1"/>
-                      </a:solidFill>
-                      <a:latin typeface="Cambria Math" panose="02040503050406030204" pitchFamily="18" charset="0"/>
-                      <a:ea typeface="Cambria Math" panose="02040503050406030204" pitchFamily="18" charset="0"/>
-                    </a:rPr>
-                    <m:t> + </m:t>
-                  </m:r>
-                  <m:sSub>
-                    <m:sSubPr>
-                      <m:ctrlPr>
-                        <a:rPr lang="en-US" b="0" i="1" smtClean="0">
-                          <a:solidFill>
-                            <a:schemeClr val="accent6">
-                              <a:lumMod val="50000"/>
-                            </a:schemeClr>
-                          </a:solidFill>
-                          <a:latin typeface="Cambria Math" panose="02040503050406030204" pitchFamily="18" charset="0"/>
-                          <a:ea typeface="Cambria Math" panose="02040503050406030204" pitchFamily="18" charset="0"/>
-                        </a:rPr>
-                      </m:ctrlPr>
-                    </m:sSubPr>
-                    <m:e>
-                      <m:r>
-                        <a:rPr lang="en-US" b="0" i="1" smtClean="0">
-                          <a:solidFill>
-                            <a:schemeClr val="accent6">
-                              <a:lumMod val="50000"/>
-                            </a:schemeClr>
-                          </a:solidFill>
-                          <a:latin typeface="Cambria Math" panose="02040503050406030204" pitchFamily="18" charset="0"/>
-                          <a:ea typeface="Cambria Math" panose="02040503050406030204" pitchFamily="18" charset="0"/>
-                        </a:rPr>
-                        <m:t>ℒ</m:t>
-                      </m:r>
-                    </m:e>
-                    <m:sub>
-                      <m:r>
-                        <m:rPr>
-                          <m:sty m:val="p"/>
-                        </m:rPr>
-                        <a:rPr lang="en-US" b="0" i="1" smtClean="0">
-                          <a:solidFill>
-                            <a:schemeClr val="accent6">
-                              <a:lumMod val="50000"/>
-                            </a:schemeClr>
-                          </a:solidFill>
-                          <a:latin typeface="Cambria Math" panose="02040503050406030204" pitchFamily="18" charset="0"/>
-                          <a:ea typeface="Cambria Math" panose="02040503050406030204" pitchFamily="18" charset="0"/>
-                        </a:rPr>
-                        <m:t>cls</m:t>
-                      </m:r>
-                    </m:sub>
-                  </m:sSub>
-                </m:oMath>
-              </m:oMathPara>
-            </a14:m>
-            <a:endParaRPr/>
+            <a:endParaRPr lang="en-US"/>
           </a:p>
         </p:txBody>
       </p:sp>
-      <p:cxnSp>
-        <p:nvCxnSpPr>
-          <p:cNvPr id="116" name="Straight Arrow Connector 115">
-            <a:extLst>
-              <a:ext uri="{FF2B5EF4-FFF2-40B4-BE49-F238E27FC236}">
-                <a16:creationId xmlns:a16="http://schemas.microsoft.com/office/drawing/2014/main" id="{B9A9994E-0D3D-C9DB-8FCF-4A3F927BF33E}"/>
-              </a:ext>
-            </a:extLst>
-          </p:cNvPr>
-          <p:cNvCxnSpPr>
-            <a:cxnSpLocks/>
-          </p:cNvCxnSpPr>
-          <p:nvPr/>
-        </p:nvCxnSpPr>
-        <p:spPr>
-          <a:xfrm>
-            <a:off x="6110188" y="3553451"/>
-            <a:ext cx="0" cy="421649"/>
-          </a:xfrm>
-          <a:prstGeom prst="straightConnector1">
-            <a:avLst/>
-          </a:prstGeom>
-          <a:ln w="28575">
-            <a:tailEnd type="triangle"/>
-          </a:ln>
-        </p:spPr>
-        <p:style>
-          <a:lnRef idx="2">
-            <a:schemeClr val="dk1"/>
-          </a:lnRef>
-          <a:fillRef idx="0">
-            <a:schemeClr val="dk1"/>
-          </a:fillRef>
-          <a:effectRef idx="1">
-            <a:schemeClr val="dk1"/>
-          </a:effectRef>
-          <a:fontRef idx="minor">
-            <a:schemeClr val="tx1"/>
-          </a:fontRef>
-        </p:style>
-      </p:cxnSp>
       <mc:AlternateContent xmlns:mc="http://schemas.openxmlformats.org/markup-compatibility/2006" xmlns:a14="http://schemas.microsoft.com/office/drawing/2010/main">
         <mc:Choice Requires="a14">
           <p:sp>
@@ -7372,7 +6422,7 @@
             </p:nvSpPr>
             <p:spPr>
               <a:xfrm>
-                <a:off x="6200463" y="3628735"/>
+                <a:off x="4483100" y="3062572"/>
                 <a:ext cx="254000" cy="152400"/>
               </a:xfrm>
               <a:prstGeom prst="rect">
@@ -7406,7 +6456,7 @@
                       <m:sSub>
                         <m:sSubPr>
                           <m:ctrlPr>
-                            <a:rPr lang="en-US" sz="1400" b="0" i="1" smtClean="0">
+                            <a:rPr lang="en-US" sz="1600" b="0" i="1" smtClean="0">
                               <a:solidFill>
                                 <a:srgbClr val="242424"/>
                               </a:solidFill>
@@ -7417,7 +6467,7 @@
                         </m:sSubPr>
                         <m:e>
                           <m:r>
-                            <a:rPr lang="en-US" sz="1400" b="0" i="1" smtClean="0">
+                            <a:rPr lang="en-US" sz="1600" b="0" i="1" smtClean="0">
                               <a:solidFill>
                                 <a:srgbClr val="242424"/>
                               </a:solidFill>
@@ -7429,7 +6479,7 @@
                         </m:e>
                         <m:sub>
                           <m:r>
-                            <a:rPr lang="en-US" sz="1400" b="0" i="1" smtClean="0">
+                            <a:rPr lang="en-US" sz="1600" b="0" i="1" smtClean="0">
                               <a:solidFill>
                                 <a:srgbClr val="242424"/>
                               </a:solidFill>
@@ -7472,16 +6522,16 @@
             </p:nvSpPr>
             <p:spPr>
               <a:xfrm>
-                <a:off x="6200463" y="3628735"/>
+                <a:off x="4483100" y="3062572"/>
                 <a:ext cx="254000" cy="152400"/>
               </a:xfrm>
               <a:prstGeom prst="rect">
                 <a:avLst/>
               </a:prstGeom>
               <a:blipFill>
-                <a:blip r:embed="rId12"/>
+                <a:blip r:embed="rId10"/>
                 <a:stretch>
-                  <a:fillRect l="-5000" b="-46154"/>
+                  <a:fillRect l="-14286" t="-15385" r="-4762" b="-61538"/>
                 </a:stretch>
               </a:blipFill>
               <a:ln w="0">
@@ -7503,8 +6553,8 @@
           </p:sp>
         </mc:Fallback>
       </mc:AlternateContent>
-      <mc:AlternateContent xmlns:mc="http://schemas.openxmlformats.org/markup-compatibility/2006">
-        <mc:Choice xmlns:a14="http://schemas.microsoft.com/office/drawing/2010/main" Requires="a14">
+      <mc:AlternateContent xmlns:mc="http://schemas.openxmlformats.org/markup-compatibility/2006" xmlns:a14="http://schemas.microsoft.com/office/drawing/2010/main">
+        <mc:Choice Requires="a14">
           <p:sp>
             <p:nvSpPr>
               <p:cNvPr id="119" name="TextBox 118">
@@ -7519,8 +6569,8 @@
             </p:nvSpPr>
             <p:spPr>
               <a:xfrm>
-                <a:off x="5550700" y="3567073"/>
-                <a:ext cx="514351" cy="276999"/>
+                <a:off x="3971925" y="3000342"/>
+                <a:ext cx="514350" cy="338554"/>
               </a:xfrm>
               <a:prstGeom prst="rect">
                 <a:avLst/>
@@ -7541,7 +6591,7 @@
                         <m:boxPr>
                           <m:noBreak m:val="on"/>
                           <m:ctrlPr>
-                            <a:rPr lang="en-US" sz="1200" i="1" dirty="0" smtClean="0">
+                            <a:rPr lang="en-US" sz="1600" i="1" dirty="0" smtClean="0">
                               <a:latin typeface="Cambria Math" panose="02040503050406030204" pitchFamily="18" charset="0"/>
                               <a:ea typeface="Cambria Math" panose="02040503050406030204" pitchFamily="18" charset="0"/>
                             </a:rPr>
@@ -7551,7 +6601,7 @@
                           <m:sSup>
                             <m:sSupPr>
                               <m:ctrlPr>
-                                <a:rPr lang="en-US" sz="1200" i="0" dirty="0" smtClean="0">
+                                <a:rPr lang="en-US" sz="1600" i="0" dirty="0" smtClean="0">
                                   <a:latin typeface="Cambria Math" panose="02040503050406030204" pitchFamily="18" charset="0"/>
                                   <a:ea typeface="Cambria Math" panose="02040503050406030204" pitchFamily="18" charset="0"/>
                                 </a:rPr>
@@ -7559,7 +6609,7 @@
                             </m:sSupPr>
                             <m:e>
                               <m:r>
-                                <a:rPr lang="en-US" sz="1200" i="0" dirty="0" smtClean="0">
+                                <a:rPr lang="en-US" sz="1600" i="0" dirty="0" smtClean="0">
                                   <a:latin typeface="Cambria Math" panose="02040503050406030204" pitchFamily="18" charset="0"/>
                                   <a:ea typeface="Cambria Math" panose="02040503050406030204" pitchFamily="18" charset="0"/>
                                 </a:rPr>
@@ -7568,7 +6618,7 @@
                             </m:e>
                             <m:sup>
                               <m:r>
-                                <a:rPr lang="en-US" sz="1200" i="1" dirty="0" smtClean="0">
+                                <a:rPr lang="en-US" sz="1600" i="1" dirty="0" smtClean="0">
                                   <a:latin typeface="Cambria Math" panose="02040503050406030204" pitchFamily="18" charset="0"/>
                                   <a:ea typeface="Cambria Math" panose="02040503050406030204" pitchFamily="18" charset="0"/>
                                 </a:rPr>
@@ -7581,12 +6631,12 @@
                     </m:oMath>
                   </m:oMathPara>
                 </a14:m>
-                <a:endParaRPr lang="en-US" sz="1200" dirty="0"/>
+                <a:endParaRPr lang="en-US" sz="1600" dirty="0"/>
               </a:p>
             </p:txBody>
           </p:sp>
         </mc:Choice>
-        <mc:Fallback>
+        <mc:Fallback xmlns="">
           <p:sp>
             <p:nvSpPr>
               <p:cNvPr id="119" name="TextBox 118">
@@ -7603,14 +6653,14 @@
             </p:nvSpPr>
             <p:spPr>
               <a:xfrm>
-                <a:off x="5550700" y="3567073"/>
-                <a:ext cx="514351" cy="276999"/>
+                <a:off x="3971925" y="3000342"/>
+                <a:ext cx="514350" cy="338554"/>
               </a:xfrm>
               <a:prstGeom prst="rect">
                 <a:avLst/>
               </a:prstGeom>
               <a:blipFill>
-                <a:blip r:embed="rId13"/>
+                <a:blip r:embed="rId11"/>
                 <a:stretch>
                   <a:fillRect/>
                 </a:stretch>
@@ -7633,14 +6683,14 @@
       </mc:AlternateContent>
       <p:sp>
         <p:nvSpPr>
-          <p:cNvPr id="134" name="Auxiliary C/W heads heading"/>
+          <p:cNvPr id="134" name="Auxiliary C-W heads heading"/>
           <p:cNvSpPr txBox="1"/>
           <p:nvPr/>
         </p:nvSpPr>
         <p:spPr>
           <a:xfrm>
-            <a:off x="7442200" y="3054350"/>
-            <a:ext cx="2870200" cy="330200"/>
+            <a:off x="6079369" y="1565455"/>
+            <a:ext cx="2743200" cy="304800"/>
           </a:xfrm>
           <a:prstGeom prst="rect">
             <a:avLst/>
@@ -7648,288 +6698,2617 @@
           <a:noFill/>
         </p:spPr>
         <p:txBody>
-          <a:bodyPr wrap="none" rtlCol="0" anchor="ctr" tIns="0" bIns="0">
+          <a:bodyPr wrap="none" tIns="0" bIns="0" rtlCol="0" anchor="b">
             <a:noAutofit/>
           </a:bodyPr>
           <a:lstStyle/>
           <a:p>
             <a:pPr algn="ctr"/>
             <a:r>
-              <a:rPr lang="en-US" sz="1600" b="1" i="0">
+              <a:rPr lang="en-US" b="1" i="0" dirty="0">
                 <a:solidFill>
-                  <a:srgbClr val="000000"/>
+                  <a:schemeClr val="accent6">
+                    <a:lumMod val="50000"/>
+                  </a:schemeClr>
                 </a:solidFill>
                 <a:latin typeface="Arial"/>
               </a:rPr>
-              <a:t>Auxiliary C/W heads</a:t>
+              <a:t>Shared </a:t>
+            </a:r>
+            <a:r>
+              <a:rPr lang="en-US" b="1" i="0" dirty="0">
+                <a:solidFill>
+                  <a:schemeClr val="accent6">
+                    <a:lumMod val="50000"/>
+                  </a:schemeClr>
+                </a:solidFill>
+                <a:latin typeface="Consolas" panose="020B0609020204030204" pitchFamily="49" charset="0"/>
+                <a:cs typeface="Consolas" panose="020B0609020204030204" pitchFamily="49" charset="0"/>
+              </a:rPr>
+              <a:t>C-W</a:t>
+            </a:r>
+            <a:r>
+              <a:rPr lang="en-US" b="1" i="0" dirty="0">
+                <a:solidFill>
+                  <a:schemeClr val="accent6">
+                    <a:lumMod val="50000"/>
+                  </a:schemeClr>
+                </a:solidFill>
+                <a:latin typeface="Arial"/>
+              </a:rPr>
+              <a:t> Heads</a:t>
             </a:r>
           </a:p>
         </p:txBody>
       </p:sp>
-      <p:sp xmlns:a14="http://schemas.microsoft.com/office/drawing/2010/main">
-        <p:nvSpPr>
-          <p:cNvPr id="136" name="Shared representation h_i"/>
-          <p:cNvSpPr>
-            <a:spLocks noGrp="1"/>
-          </p:cNvSpPr>
-          <p:nvPr/>
-        </p:nvSpPr>
-        <p:spPr>
-          <a:xfrm>
-            <a:off x="6985000" y="2197100"/>
-            <a:ext cx="279400" cy="152400"/>
-          </a:xfrm>
-          <a:prstGeom prst="rect">
-            <a:avLst/>
-          </a:prstGeom>
-          <a:noFill/>
-          <a:ln w="0">
-            <a:noFill/>
-          </a:ln>
-        </p:spPr>
-        <p:txBody>
-          <a:bodyPr wrap="none" lIns="0" tIns="0" rIns="0" bIns="0" anchor="ctr">
-            <a:noAutofit/>
-          </a:bodyPr>
-          <a:lstStyle/>
-          <a:p>
-            <a:pPr algn="l">
-              <a:buNone/>
-              <a:defRPr sz="900" b="0" i="0">
+      <mc:AlternateContent xmlns:mc="http://schemas.openxmlformats.org/markup-compatibility/2006" xmlns:a14="http://schemas.microsoft.com/office/drawing/2010/main">
+        <mc:Choice Requires="a14">
+          <p:sp>
+            <p:nvSpPr>
+              <p:cNvPr id="136" name="Shared representation h_i"/>
+              <p:cNvSpPr>
+                <a:spLocks noGrp="1"/>
+              </p:cNvSpPr>
+              <p:nvPr/>
+            </p:nvSpPr>
+            <p:spPr>
+              <a:xfrm>
+                <a:off x="5511800" y="1143000"/>
+                <a:ext cx="279400" cy="152400"/>
+              </a:xfrm>
+              <a:prstGeom prst="rect">
+                <a:avLst/>
+              </a:prstGeom>
+              <a:noFill/>
+              <a:ln w="0">
+                <a:noFill/>
+              </a:ln>
+            </p:spPr>
+            <p:txBody>
+              <a:bodyPr wrap="none" lIns="0" tIns="0" rIns="0" bIns="0" anchor="ctr">
+                <a:noAutofit/>
+              </a:bodyPr>
+              <a:lstStyle/>
+              <a:p>
+                <a:pPr algn="l">
+                  <a:buNone/>
+                  <a:defRPr sz="900" b="0" i="0">
+                    <a:solidFill>
+                      <a:srgbClr val="242424"/>
+                    </a:solidFill>
+                    <a:latin typeface="Arial"/>
+                    <a:ea typeface="Arial"/>
+                    <a:cs typeface="Arial"/>
+                  </a:defRPr>
+                </a:pPr>
+                <a14:m>
+                  <m:oMathPara xmlns:m="http://schemas.openxmlformats.org/officeDocument/2006/math">
+                    <m:oMath>
+                      <m:sSub>
+                        <m:sSubPr>
+                          <m:ctrlPr>
+                            <a:rPr lang="en-US" sz="1600" b="0" i="1" smtClean="0">
+                              <a:solidFill>
+                                <a:srgbClr val="242424"/>
+                              </a:solidFill>
+                              <a:latin typeface="Cambria Math" panose="02040503050406030204" pitchFamily="18" charset="0"/>
+                              <a:cs typeface="Arial"/>
+                            </a:rPr>
+                          </m:ctrlPr>
+                        </m:sSubPr>
+                        <m:e>
+                          <m:r>
+                            <a:rPr lang="en-US" sz="1600" b="0" i="1" smtClean="0">
+                              <a:solidFill>
+                                <a:srgbClr val="242424"/>
+                              </a:solidFill>
+                              <a:latin typeface="Cambria Math" panose="02040503050406030204" pitchFamily="18" charset="0"/>
+                              <a:cs typeface="Arial"/>
+                            </a:rPr>
+                            <m:t>ℎ</m:t>
+                          </m:r>
+                        </m:e>
+                        <m:sub>
+                          <m:r>
+                            <a:rPr lang="en-US" sz="1600" b="0" i="1" smtClean="0">
+                              <a:solidFill>
+                                <a:srgbClr val="242424"/>
+                              </a:solidFill>
+                              <a:latin typeface="Cambria Math" panose="02040503050406030204" pitchFamily="18" charset="0"/>
+                              <a:cs typeface="Arial"/>
+                            </a:rPr>
+                            <m:t>𝑖</m:t>
+                          </m:r>
+                        </m:sub>
+                      </m:sSub>
+                    </m:oMath>
+                  </m:oMathPara>
+                </a14:m>
+                <a:endParaRPr sz="900" b="0" i="1" baseline="-20000" dirty="0">
+                  <a:solidFill>
+                    <a:srgbClr val="242424"/>
+                  </a:solidFill>
+                  <a:latin typeface="Arial"/>
+                  <a:ea typeface="Arial"/>
+                  <a:cs typeface="Arial"/>
+                </a:endParaRPr>
+              </a:p>
+            </p:txBody>
+          </p:sp>
+        </mc:Choice>
+        <mc:Fallback xmlns="">
+          <p:sp>
+            <p:nvSpPr>
+              <p:cNvPr id="136" name="Shared representation h_i"/>
+              <p:cNvSpPr>
+                <a:spLocks noGrp="1" noRot="1" noChangeAspect="1" noMove="1" noResize="1" noEditPoints="1" noAdjustHandles="1" noChangeArrowheads="1" noChangeShapeType="1" noTextEdit="1"/>
+              </p:cNvSpPr>
+              <p:nvPr/>
+            </p:nvSpPr>
+            <p:spPr>
+              <a:xfrm>
+                <a:off x="5511800" y="1143000"/>
+                <a:ext cx="279400" cy="152400"/>
+              </a:xfrm>
+              <a:prstGeom prst="rect">
+                <a:avLst/>
+              </a:prstGeom>
+              <a:blipFill>
+                <a:blip r:embed="rId12"/>
+                <a:stretch>
+                  <a:fillRect l="-4167" t="-23077" b="-46154"/>
+                </a:stretch>
+              </a:blipFill>
+              <a:ln w="0">
+                <a:noFill/>
+              </a:ln>
+            </p:spPr>
+            <p:txBody>
+              <a:bodyPr/>
+              <a:lstStyle/>
+              <a:p>
+                <a:r>
+                  <a:rPr lang="en-US">
+                    <a:noFill/>
+                  </a:rPr>
+                  <a:t> </a:t>
+                </a:r>
+              </a:p>
+            </p:txBody>
+          </p:sp>
+        </mc:Fallback>
+      </mc:AlternateContent>
+      <mc:AlternateContent xmlns:mc="http://schemas.openxmlformats.org/markup-compatibility/2006" xmlns:a14="http://schemas.microsoft.com/office/drawing/2010/main">
+        <mc:Choice Requires="a14">
+          <p:sp>
+            <p:nvSpPr>
+              <p:cNvPr id="157" name="Classification loss L_cls"/>
+              <p:cNvSpPr/>
+              <p:nvPr/>
+            </p:nvSpPr>
+            <p:spPr>
+              <a:xfrm>
+                <a:off x="10029092" y="1473200"/>
+                <a:ext cx="1819969" cy="365760"/>
+              </a:xfrm>
+              <a:prstGeom prst="rect">
+                <a:avLst/>
+              </a:prstGeom>
+              <a:solidFill>
+                <a:schemeClr val="accent6">
+                  <a:lumMod val="20000"/>
+                  <a:lumOff val="80000"/>
+                </a:schemeClr>
+              </a:solidFill>
+              <a:ln>
                 <a:solidFill>
-                  <a:srgbClr val="242424"/>
+                  <a:schemeClr val="accent6">
+                    <a:lumMod val="50000"/>
+                  </a:schemeClr>
                 </a:solidFill>
-                <a:latin typeface="Arial"/>
-                <a:ea typeface="Arial"/>
-                <a:cs typeface="Arial"/>
-              </a:defRPr>
-            </a:pPr>
-            <a14:m>
-              <m:oMathPara xmlns:m="http://schemas.openxmlformats.org/officeDocument/2006/math">
-                <m:oMath>
-                  <m:sSub>
-                    <m:sSubPr>
-                      <m:ctrlPr>
-                        <a:rPr lang="en-US" sz="1400" b="0" i="1" smtClean="0">
-                          <a:solidFill>
-                            <a:srgbClr val="242424"/>
-                          </a:solidFill>
-                          <a:latin typeface="Cambria Math" panose="02040503050406030204" pitchFamily="18" charset="0"/>
-                          <a:cs typeface="Arial"/>
-                        </a:rPr>
-                      </m:ctrlPr>
-                    </m:sSubPr>
-                    <m:e>
+              </a:ln>
+            </p:spPr>
+            <p:style>
+              <a:lnRef idx="2">
+                <a:schemeClr val="accent1">
+                  <a:shade val="15000"/>
+                </a:schemeClr>
+              </a:lnRef>
+              <a:fillRef idx="1">
+                <a:schemeClr val="accent1"/>
+              </a:fillRef>
+              <a:effectRef idx="0">
+                <a:schemeClr val="accent1"/>
+              </a:effectRef>
+              <a:fontRef idx="minor">
+                <a:schemeClr val="lt1"/>
+              </a:fontRef>
+            </p:style>
+            <p:txBody>
+              <a:bodyPr wrap="none" lIns="0" tIns="0" rIns="0" bIns="0" anchor="ctr">
+                <a:noAutofit/>
+              </a:bodyPr>
+              <a:lstStyle/>
+              <a:p>
+                <a:pPr algn="ctr"/>
+                <a14:m>
+                  <m:oMathPara xmlns:m="http://schemas.openxmlformats.org/officeDocument/2006/math">
+                    <m:oMath>
+                      <m:sSub>
+                        <m:sSubPr>
+                          <m:ctrlPr>
+                            <a:rPr lang="en-US" sz="2000" b="0" i="1" smtClean="0">
+                              <a:solidFill>
+                                <a:schemeClr val="accent6">
+                                  <a:lumMod val="50000"/>
+                                </a:schemeClr>
+                              </a:solidFill>
+                              <a:latin typeface="Cambria Math" panose="02040503050406030204" pitchFamily="18" charset="0"/>
+                              <a:ea typeface="Cambria Math" panose="02040503050406030204" pitchFamily="18" charset="0"/>
+                            </a:rPr>
+                          </m:ctrlPr>
+                        </m:sSubPr>
+                        <m:e>
+                          <m:r>
+                            <a:rPr lang="en-US" sz="2000" b="0" i="1" smtClean="0">
+                              <a:solidFill>
+                                <a:schemeClr val="accent6">
+                                  <a:lumMod val="50000"/>
+                                </a:schemeClr>
+                              </a:solidFill>
+                              <a:latin typeface="Cambria Math" panose="02040503050406030204" pitchFamily="18" charset="0"/>
+                              <a:ea typeface="Cambria Math" panose="02040503050406030204" pitchFamily="18" charset="0"/>
+                            </a:rPr>
+                            <m:t>ℒ</m:t>
+                          </m:r>
+                        </m:e>
+                        <m:sub>
+                          <m:r>
+                            <m:rPr>
+                              <m:sty m:val="p"/>
+                            </m:rPr>
+                            <a:rPr lang="en-US" sz="2000" b="0" i="1" smtClean="0">
+                              <a:solidFill>
+                                <a:schemeClr val="accent6">
+                                  <a:lumMod val="50000"/>
+                                </a:schemeClr>
+                              </a:solidFill>
+                              <a:latin typeface="Cambria Math" panose="02040503050406030204" pitchFamily="18" charset="0"/>
+                              <a:ea typeface="Cambria Math" panose="02040503050406030204" pitchFamily="18" charset="0"/>
+                            </a:rPr>
+                            <m:t>cls</m:t>
+                          </m:r>
+                        </m:sub>
+                      </m:sSub>
+                    </m:oMath>
+                  </m:oMathPara>
+                </a14:m>
+                <a:endParaRPr dirty="0"/>
+              </a:p>
+            </p:txBody>
+          </p:sp>
+        </mc:Choice>
+        <mc:Fallback xmlns="">
+          <p:sp>
+            <p:nvSpPr>
+              <p:cNvPr id="157" name="Classification loss L_cls"/>
+              <p:cNvSpPr>
+                <a:spLocks noRot="1" noChangeAspect="1" noMove="1" noResize="1" noEditPoints="1" noAdjustHandles="1" noChangeArrowheads="1" noChangeShapeType="1" noTextEdit="1"/>
+              </p:cNvSpPr>
+              <p:nvPr/>
+            </p:nvSpPr>
+            <p:spPr>
+              <a:xfrm>
+                <a:off x="10029092" y="1473200"/>
+                <a:ext cx="1819969" cy="365760"/>
+              </a:xfrm>
+              <a:prstGeom prst="rect">
+                <a:avLst/>
+              </a:prstGeom>
+              <a:blipFill>
+                <a:blip r:embed="rId13"/>
+                <a:stretch>
+                  <a:fillRect b="-3226"/>
+                </a:stretch>
+              </a:blipFill>
+              <a:ln>
+                <a:solidFill>
+                  <a:schemeClr val="accent6">
+                    <a:lumMod val="50000"/>
+                  </a:schemeClr>
+                </a:solidFill>
+              </a:ln>
+            </p:spPr>
+            <p:txBody>
+              <a:bodyPr/>
+              <a:lstStyle/>
+              <a:p>
+                <a:r>
+                  <a:rPr lang="en-US">
+                    <a:noFill/>
+                  </a:rPr>
+                  <a:t> </a:t>
+                </a:r>
+              </a:p>
+            </p:txBody>
+          </p:sp>
+        </mc:Fallback>
+      </mc:AlternateContent>
+      <mc:AlternateContent xmlns:mc="http://schemas.openxmlformats.org/markup-compatibility/2006" xmlns:a14="http://schemas.microsoft.com/office/drawing/2010/main">
+        <mc:Choice Requires="a14">
+          <p:sp>
+            <p:nvSpPr>
+              <p:cNvPr id="219" name="Optional HF loss"/>
+              <p:cNvSpPr/>
+              <p:nvPr/>
+            </p:nvSpPr>
+            <p:spPr>
+              <a:xfrm>
+                <a:off x="10031904" y="2112465"/>
+                <a:ext cx="1809750" cy="365760"/>
+              </a:xfrm>
+              <a:prstGeom prst="rect">
+                <a:avLst/>
+              </a:prstGeom>
+              <a:solidFill>
+                <a:srgbClr val="FFF5DB"/>
+              </a:solidFill>
+              <a:ln>
+                <a:solidFill>
+                  <a:srgbClr val="B6993A"/>
+                </a:solidFill>
+              </a:ln>
+            </p:spPr>
+            <p:style>
+              <a:lnRef idx="2">
+                <a:schemeClr val="accent1">
+                  <a:shade val="15000"/>
+                </a:schemeClr>
+              </a:lnRef>
+              <a:fillRef idx="1">
+                <a:schemeClr val="accent1"/>
+              </a:fillRef>
+              <a:effectRef idx="0">
+                <a:schemeClr val="accent1"/>
+              </a:effectRef>
+              <a:fontRef idx="minor">
+                <a:schemeClr val="lt1"/>
+              </a:fontRef>
+            </p:style>
+            <p:txBody>
+              <a:bodyPr wrap="none" lIns="0" tIns="0" rIns="0" bIns="0" anchor="ctr">
+                <a:noAutofit/>
+              </a:bodyPr>
+              <a:lstStyle/>
+              <a:p>
+                <a:pPr algn="ctr"/>
+                <a14:m>
+                  <m:oMathPara xmlns:m="http://schemas.openxmlformats.org/officeDocument/2006/math">
+                    <m:oMath>
+                      <m:sSub>
+                        <m:sSubPr>
+                          <m:ctrlPr>
+                            <a:rPr lang="en-US" sz="2000" b="0" i="1" smtClean="0">
+                              <a:solidFill>
+                                <a:srgbClr val="B6993A"/>
+                              </a:solidFill>
+                              <a:latin typeface="Cambria Math" panose="02040503050406030204" pitchFamily="18" charset="0"/>
+                              <a:ea typeface="Cambria Math" panose="02040503050406030204" pitchFamily="18" charset="0"/>
+                            </a:rPr>
+                          </m:ctrlPr>
+                        </m:sSubPr>
+                        <m:e>
+                          <m:r>
+                            <a:rPr lang="en-US" sz="2000" b="0" i="1" smtClean="0">
+                              <a:solidFill>
+                                <a:srgbClr val="B6993A"/>
+                              </a:solidFill>
+                              <a:latin typeface="Cambria Math" panose="02040503050406030204" pitchFamily="18" charset="0"/>
+                              <a:ea typeface="Cambria Math" panose="02040503050406030204" pitchFamily="18" charset="0"/>
+                            </a:rPr>
+                            <m:t>ℒ</m:t>
+                          </m:r>
+                        </m:e>
+                        <m:sub>
+                          <m:r>
+                            <m:rPr>
+                              <m:sty m:val="p"/>
+                            </m:rPr>
+                            <a:rPr lang="en-US" sz="2000" b="0" i="1" smtClean="0">
+                              <a:solidFill>
+                                <a:srgbClr val="B6993A"/>
+                              </a:solidFill>
+                              <a:latin typeface="Cambria Math" panose="02040503050406030204" pitchFamily="18" charset="0"/>
+                              <a:ea typeface="Cambria Math" panose="02040503050406030204" pitchFamily="18" charset="0"/>
+                            </a:rPr>
+                            <m:t>HF</m:t>
+                          </m:r>
+                        </m:sub>
+                      </m:sSub>
+                    </m:oMath>
+                  </m:oMathPara>
+                </a14:m>
+                <a:endParaRPr dirty="0"/>
+              </a:p>
+            </p:txBody>
+          </p:sp>
+        </mc:Choice>
+        <mc:Fallback xmlns="">
+          <p:sp>
+            <p:nvSpPr>
+              <p:cNvPr id="219" name="Optional HF loss"/>
+              <p:cNvSpPr>
+                <a:spLocks noRot="1" noChangeAspect="1" noMove="1" noResize="1" noEditPoints="1" noAdjustHandles="1" noChangeArrowheads="1" noChangeShapeType="1" noTextEdit="1"/>
+              </p:cNvSpPr>
+              <p:nvPr/>
+            </p:nvSpPr>
+            <p:spPr>
+              <a:xfrm>
+                <a:off x="10031904" y="2112465"/>
+                <a:ext cx="1809750" cy="365760"/>
+              </a:xfrm>
+              <a:prstGeom prst="rect">
+                <a:avLst/>
+              </a:prstGeom>
+              <a:blipFill>
+                <a:blip r:embed="rId14"/>
+                <a:stretch>
+                  <a:fillRect b="-3226"/>
+                </a:stretch>
+              </a:blipFill>
+              <a:ln>
+                <a:solidFill>
+                  <a:srgbClr val="B6993A"/>
+                </a:solidFill>
+              </a:ln>
+            </p:spPr>
+            <p:txBody>
+              <a:bodyPr/>
+              <a:lstStyle/>
+              <a:p>
+                <a:r>
+                  <a:rPr lang="en-US">
+                    <a:noFill/>
+                  </a:rPr>
+                  <a:t> </a:t>
+                </a:r>
+              </a:p>
+            </p:txBody>
+          </p:sp>
+        </mc:Fallback>
+      </mc:AlternateContent>
+      <mc:AlternateContent xmlns:mc="http://schemas.openxmlformats.org/markup-compatibility/2006" xmlns:a14="http://schemas.microsoft.com/office/drawing/2010/main">
+        <mc:Choice Requires="a14">
+          <p:sp>
+            <p:nvSpPr>
+              <p:cNvPr id="223" name="Total loss equals"/>
+              <p:cNvSpPr/>
+              <p:nvPr/>
+            </p:nvSpPr>
+            <p:spPr>
+              <a:xfrm>
+                <a:off x="3238500" y="3306900"/>
+                <a:ext cx="825500" cy="609600"/>
+              </a:xfrm>
+              <a:prstGeom prst="rect">
+                <a:avLst/>
+              </a:prstGeom>
+              <a:noFill/>
+              <a:ln w="0">
+                <a:noFill/>
+              </a:ln>
+              <a:effectLst/>
+            </p:spPr>
+            <p:style>
+              <a:lnRef idx="2">
+                <a:schemeClr val="accent1">
+                  <a:shade val="15000"/>
+                </a:schemeClr>
+              </a:lnRef>
+              <a:fillRef idx="1">
+                <a:schemeClr val="accent1"/>
+              </a:fillRef>
+              <a:effectRef idx="0">
+                <a:schemeClr val="accent1"/>
+              </a:effectRef>
+              <a:fontRef idx="minor">
+                <a:schemeClr val="lt1"/>
+              </a:fontRef>
+            </p:style>
+            <p:txBody>
+              <a:bodyPr rtlCol="0" anchor="ctr"/>
+              <a:lstStyle/>
+              <a:p>
+                <a:pPr algn="ctr"/>
+                <a14:m>
+                  <m:oMathPara xmlns:m="http://schemas.openxmlformats.org/officeDocument/2006/math">
+                    <m:oMath>
                       <m:r>
-                        <a:rPr lang="en-US" sz="1400" b="0" i="1" smtClean="0">
-                          <a:solidFill>
-                            <a:srgbClr val="242424"/>
-                          </a:solidFill>
-                          <a:latin typeface="Cambria Math" panose="02040503050406030204" pitchFamily="18" charset="0"/>
-                          <a:cs typeface="Arial"/>
-                        </a:rPr>
-                        <m:t>h</m:t>
-                      </m:r>
-                    </m:e>
-                    <m:sub>
-                      <m:r>
-                        <a:rPr lang="en-US" sz="1400" b="0" i="1" smtClean="0">
-                          <a:solidFill>
-                            <a:srgbClr val="242424"/>
-                          </a:solidFill>
-                          <a:latin typeface="Cambria Math" panose="02040503050406030204" pitchFamily="18" charset="0"/>
-                          <a:cs typeface="Arial"/>
-                        </a:rPr>
-                        <m:t>𝑖</m:t>
-                      </m:r>
-                    </m:sub>
-                  </m:sSub>
-                </m:oMath>
-              </m:oMathPara>
-            </a14:m>
-            <a:endParaRPr sz="900" b="0" i="1" baseline="-20000" dirty="0">
-              <a:solidFill>
-                <a:srgbClr val="242424"/>
-              </a:solidFill>
-              <a:latin typeface="Arial"/>
-              <a:ea typeface="Arial"/>
-              <a:cs typeface="Arial"/>
-            </a:endParaRPr>
-          </a:p>
-        </p:txBody>
-      </p:sp>
-      <p:sp xmlns:a14="http://schemas.microsoft.com/office/drawing/2010/main">
-        <p:nvSpPr>
-          <p:cNvPr id="156" name="PAFA regularization losses"/>
-          <p:cNvSpPr/>
-          <p:nvPr/>
-        </p:nvSpPr>
-        <p:spPr>
-          <a:xfrm>
-            <a:off x="5118100" y="3975100"/>
-            <a:ext cx="2019300" cy="457200"/>
-          </a:xfrm>
-          <a:prstGeom prst="rect">
-            <a:avLst/>
-          </a:prstGeom>
-          <a:solidFill>
-            <a:srgbClr val="7030A0">
-              <a:alpha val="14118"/>
-            </a:srgbClr>
-          </a:solidFill>
-          <a:ln>
-            <a:solidFill>
-              <a:srgbClr val="7030A0"/>
-            </a:solidFill>
-          </a:ln>
-        </p:spPr>
-        <p:style>
-          <a:lnRef idx="2">
-            <a:schemeClr val="accent1">
-              <a:shade val="15000"/>
-            </a:schemeClr>
-          </a:lnRef>
-          <a:fillRef idx="1">
-            <a:schemeClr val="accent1"/>
-          </a:fillRef>
-          <a:effectRef idx="0">
-            <a:schemeClr val="accent1"/>
-          </a:effectRef>
-          <a:fontRef idx="minor">
-            <a:schemeClr val="lt1"/>
-          </a:fontRef>
-        </p:style>
-        <p:txBody>
-          <a:bodyPr anchor="ctr" wrap="none" lIns="0" rIns="0" tIns="0" bIns="0">
-            <a:noAutofit/>
-          </a:bodyPr>
-          <a:lstStyle/>
-          <a:p>
-            <a:pPr algn="ctr"/>
-            <a14:m>
-              <ns0:oMathPara xmlns:ns0="http://schemas.openxmlformats.org/officeDocument/2006/math">
-                <ns0:oMath>
-                  <ns0:sSub>
-                    <ns0:sSubPr>
-                      <ns0:ctrlPr>
-                        <a:rPr lang="en-US" b="0" i="1" smtClean="0" sz="1800">
+                        <a:rPr lang="en-US" i="1" smtClean="0">
                           <a:solidFill>
                             <a:schemeClr val="tx1"/>
                           </a:solidFill>
                           <a:latin typeface="Cambria Math" panose="02040503050406030204" pitchFamily="18" charset="0"/>
                           <a:ea typeface="Cambria Math" panose="02040503050406030204" pitchFamily="18" charset="0"/>
                         </a:rPr>
-                      </ns0:ctrlPr>
-                    </ns0:sSubPr>
-                    <ns0:e>
-                      <ns0:r>
-                        <a:rPr lang="en-US" b="0" i="1" smtClean="0" sz="1800">
+                        <m:t>ℒ</m:t>
+                      </m:r>
+                      <m:r>
+                        <a:rPr lang="en-US" b="0" i="1" smtClean="0">
                           <a:solidFill>
                             <a:schemeClr val="tx1"/>
                           </a:solidFill>
                           <a:latin typeface="Cambria Math" panose="02040503050406030204" pitchFamily="18" charset="0"/>
                           <a:ea typeface="Cambria Math" panose="02040503050406030204" pitchFamily="18" charset="0"/>
                         </a:rPr>
-                        <ns0:t>ℒ</ns0:t>
-                      </ns0:r>
-                    </ns0:e>
-                    <ns0:sub>
-                      <ns0:r>
-                        <ns0:rPr>
-                          <ns0:sty ns0:val="p"/>
-                        </ns0:rPr>
-                        <a:rPr lang="en-US" b="0" i="1" smtClean="0" sz="1800">
+                        <m:t>=</m:t>
+                      </m:r>
+                    </m:oMath>
+                  </m:oMathPara>
+                </a14:m>
+                <a:endParaRPr dirty="0"/>
+              </a:p>
+            </p:txBody>
+          </p:sp>
+        </mc:Choice>
+        <mc:Fallback xmlns="">
+          <p:sp>
+            <p:nvSpPr>
+              <p:cNvPr id="223" name="Total loss equals"/>
+              <p:cNvSpPr>
+                <a:spLocks noRot="1" noChangeAspect="1" noMove="1" noResize="1" noEditPoints="1" noAdjustHandles="1" noChangeArrowheads="1" noChangeShapeType="1" noTextEdit="1"/>
+              </p:cNvSpPr>
+              <p:nvPr/>
+            </p:nvSpPr>
+            <p:spPr>
+              <a:xfrm>
+                <a:off x="3238500" y="3306900"/>
+                <a:ext cx="825500" cy="609600"/>
+              </a:xfrm>
+              <a:prstGeom prst="rect">
+                <a:avLst/>
+              </a:prstGeom>
+              <a:blipFill>
+                <a:blip r:embed="rId15"/>
+                <a:stretch>
+                  <a:fillRect/>
+                </a:stretch>
+              </a:blipFill>
+              <a:ln w="0">
+                <a:noFill/>
+              </a:ln>
+              <a:effectLst/>
+            </p:spPr>
+            <p:txBody>
+              <a:bodyPr/>
+              <a:lstStyle/>
+              <a:p>
+                <a:r>
+                  <a:rPr lang="en-US">
+                    <a:noFill/>
+                  </a:rPr>
+                  <a:t> </a:t>
+                </a:r>
+              </a:p>
+            </p:txBody>
+          </p:sp>
+        </mc:Fallback>
+      </mc:AlternateContent>
+      <mc:AlternateContent xmlns:mc="http://schemas.openxmlformats.org/markup-compatibility/2006" xmlns:a14="http://schemas.microsoft.com/office/drawing/2010/main">
+        <mc:Choice Requires="a14">
+          <p:sp>
+            <p:nvSpPr>
+              <p:cNvPr id="224" name="Weighted patient contrastive term"/>
+              <p:cNvSpPr/>
+              <p:nvPr/>
+            </p:nvSpPr>
+            <p:spPr>
+              <a:xfrm>
+                <a:off x="4064000" y="3306900"/>
+                <a:ext cx="2159000" cy="609600"/>
+              </a:xfrm>
+              <a:prstGeom prst="rect">
+                <a:avLst/>
+              </a:prstGeom>
+              <a:noFill/>
+              <a:ln w="0">
+                <a:noFill/>
+              </a:ln>
+              <a:effectLst/>
+            </p:spPr>
+            <p:style>
+              <a:lnRef idx="2">
+                <a:schemeClr val="accent1">
+                  <a:shade val="15000"/>
+                </a:schemeClr>
+              </a:lnRef>
+              <a:fillRef idx="1">
+                <a:schemeClr val="accent1"/>
+              </a:fillRef>
+              <a:effectRef idx="0">
+                <a:schemeClr val="accent1"/>
+              </a:effectRef>
+              <a:fontRef idx="minor">
+                <a:schemeClr val="lt1"/>
+              </a:fontRef>
+            </p:style>
+            <p:txBody>
+              <a:bodyPr rtlCol="0" anchor="ctr"/>
+              <a:lstStyle/>
+              <a:p>
+                <a:pPr algn="ctr"/>
+                <a14:m>
+                  <m:oMathPara xmlns:m="http://schemas.openxmlformats.org/officeDocument/2006/math">
+                    <m:oMath>
+                      <m:sSub>
+                        <m:sSubPr>
+                          <m:ctrlPr>
+                            <a:rPr lang="en-US" b="0" i="1" smtClean="0">
+                              <a:solidFill>
+                                <a:schemeClr val="tx1"/>
+                              </a:solidFill>
+                              <a:latin typeface="Cambria Math" panose="02040503050406030204" pitchFamily="18" charset="0"/>
+                              <a:ea typeface="Cambria Math" panose="02040503050406030204" pitchFamily="18" charset="0"/>
+                            </a:rPr>
+                          </m:ctrlPr>
+                        </m:sSubPr>
+                        <m:e>
+                          <m:r>
+                            <a:rPr lang="en-US" b="0" i="1" smtClean="0">
+                              <a:solidFill>
+                                <a:schemeClr val="tx1"/>
+                              </a:solidFill>
+                              <a:latin typeface="Cambria Math" panose="02040503050406030204" pitchFamily="18" charset="0"/>
+                              <a:ea typeface="Cambria Math" panose="02040503050406030204" pitchFamily="18" charset="0"/>
+                            </a:rPr>
+                            <m:t>𝜆</m:t>
+                          </m:r>
+                        </m:e>
+                        <m:sub>
+                          <m:r>
+                            <m:rPr>
+                              <m:sty m:val="p"/>
+                            </m:rPr>
+                            <a:rPr lang="en-US" b="0" i="1" smtClean="0">
+                              <a:solidFill>
+                                <a:schemeClr val="tx1"/>
+                              </a:solidFill>
+                              <a:latin typeface="Cambria Math" panose="02040503050406030204" pitchFamily="18" charset="0"/>
+                              <a:ea typeface="Cambria Math" panose="02040503050406030204" pitchFamily="18" charset="0"/>
+                            </a:rPr>
+                            <m:t>p</m:t>
+                          </m:r>
+                        </m:sub>
+                      </m:sSub>
+                      <m:sSub>
+                        <m:sSubPr>
+                          <m:ctrlPr>
+                            <a:rPr lang="en-US" b="0" i="1" smtClean="0">
+                              <a:solidFill>
+                                <a:schemeClr val="tx1"/>
+                              </a:solidFill>
+                              <a:latin typeface="Cambria Math" panose="02040503050406030204" pitchFamily="18" charset="0"/>
+                              <a:ea typeface="Cambria Math" panose="02040503050406030204" pitchFamily="18" charset="0"/>
+                            </a:rPr>
+                          </m:ctrlPr>
+                        </m:sSubPr>
+                        <m:e>
+                          <m:r>
+                            <a:rPr lang="en-US" b="0" i="1" smtClean="0">
+                              <a:solidFill>
+                                <a:schemeClr val="tx1"/>
+                              </a:solidFill>
+                              <a:latin typeface="Cambria Math" panose="02040503050406030204" pitchFamily="18" charset="0"/>
+                              <a:ea typeface="Cambria Math" panose="02040503050406030204" pitchFamily="18" charset="0"/>
+                            </a:rPr>
+                            <m:t>ℒ</m:t>
+                          </m:r>
+                        </m:e>
+                        <m:sub>
+                          <m:r>
+                            <m:rPr>
+                              <m:sty m:val="p"/>
+                            </m:rPr>
+                            <a:rPr lang="en-US" b="0" i="1" smtClean="0">
+                              <a:solidFill>
+                                <a:schemeClr val="tx1"/>
+                              </a:solidFill>
+                              <a:latin typeface="Cambria Math" panose="02040503050406030204" pitchFamily="18" charset="0"/>
+                              <a:ea typeface="Cambria Math" panose="02040503050406030204" pitchFamily="18" charset="0"/>
+                            </a:rPr>
+                            <m:t>PCSL</m:t>
+                          </m:r>
+                        </m:sub>
+                      </m:sSub>
+                    </m:oMath>
+                  </m:oMathPara>
+                </a14:m>
+                <a:endParaRPr dirty="0"/>
+              </a:p>
+            </p:txBody>
+          </p:sp>
+        </mc:Choice>
+        <mc:Fallback xmlns="">
+          <p:sp>
+            <p:nvSpPr>
+              <p:cNvPr id="224" name="Weighted patient contrastive term"/>
+              <p:cNvSpPr>
+                <a:spLocks noRot="1" noChangeAspect="1" noMove="1" noResize="1" noEditPoints="1" noAdjustHandles="1" noChangeArrowheads="1" noChangeShapeType="1" noTextEdit="1"/>
+              </p:cNvSpPr>
+              <p:nvPr/>
+            </p:nvSpPr>
+            <p:spPr>
+              <a:xfrm>
+                <a:off x="4064000" y="3306900"/>
+                <a:ext cx="2159000" cy="609600"/>
+              </a:xfrm>
+              <a:prstGeom prst="rect">
+                <a:avLst/>
+              </a:prstGeom>
+              <a:blipFill>
+                <a:blip r:embed="rId16"/>
+                <a:stretch>
+                  <a:fillRect/>
+                </a:stretch>
+              </a:blipFill>
+              <a:ln w="0">
+                <a:noFill/>
+              </a:ln>
+              <a:effectLst/>
+            </p:spPr>
+            <p:txBody>
+              <a:bodyPr/>
+              <a:lstStyle/>
+              <a:p>
+                <a:r>
+                  <a:rPr lang="en-US">
+                    <a:noFill/>
+                  </a:rPr>
+                  <a:t> </a:t>
+                </a:r>
+              </a:p>
+            </p:txBody>
+          </p:sp>
+        </mc:Fallback>
+      </mc:AlternateContent>
+      <mc:AlternateContent xmlns:mc="http://schemas.openxmlformats.org/markup-compatibility/2006" xmlns:a14="http://schemas.microsoft.com/office/drawing/2010/main">
+        <mc:Choice Requires="a14">
+          <p:sp>
+            <p:nvSpPr>
+              <p:cNvPr id="225" name="Weighted attention regularization term"/>
+              <p:cNvSpPr/>
+              <p:nvPr/>
+            </p:nvSpPr>
+            <p:spPr>
+              <a:xfrm>
+                <a:off x="6034699" y="3329744"/>
+                <a:ext cx="2159000" cy="609600"/>
+              </a:xfrm>
+              <a:prstGeom prst="rect">
+                <a:avLst/>
+              </a:prstGeom>
+              <a:noFill/>
+              <a:ln w="0">
+                <a:noFill/>
+              </a:ln>
+              <a:effectLst/>
+            </p:spPr>
+            <p:style>
+              <a:lnRef idx="2">
+                <a:schemeClr val="accent1">
+                  <a:shade val="15000"/>
+                </a:schemeClr>
+              </a:lnRef>
+              <a:fillRef idx="1">
+                <a:schemeClr val="accent1"/>
+              </a:fillRef>
+              <a:effectRef idx="0">
+                <a:schemeClr val="accent1"/>
+              </a:effectRef>
+              <a:fontRef idx="minor">
+                <a:schemeClr val="lt1"/>
+              </a:fontRef>
+            </p:style>
+            <p:txBody>
+              <a:bodyPr rtlCol="0" anchor="ctr"/>
+              <a:lstStyle/>
+              <a:p>
+                <a:pPr algn="ctr"/>
+                <a14:m>
+                  <m:oMathPara xmlns:m="http://schemas.openxmlformats.org/officeDocument/2006/math">
+                    <m:oMath>
+                      <m:sSub>
+                        <m:sSubPr>
+                          <m:ctrlPr>
+                            <a:rPr lang="en-US" b="0" i="1" smtClean="0">
+                              <a:solidFill>
+                                <a:srgbClr val="7030A0"/>
+                              </a:solidFill>
+                              <a:latin typeface="Cambria Math" panose="02040503050406030204" pitchFamily="18" charset="0"/>
+                              <a:ea typeface="Cambria Math" panose="02040503050406030204" pitchFamily="18" charset="0"/>
+                            </a:rPr>
+                          </m:ctrlPr>
+                        </m:sSubPr>
+                        <m:e>
+                          <m:r>
+                            <a:rPr lang="en-US" b="0" i="1" smtClean="0">
+                              <a:solidFill>
+                                <a:srgbClr val="7030A0"/>
+                              </a:solidFill>
+                              <a:latin typeface="Cambria Math" panose="02040503050406030204" pitchFamily="18" charset="0"/>
+                              <a:ea typeface="Cambria Math" panose="02040503050406030204" pitchFamily="18" charset="0"/>
+                            </a:rPr>
+                            <m:t>𝜆</m:t>
+                          </m:r>
+                        </m:e>
+                        <m:sub>
+                          <m:r>
+                            <a:rPr lang="en-US" b="0" i="1" smtClean="0">
+                              <a:solidFill>
+                                <a:srgbClr val="7030A0"/>
+                              </a:solidFill>
+                              <a:latin typeface="Cambria Math" panose="02040503050406030204" pitchFamily="18" charset="0"/>
+                              <a:ea typeface="Cambria Math" panose="02040503050406030204" pitchFamily="18" charset="0"/>
+                              <a:cs typeface="Arial" panose="020B0604020202020204" pitchFamily="34" charset="0"/>
+                            </a:rPr>
+                            <m:t>𝑔</m:t>
+                          </m:r>
+                        </m:sub>
+                      </m:sSub>
+                      <m:sSub>
+                        <m:sSubPr>
+                          <m:ctrlPr>
+                            <a:rPr lang="en-US" b="0" i="1" smtClean="0">
+                              <a:solidFill>
+                                <a:srgbClr val="7030A0"/>
+                              </a:solidFill>
+                              <a:latin typeface="Cambria Math" panose="02040503050406030204" pitchFamily="18" charset="0"/>
+                              <a:ea typeface="Cambria Math" panose="02040503050406030204" pitchFamily="18" charset="0"/>
+                            </a:rPr>
+                          </m:ctrlPr>
+                        </m:sSubPr>
+                        <m:e>
+                          <m:r>
+                            <a:rPr lang="en-US" b="0" i="1" smtClean="0">
+                              <a:solidFill>
+                                <a:srgbClr val="7030A0"/>
+                              </a:solidFill>
+                              <a:latin typeface="Cambria Math" panose="02040503050406030204" pitchFamily="18" charset="0"/>
+                              <a:ea typeface="Cambria Math" panose="02040503050406030204" pitchFamily="18" charset="0"/>
+                            </a:rPr>
+                            <m:t>ℒ</m:t>
+                          </m:r>
+                        </m:e>
+                        <m:sub>
+                          <m:r>
+                            <m:rPr>
+                              <m:sty m:val="p"/>
+                            </m:rPr>
+                            <a:rPr lang="en-US" b="0" i="1" smtClean="0">
+                              <a:solidFill>
+                                <a:srgbClr val="7030A0"/>
+                              </a:solidFill>
+                              <a:latin typeface="Cambria Math" panose="02040503050406030204" pitchFamily="18" charset="0"/>
+                              <a:ea typeface="Cambria Math" panose="02040503050406030204" pitchFamily="18" charset="0"/>
+                            </a:rPr>
+                            <m:t>GPAL</m:t>
+                          </m:r>
+                        </m:sub>
+                      </m:sSub>
+                    </m:oMath>
+                  </m:oMathPara>
+                </a14:m>
+                <a:endParaRPr dirty="0"/>
+              </a:p>
+            </p:txBody>
+          </p:sp>
+        </mc:Choice>
+        <mc:Fallback xmlns="">
+          <p:sp>
+            <p:nvSpPr>
+              <p:cNvPr id="225" name="Weighted attention regularization term"/>
+              <p:cNvSpPr>
+                <a:spLocks noRot="1" noChangeAspect="1" noMove="1" noResize="1" noEditPoints="1" noAdjustHandles="1" noChangeArrowheads="1" noChangeShapeType="1" noTextEdit="1"/>
+              </p:cNvSpPr>
+              <p:nvPr/>
+            </p:nvSpPr>
+            <p:spPr>
+              <a:xfrm>
+                <a:off x="6034699" y="3329744"/>
+                <a:ext cx="2159000" cy="609600"/>
+              </a:xfrm>
+              <a:prstGeom prst="rect">
+                <a:avLst/>
+              </a:prstGeom>
+              <a:blipFill>
+                <a:blip r:embed="rId17"/>
+                <a:stretch>
+                  <a:fillRect/>
+                </a:stretch>
+              </a:blipFill>
+              <a:ln w="0">
+                <a:noFill/>
+              </a:ln>
+              <a:effectLst/>
+            </p:spPr>
+            <p:txBody>
+              <a:bodyPr/>
+              <a:lstStyle/>
+              <a:p>
+                <a:r>
+                  <a:rPr lang="en-US">
+                    <a:noFill/>
+                  </a:rPr>
+                  <a:t> </a:t>
+                </a:r>
+              </a:p>
+            </p:txBody>
+          </p:sp>
+        </mc:Fallback>
+      </mc:AlternateContent>
+      <mc:AlternateContent xmlns:mc="http://schemas.openxmlformats.org/markup-compatibility/2006" xmlns:a14="http://schemas.microsoft.com/office/drawing/2010/main">
+        <mc:Choice Requires="a14">
+          <p:sp>
+            <p:nvSpPr>
+              <p:cNvPr id="226" name="Classification term"/>
+              <p:cNvSpPr/>
+              <p:nvPr/>
+            </p:nvSpPr>
+            <p:spPr>
+              <a:xfrm>
+                <a:off x="8371499" y="3318322"/>
+                <a:ext cx="1397000" cy="609600"/>
+              </a:xfrm>
+              <a:prstGeom prst="rect">
+                <a:avLst/>
+              </a:prstGeom>
+              <a:noFill/>
+              <a:ln w="0">
+                <a:noFill/>
+              </a:ln>
+              <a:effectLst/>
+            </p:spPr>
+            <p:style>
+              <a:lnRef idx="2">
+                <a:schemeClr val="accent1">
+                  <a:shade val="15000"/>
+                </a:schemeClr>
+              </a:lnRef>
+              <a:fillRef idx="1">
+                <a:schemeClr val="accent1"/>
+              </a:fillRef>
+              <a:effectRef idx="0">
+                <a:schemeClr val="accent1"/>
+              </a:effectRef>
+              <a:fontRef idx="minor">
+                <a:schemeClr val="lt1"/>
+              </a:fontRef>
+            </p:style>
+            <p:txBody>
+              <a:bodyPr rtlCol="0" anchor="ctr"/>
+              <a:lstStyle/>
+              <a:p>
+                <a:pPr algn="ctr"/>
+                <a14:m>
+                  <m:oMathPara xmlns:m="http://schemas.openxmlformats.org/officeDocument/2006/math">
+                    <m:oMath>
+                      <m:sSub>
+                        <m:sSubPr>
+                          <m:ctrlPr>
+                            <a:rPr lang="en-US" b="0" i="1" smtClean="0">
+                              <a:solidFill>
+                                <a:schemeClr val="accent6">
+                                  <a:lumMod val="50000"/>
+                                </a:schemeClr>
+                              </a:solidFill>
+                              <a:latin typeface="Cambria Math" panose="02040503050406030204" pitchFamily="18" charset="0"/>
+                              <a:ea typeface="Cambria Math" panose="02040503050406030204" pitchFamily="18" charset="0"/>
+                            </a:rPr>
+                          </m:ctrlPr>
+                        </m:sSubPr>
+                        <m:e>
+                          <m:r>
+                            <a:rPr lang="en-US" b="0" i="1" smtClean="0">
+                              <a:solidFill>
+                                <a:schemeClr val="accent6">
+                                  <a:lumMod val="50000"/>
+                                </a:schemeClr>
+                              </a:solidFill>
+                              <a:latin typeface="Cambria Math" panose="02040503050406030204" pitchFamily="18" charset="0"/>
+                              <a:ea typeface="Cambria Math" panose="02040503050406030204" pitchFamily="18" charset="0"/>
+                            </a:rPr>
+                            <m:t>ℒ</m:t>
+                          </m:r>
+                        </m:e>
+                        <m:sub>
+                          <m:r>
+                            <m:rPr>
+                              <m:sty m:val="p"/>
+                            </m:rPr>
+                            <a:rPr lang="en-US" b="0" i="1" smtClean="0">
+                              <a:solidFill>
+                                <a:schemeClr val="accent6">
+                                  <a:lumMod val="50000"/>
+                                </a:schemeClr>
+                              </a:solidFill>
+                              <a:latin typeface="Cambria Math" panose="02040503050406030204" pitchFamily="18" charset="0"/>
+                              <a:ea typeface="Cambria Math" panose="02040503050406030204" pitchFamily="18" charset="0"/>
+                            </a:rPr>
+                            <m:t>cls</m:t>
+                          </m:r>
+                        </m:sub>
+                      </m:sSub>
+                    </m:oMath>
+                  </m:oMathPara>
+                </a14:m>
+                <a:endParaRPr dirty="0"/>
+              </a:p>
+            </p:txBody>
+          </p:sp>
+        </mc:Choice>
+        <mc:Fallback xmlns="">
+          <p:sp>
+            <p:nvSpPr>
+              <p:cNvPr id="226" name="Classification term"/>
+              <p:cNvSpPr>
+                <a:spLocks noRot="1" noChangeAspect="1" noMove="1" noResize="1" noEditPoints="1" noAdjustHandles="1" noChangeArrowheads="1" noChangeShapeType="1" noTextEdit="1"/>
+              </p:cNvSpPr>
+              <p:nvPr/>
+            </p:nvSpPr>
+            <p:spPr>
+              <a:xfrm>
+                <a:off x="8371499" y="3318322"/>
+                <a:ext cx="1397000" cy="609600"/>
+              </a:xfrm>
+              <a:prstGeom prst="rect">
+                <a:avLst/>
+              </a:prstGeom>
+              <a:blipFill>
+                <a:blip r:embed="rId18"/>
+                <a:stretch>
+                  <a:fillRect/>
+                </a:stretch>
+              </a:blipFill>
+              <a:ln w="0">
+                <a:noFill/>
+              </a:ln>
+              <a:effectLst/>
+            </p:spPr>
+            <p:txBody>
+              <a:bodyPr/>
+              <a:lstStyle/>
+              <a:p>
+                <a:r>
+                  <a:rPr lang="en-US">
+                    <a:noFill/>
+                  </a:rPr>
+                  <a:t> </a:t>
+                </a:r>
+              </a:p>
+            </p:txBody>
+          </p:sp>
+        </mc:Fallback>
+      </mc:AlternateContent>
+      <mc:AlternateContent xmlns:mc="http://schemas.openxmlformats.org/markup-compatibility/2006" xmlns:a14="http://schemas.microsoft.com/office/drawing/2010/main">
+        <mc:Choice Requires="a14">
+          <p:sp>
+            <p:nvSpPr>
+              <p:cNvPr id="227" name="Weighted optional HF term"/>
+              <p:cNvSpPr/>
+              <p:nvPr/>
+            </p:nvSpPr>
+            <p:spPr>
+              <a:xfrm>
+                <a:off x="10312400" y="3306900"/>
+                <a:ext cx="2260600" cy="609600"/>
+              </a:xfrm>
+              <a:prstGeom prst="rect">
+                <a:avLst/>
+              </a:prstGeom>
+              <a:noFill/>
+              <a:ln w="0">
+                <a:noFill/>
+              </a:ln>
+              <a:effectLst/>
+            </p:spPr>
+            <p:style>
+              <a:lnRef idx="2">
+                <a:schemeClr val="accent1">
+                  <a:shade val="15000"/>
+                </a:schemeClr>
+              </a:lnRef>
+              <a:fillRef idx="1">
+                <a:schemeClr val="accent1"/>
+              </a:fillRef>
+              <a:effectRef idx="0">
+                <a:schemeClr val="accent1"/>
+              </a:effectRef>
+              <a:fontRef idx="minor">
+                <a:schemeClr val="lt1"/>
+              </a:fontRef>
+            </p:style>
+            <p:txBody>
+              <a:bodyPr rtlCol="0" anchor="ctr"/>
+              <a:lstStyle/>
+              <a:p>
+                <a:pPr algn="ctr"/>
+                <a14:m>
+                  <m:oMathPara xmlns:m="http://schemas.openxmlformats.org/officeDocument/2006/math">
+                    <m:oMath>
+                      <m:sSub>
+                        <m:sSubPr>
+                          <m:ctrlPr>
+                            <a:rPr lang="en-US" b="0" i="1" smtClean="0">
+                              <a:solidFill>
+                                <a:srgbClr val="B6993A"/>
+                              </a:solidFill>
+                              <a:latin typeface="Cambria Math" panose="02040503050406030204" pitchFamily="18" charset="0"/>
+                              <a:ea typeface="Cambria Math" panose="02040503050406030204" pitchFamily="18" charset="0"/>
+                            </a:rPr>
+                          </m:ctrlPr>
+                        </m:sSubPr>
+                        <m:e>
+                          <m:r>
+                            <a:rPr lang="en-US" b="0" i="1" smtClean="0">
+                              <a:solidFill>
+                                <a:srgbClr val="B6993A"/>
+                              </a:solidFill>
+                              <a:latin typeface="Cambria Math" panose="02040503050406030204" pitchFamily="18" charset="0"/>
+                              <a:ea typeface="Cambria Math" panose="02040503050406030204" pitchFamily="18" charset="0"/>
+                            </a:rPr>
+                            <m:t>𝜆</m:t>
+                          </m:r>
+                        </m:e>
+                        <m:sub>
+                          <m:r>
+                            <m:rPr>
+                              <m:sty m:val="p"/>
+                            </m:rPr>
+                            <a:rPr lang="en-US" b="0" i="1" smtClean="0">
+                              <a:solidFill>
+                                <a:srgbClr val="B6993A"/>
+                              </a:solidFill>
+                              <a:latin typeface="Cambria Math" panose="02040503050406030204" pitchFamily="18" charset="0"/>
+                              <a:ea typeface="Cambria Math" panose="02040503050406030204" pitchFamily="18" charset="0"/>
+                            </a:rPr>
+                            <m:t>HF</m:t>
+                          </m:r>
+                        </m:sub>
+                      </m:sSub>
+                      <m:sSub>
+                        <m:sSubPr>
+                          <m:ctrlPr>
+                            <a:rPr lang="en-US" b="0" i="1" smtClean="0">
+                              <a:solidFill>
+                                <a:srgbClr val="B6993A"/>
+                              </a:solidFill>
+                              <a:latin typeface="Cambria Math" panose="02040503050406030204" pitchFamily="18" charset="0"/>
+                              <a:ea typeface="Cambria Math" panose="02040503050406030204" pitchFamily="18" charset="0"/>
+                            </a:rPr>
+                          </m:ctrlPr>
+                        </m:sSubPr>
+                        <m:e>
+                          <m:r>
+                            <a:rPr lang="en-US" b="0" i="1" smtClean="0">
+                              <a:solidFill>
+                                <a:srgbClr val="B6993A"/>
+                              </a:solidFill>
+                              <a:latin typeface="Cambria Math" panose="02040503050406030204" pitchFamily="18" charset="0"/>
+                              <a:ea typeface="Cambria Math" panose="02040503050406030204" pitchFamily="18" charset="0"/>
+                            </a:rPr>
+                            <m:t>ℒ</m:t>
+                          </m:r>
+                        </m:e>
+                        <m:sub>
+                          <m:r>
+                            <m:rPr>
+                              <m:sty m:val="p"/>
+                            </m:rPr>
+                            <a:rPr lang="en-US" b="0" i="1" smtClean="0">
+                              <a:solidFill>
+                                <a:srgbClr val="B6993A"/>
+                              </a:solidFill>
+                              <a:latin typeface="Cambria Math" panose="02040503050406030204" pitchFamily="18" charset="0"/>
+                              <a:ea typeface="Cambria Math" panose="02040503050406030204" pitchFamily="18" charset="0"/>
+                            </a:rPr>
+                            <m:t>HF</m:t>
+                          </m:r>
+                        </m:sub>
+                      </m:sSub>
+                    </m:oMath>
+                  </m:oMathPara>
+                </a14:m>
+                <a:endParaRPr dirty="0"/>
+              </a:p>
+            </p:txBody>
+          </p:sp>
+        </mc:Choice>
+        <mc:Fallback xmlns="">
+          <p:sp>
+            <p:nvSpPr>
+              <p:cNvPr id="227" name="Weighted optional HF term"/>
+              <p:cNvSpPr>
+                <a:spLocks noRot="1" noChangeAspect="1" noMove="1" noResize="1" noEditPoints="1" noAdjustHandles="1" noChangeArrowheads="1" noChangeShapeType="1" noTextEdit="1"/>
+              </p:cNvSpPr>
+              <p:nvPr/>
+            </p:nvSpPr>
+            <p:spPr>
+              <a:xfrm>
+                <a:off x="10312400" y="3306900"/>
+                <a:ext cx="2260600" cy="609600"/>
+              </a:xfrm>
+              <a:prstGeom prst="rect">
+                <a:avLst/>
+              </a:prstGeom>
+              <a:blipFill>
+                <a:blip r:embed="rId19"/>
+                <a:stretch>
+                  <a:fillRect/>
+                </a:stretch>
+              </a:blipFill>
+              <a:ln w="0">
+                <a:noFill/>
+              </a:ln>
+              <a:effectLst/>
+            </p:spPr>
+            <p:txBody>
+              <a:bodyPr/>
+              <a:lstStyle/>
+              <a:p>
+                <a:r>
+                  <a:rPr lang="en-US">
+                    <a:noFill/>
+                  </a:rPr>
+                  <a:t> </a:t>
+                </a:r>
+              </a:p>
+            </p:txBody>
+          </p:sp>
+        </mc:Fallback>
+      </mc:AlternateContent>
+      <mc:AlternateContent xmlns:mc="http://schemas.openxmlformats.org/markup-compatibility/2006" xmlns:a14="http://schemas.microsoft.com/office/drawing/2010/main">
+        <mc:Choice Requires="a14">
+          <p:sp>
+            <p:nvSpPr>
+              <p:cNvPr id="228" name="Objective addition"/>
+              <p:cNvSpPr/>
+              <p:nvPr/>
+            </p:nvSpPr>
+            <p:spPr>
+              <a:xfrm>
+                <a:off x="5969000" y="3318322"/>
+                <a:ext cx="279400" cy="609600"/>
+              </a:xfrm>
+              <a:prstGeom prst="rect">
+                <a:avLst/>
+              </a:prstGeom>
+              <a:noFill/>
+              <a:ln w="0">
+                <a:noFill/>
+              </a:ln>
+              <a:effectLst/>
+            </p:spPr>
+            <p:style>
+              <a:lnRef idx="2">
+                <a:schemeClr val="accent1">
+                  <a:shade val="15000"/>
+                </a:schemeClr>
+              </a:lnRef>
+              <a:fillRef idx="1">
+                <a:schemeClr val="accent1"/>
+              </a:fillRef>
+              <a:effectRef idx="0">
+                <a:schemeClr val="accent1"/>
+              </a:effectRef>
+              <a:fontRef idx="minor">
+                <a:schemeClr val="lt1"/>
+              </a:fontRef>
+            </p:style>
+            <p:txBody>
+              <a:bodyPr rtlCol="0" anchor="ctr"/>
+              <a:lstStyle/>
+              <a:p>
+                <a:pPr algn="ctr"/>
+                <a14:m>
+                  <m:oMathPara xmlns:m="http://schemas.openxmlformats.org/officeDocument/2006/math">
+                    <m:oMath>
+                      <m:r>
+                        <m:rPr>
+                          <m:nor/>
+                        </m:rPr>
+                        <a:rPr lang="en-US" i="1" smtClean="0">
                           <a:solidFill>
                             <a:schemeClr val="tx1"/>
                           </a:solidFill>
                           <a:latin typeface="Cambria Math" panose="02040503050406030204" pitchFamily="18" charset="0"/>
                           <a:ea typeface="Cambria Math" panose="02040503050406030204" pitchFamily="18" charset="0"/>
                         </a:rPr>
-                        <ns0:t>PCSL</ns0:t>
-                      </ns0:r>
-                    </ns0:sub>
-                  </ns0:sSub>
-                  <ns0:r>
-                    <ns0:rPr>
-                      <ns0:nor/>
-                    </ns0:rPr>
-                    <a:rPr lang="en-US" i="1" smtClean="0" sz="1800">
-                      <a:solidFill>
-                        <a:schemeClr val="tx1"/>
-                      </a:solidFill>
-                      <a:latin typeface="Cambria Math" panose="02040503050406030204" pitchFamily="18" charset="0"/>
-                      <a:ea typeface="Cambria Math" panose="02040503050406030204" pitchFamily="18" charset="0"/>
-                    </a:rPr>
-                    <ns0:t>, </ns0:t>
-                  </ns0:r>
-                  <ns0:sSub>
-                    <ns0:sSubPr>
-                      <ns0:ctrlPr>
-                        <a:rPr lang="en-US" b="0" i="1" smtClean="0" sz="1800">
+                        <m:t> + </m:t>
+                      </m:r>
+                    </m:oMath>
+                  </m:oMathPara>
+                </a14:m>
+                <a:endParaRPr dirty="0"/>
+              </a:p>
+            </p:txBody>
+          </p:sp>
+        </mc:Choice>
+        <mc:Fallback xmlns="">
+          <p:sp>
+            <p:nvSpPr>
+              <p:cNvPr id="228" name="Objective addition"/>
+              <p:cNvSpPr>
+                <a:spLocks noRot="1" noChangeAspect="1" noMove="1" noResize="1" noEditPoints="1" noAdjustHandles="1" noChangeArrowheads="1" noChangeShapeType="1" noTextEdit="1"/>
+              </p:cNvSpPr>
+              <p:nvPr/>
+            </p:nvSpPr>
+            <p:spPr>
+              <a:xfrm>
+                <a:off x="5969000" y="3318322"/>
+                <a:ext cx="279400" cy="609600"/>
+              </a:xfrm>
+              <a:prstGeom prst="rect">
+                <a:avLst/>
+              </a:prstGeom>
+              <a:blipFill>
+                <a:blip r:embed="rId20"/>
+                <a:stretch>
+                  <a:fillRect l="-12500"/>
+                </a:stretch>
+              </a:blipFill>
+              <a:ln w="0">
+                <a:noFill/>
+              </a:ln>
+              <a:effectLst/>
+            </p:spPr>
+            <p:txBody>
+              <a:bodyPr/>
+              <a:lstStyle/>
+              <a:p>
+                <a:r>
+                  <a:rPr lang="en-US">
+                    <a:noFill/>
+                  </a:rPr>
+                  <a:t> </a:t>
+                </a:r>
+              </a:p>
+            </p:txBody>
+          </p:sp>
+        </mc:Fallback>
+      </mc:AlternateContent>
+      <mc:AlternateContent xmlns:mc="http://schemas.openxmlformats.org/markup-compatibility/2006" xmlns:a14="http://schemas.microsoft.com/office/drawing/2010/main">
+        <mc:Choice Requires="a14">
+          <p:sp>
+            <p:nvSpPr>
+              <p:cNvPr id="229" name="Objective addition"/>
+              <p:cNvSpPr/>
+              <p:nvPr/>
+            </p:nvSpPr>
+            <p:spPr>
+              <a:xfrm>
+                <a:off x="8013319" y="3318322"/>
+                <a:ext cx="279400" cy="609600"/>
+              </a:xfrm>
+              <a:prstGeom prst="rect">
+                <a:avLst/>
+              </a:prstGeom>
+              <a:noFill/>
+              <a:ln w="0">
+                <a:noFill/>
+              </a:ln>
+              <a:effectLst/>
+            </p:spPr>
+            <p:style>
+              <a:lnRef idx="2">
+                <a:schemeClr val="accent1">
+                  <a:shade val="15000"/>
+                </a:schemeClr>
+              </a:lnRef>
+              <a:fillRef idx="1">
+                <a:schemeClr val="accent1"/>
+              </a:fillRef>
+              <a:effectRef idx="0">
+                <a:schemeClr val="accent1"/>
+              </a:effectRef>
+              <a:fontRef idx="minor">
+                <a:schemeClr val="lt1"/>
+              </a:fontRef>
+            </p:style>
+            <p:txBody>
+              <a:bodyPr rtlCol="0" anchor="ctr"/>
+              <a:lstStyle/>
+              <a:p>
+                <a:pPr algn="ctr"/>
+                <a14:m>
+                  <m:oMathPara xmlns:m="http://schemas.openxmlformats.org/officeDocument/2006/math">
+                    <m:oMath>
+                      <m:r>
+                        <m:rPr>
+                          <m:nor/>
+                        </m:rPr>
+                        <a:rPr lang="en-US" i="1" smtClean="0">
                           <a:solidFill>
-                            <a:srgbClr val="7030A0"/>
+                            <a:schemeClr val="tx1"/>
                           </a:solidFill>
                           <a:latin typeface="Cambria Math" panose="02040503050406030204" pitchFamily="18" charset="0"/>
                           <a:ea typeface="Cambria Math" panose="02040503050406030204" pitchFamily="18" charset="0"/>
                         </a:rPr>
-                      </ns0:ctrlPr>
-                    </ns0:sSubPr>
-                    <ns0:e>
-                      <ns0:r>
-                        <a:rPr lang="en-US" b="0" i="1" smtClean="0" sz="1800">
+                        <m:t> + </m:t>
+                      </m:r>
+                    </m:oMath>
+                  </m:oMathPara>
+                </a14:m>
+                <a:endParaRPr dirty="0"/>
+              </a:p>
+            </p:txBody>
+          </p:sp>
+        </mc:Choice>
+        <mc:Fallback xmlns="">
+          <p:sp>
+            <p:nvSpPr>
+              <p:cNvPr id="229" name="Objective addition"/>
+              <p:cNvSpPr>
+                <a:spLocks noRot="1" noChangeAspect="1" noMove="1" noResize="1" noEditPoints="1" noAdjustHandles="1" noChangeArrowheads="1" noChangeShapeType="1" noTextEdit="1"/>
+              </p:cNvSpPr>
+              <p:nvPr/>
+            </p:nvSpPr>
+            <p:spPr>
+              <a:xfrm>
+                <a:off x="8013319" y="3318322"/>
+                <a:ext cx="279400" cy="609600"/>
+              </a:xfrm>
+              <a:prstGeom prst="rect">
+                <a:avLst/>
+              </a:prstGeom>
+              <a:blipFill>
+                <a:blip r:embed="rId21"/>
+                <a:stretch>
+                  <a:fillRect l="-18182"/>
+                </a:stretch>
+              </a:blipFill>
+              <a:ln w="0">
+                <a:noFill/>
+              </a:ln>
+              <a:effectLst/>
+            </p:spPr>
+            <p:txBody>
+              <a:bodyPr/>
+              <a:lstStyle/>
+              <a:p>
+                <a:r>
+                  <a:rPr lang="en-US">
+                    <a:noFill/>
+                  </a:rPr>
+                  <a:t> </a:t>
+                </a:r>
+              </a:p>
+            </p:txBody>
+          </p:sp>
+        </mc:Fallback>
+      </mc:AlternateContent>
+      <mc:AlternateContent xmlns:mc="http://schemas.openxmlformats.org/markup-compatibility/2006" xmlns:a14="http://schemas.microsoft.com/office/drawing/2010/main">
+        <mc:Choice Requires="a14">
+          <p:sp>
+            <p:nvSpPr>
+              <p:cNvPr id="230" name="Objective addition"/>
+              <p:cNvSpPr/>
+              <p:nvPr/>
+            </p:nvSpPr>
+            <p:spPr>
+              <a:xfrm>
+                <a:off x="10045700" y="3306900"/>
+                <a:ext cx="279400" cy="609600"/>
+              </a:xfrm>
+              <a:prstGeom prst="rect">
+                <a:avLst/>
+              </a:prstGeom>
+              <a:noFill/>
+              <a:ln w="0">
+                <a:noFill/>
+              </a:ln>
+              <a:effectLst/>
+            </p:spPr>
+            <p:style>
+              <a:lnRef idx="2">
+                <a:schemeClr val="accent1">
+                  <a:shade val="15000"/>
+                </a:schemeClr>
+              </a:lnRef>
+              <a:fillRef idx="1">
+                <a:schemeClr val="accent1"/>
+              </a:fillRef>
+              <a:effectRef idx="0">
+                <a:schemeClr val="accent1"/>
+              </a:effectRef>
+              <a:fontRef idx="minor">
+                <a:schemeClr val="lt1"/>
+              </a:fontRef>
+            </p:style>
+            <p:txBody>
+              <a:bodyPr rtlCol="0" anchor="ctr"/>
+              <a:lstStyle/>
+              <a:p>
+                <a:pPr algn="ctr"/>
+                <a14:m>
+                  <m:oMathPara xmlns:m="http://schemas.openxmlformats.org/officeDocument/2006/math">
+                    <m:oMath>
+                      <m:r>
+                        <m:rPr>
+                          <m:nor/>
+                        </m:rPr>
+                        <a:rPr lang="en-US" i="1" smtClean="0">
                           <a:solidFill>
-                            <a:srgbClr val="7030A0"/>
+                            <a:schemeClr val="tx1"/>
                           </a:solidFill>
                           <a:latin typeface="Cambria Math" panose="02040503050406030204" pitchFamily="18" charset="0"/>
                           <a:ea typeface="Cambria Math" panose="02040503050406030204" pitchFamily="18" charset="0"/>
                         </a:rPr>
-                        <ns0:t>ℒ</ns0:t>
-                      </ns0:r>
-                    </ns0:e>
-                    <ns0:sub>
-                      <ns0:r>
-                        <ns0:rPr>
-                          <ns0:sty ns0:val="p"/>
-                        </ns0:rPr>
-                        <a:rPr lang="en-US" b="0" i="1" smtClean="0" sz="1800">
-                          <a:solidFill>
-                            <a:srgbClr val="7030A0"/>
-                          </a:solidFill>
-                          <a:latin typeface="Cambria Math" panose="02040503050406030204" pitchFamily="18" charset="0"/>
-                          <a:ea typeface="Cambria Math" panose="02040503050406030204" pitchFamily="18" charset="0"/>
-                        </a:rPr>
-                        <ns0:t>GPAL</ns0:t>
-                      </ns0:r>
-                    </ns0:sub>
-                  </ns0:sSub>
-                </ns0:oMath>
-              </ns0:oMathPara>
-            </a14:m>
-          </a:p>
+                        <m:t> + </m:t>
+                      </m:r>
+                    </m:oMath>
+                  </m:oMathPara>
+                </a14:m>
+                <a:endParaRPr/>
+              </a:p>
+            </p:txBody>
+          </p:sp>
+        </mc:Choice>
+        <mc:Fallback xmlns="">
+          <p:sp>
+            <p:nvSpPr>
+              <p:cNvPr id="230" name="Objective addition"/>
+              <p:cNvSpPr>
+                <a:spLocks noRot="1" noChangeAspect="1" noMove="1" noResize="1" noEditPoints="1" noAdjustHandles="1" noChangeArrowheads="1" noChangeShapeType="1" noTextEdit="1"/>
+              </p:cNvSpPr>
+              <p:nvPr/>
+            </p:nvSpPr>
+            <p:spPr>
+              <a:xfrm>
+                <a:off x="10045700" y="3306900"/>
+                <a:ext cx="279400" cy="609600"/>
+              </a:xfrm>
+              <a:prstGeom prst="rect">
+                <a:avLst/>
+              </a:prstGeom>
+              <a:blipFill>
+                <a:blip r:embed="rId20"/>
+                <a:stretch>
+                  <a:fillRect l="-17391"/>
+                </a:stretch>
+              </a:blipFill>
+              <a:ln w="0">
+                <a:noFill/>
+              </a:ln>
+              <a:effectLst/>
+            </p:spPr>
+            <p:txBody>
+              <a:bodyPr/>
+              <a:lstStyle/>
+              <a:p>
+                <a:r>
+                  <a:rPr lang="en-US">
+                    <a:noFill/>
+                  </a:rPr>
+                  <a:t> </a:t>
+                </a:r>
+              </a:p>
+            </p:txBody>
+          </p:sp>
+        </mc:Fallback>
+      </mc:AlternateContent>
+      <p:sp>
+        <p:nvSpPr>
+          <p:cNvPr id="236" name="Bottom aligned loss annotation Patient contrastive"/>
+          <p:cNvSpPr txBox="1"/>
+          <p:nvPr/>
+        </p:nvSpPr>
+        <p:spPr>
+          <a:xfrm>
+            <a:off x="4178300" y="3866981"/>
+            <a:ext cx="1930400" cy="217865"/>
+          </a:xfrm>
+          <a:prstGeom prst="rect">
+            <a:avLst/>
+          </a:prstGeom>
+          <a:noFill/>
+        </p:spPr>
+        <p:txBody>
+          <a:bodyPr wrap="none" lIns="0" tIns="0" rIns="0" bIns="0" anchor="b">
+            <a:noAutofit/>
+          </a:bodyPr>
+          <a:lstStyle/>
           <a:p>
             <a:pPr algn="ctr"/>
             <a:r>
-              <a:rPr sz="1200" lang="en-US">
+              <a:rPr sz="1400" b="0" dirty="0">
+                <a:solidFill>
+                  <a:srgbClr val="333333"/>
+                </a:solidFill>
+                <a:latin typeface="Arial"/>
+              </a:rPr>
+              <a:t>Patient</a:t>
+            </a:r>
+            <a:r>
+              <a:rPr lang="en-US" sz="1400" b="0" dirty="0">
+                <a:solidFill>
+                  <a:srgbClr val="333333"/>
+                </a:solidFill>
+                <a:latin typeface="Arial"/>
+              </a:rPr>
+              <a:t> </a:t>
+            </a:r>
+            <a:r>
+              <a:rPr lang="en-US" sz="1400" dirty="0">
+                <a:solidFill>
+                  <a:srgbClr val="333333"/>
+                </a:solidFill>
+                <a:latin typeface="Arial"/>
+              </a:rPr>
+              <a:t>C</a:t>
+            </a:r>
+            <a:r>
+              <a:rPr sz="1400" b="0" dirty="0">
+                <a:solidFill>
+                  <a:srgbClr val="333333"/>
+                </a:solidFill>
+                <a:latin typeface="Arial"/>
+              </a:rPr>
+              <a:t>ontrastive</a:t>
+            </a:r>
+          </a:p>
+        </p:txBody>
+      </p:sp>
+      <p:sp>
+        <p:nvSpPr>
+          <p:cNvPr id="238" name="Bottom aligned loss annotation Patient alignment"/>
+          <p:cNvSpPr txBox="1"/>
+          <p:nvPr/>
+        </p:nvSpPr>
+        <p:spPr>
+          <a:xfrm>
+            <a:off x="6091588" y="3891252"/>
+            <a:ext cx="1930400" cy="203200"/>
+          </a:xfrm>
+          <a:prstGeom prst="rect">
+            <a:avLst/>
+          </a:prstGeom>
+          <a:noFill/>
+        </p:spPr>
+        <p:txBody>
+          <a:bodyPr wrap="none" lIns="0" tIns="0" rIns="0" bIns="0" anchor="b">
+            <a:noAutofit/>
+          </a:bodyPr>
+          <a:lstStyle/>
+          <a:p>
+            <a:pPr algn="ctr"/>
+            <a:r>
+              <a:rPr sz="1400" b="0" dirty="0">
                 <a:solidFill>
                   <a:srgbClr val="7030A0"/>
                 </a:solidFill>
                 <a:latin typeface="Arial"/>
               </a:rPr>
-              <a:t>Patient regularization</a:t>
+              <a:t>Patient</a:t>
+            </a:r>
+            <a:r>
+              <a:rPr lang="en-US" sz="1400" b="0" dirty="0">
+                <a:solidFill>
+                  <a:srgbClr val="7030A0"/>
+                </a:solidFill>
+                <a:latin typeface="Arial"/>
+              </a:rPr>
+              <a:t> A</a:t>
+            </a:r>
+            <a:r>
+              <a:rPr sz="1400" b="0" dirty="0">
+                <a:solidFill>
+                  <a:srgbClr val="7030A0"/>
+                </a:solidFill>
+                <a:latin typeface="Arial"/>
+              </a:rPr>
+              <a:t>lignment</a:t>
             </a:r>
           </a:p>
         </p:txBody>
       </p:sp>
       <p:sp>
         <p:nvSpPr>
-          <p:cNvPr id="157" name="Classification loss L_cls"/>
+          <p:cNvPr id="240" name="Bottom aligned loss annotation Native + C-W classification"/>
+          <p:cNvSpPr txBox="1"/>
+          <p:nvPr/>
+        </p:nvSpPr>
+        <p:spPr>
+          <a:xfrm>
+            <a:off x="8149792" y="3903570"/>
+            <a:ext cx="1930400" cy="190881"/>
+          </a:xfrm>
+          <a:prstGeom prst="rect">
+            <a:avLst/>
+          </a:prstGeom>
+          <a:noFill/>
+        </p:spPr>
+        <p:txBody>
+          <a:bodyPr wrap="none" lIns="0" tIns="0" rIns="0" bIns="0" anchor="b">
+            <a:noAutofit/>
+          </a:bodyPr>
+          <a:lstStyle/>
+          <a:p>
+            <a:pPr algn="ctr"/>
+            <a:r>
+              <a:rPr sz="1400" b="0" dirty="0">
+                <a:solidFill>
+                  <a:srgbClr val="32631C"/>
+                </a:solidFill>
+                <a:latin typeface="Arial"/>
+              </a:rPr>
+              <a:t>Native + </a:t>
+            </a:r>
+            <a:r>
+              <a:rPr sz="1400" i="1" dirty="0">
+                <a:solidFill>
+                  <a:srgbClr val="32631C"/>
+                </a:solidFill>
+                <a:latin typeface="Consolas" panose="020B0609020204030204" pitchFamily="49" charset="0"/>
+                <a:cs typeface="Consolas" panose="020B0609020204030204" pitchFamily="49" charset="0"/>
+              </a:rPr>
+              <a:t>C-W</a:t>
+            </a:r>
+            <a:r>
+              <a:rPr lang="en-US" sz="1400" i="1" dirty="0">
+                <a:solidFill>
+                  <a:srgbClr val="32631C"/>
+                </a:solidFill>
+                <a:latin typeface="Consolas" panose="020B0609020204030204" pitchFamily="49" charset="0"/>
+                <a:cs typeface="Consolas" panose="020B0609020204030204" pitchFamily="49" charset="0"/>
+              </a:rPr>
+              <a:t> </a:t>
+            </a:r>
+            <a:r>
+              <a:rPr lang="en-US" sz="1400" b="0" dirty="0">
+                <a:solidFill>
+                  <a:srgbClr val="32631C"/>
+                </a:solidFill>
+                <a:latin typeface="Arial"/>
+              </a:rPr>
+              <a:t>Cl</a:t>
+            </a:r>
+            <a:r>
+              <a:rPr sz="1400" b="0" dirty="0">
+                <a:solidFill>
+                  <a:srgbClr val="32631C"/>
+                </a:solidFill>
+                <a:latin typeface="Arial"/>
+              </a:rPr>
+              <a:t>assification</a:t>
+            </a:r>
+          </a:p>
+        </p:txBody>
+      </p:sp>
+      <p:sp>
+        <p:nvSpPr>
+          <p:cNvPr id="242" name="Bottom aligned loss annotation HF supervision (optional)"/>
+          <p:cNvSpPr txBox="1"/>
+          <p:nvPr/>
+        </p:nvSpPr>
+        <p:spPr>
+          <a:xfrm>
+            <a:off x="10490200" y="3891252"/>
+            <a:ext cx="1930400" cy="203200"/>
+          </a:xfrm>
+          <a:prstGeom prst="rect">
+            <a:avLst/>
+          </a:prstGeom>
+          <a:noFill/>
+        </p:spPr>
+        <p:txBody>
+          <a:bodyPr wrap="none" lIns="0" tIns="0" rIns="0" bIns="0" anchor="b">
+            <a:noAutofit/>
+          </a:bodyPr>
+          <a:lstStyle/>
+          <a:p>
+            <a:pPr algn="ctr"/>
+            <a:r>
+              <a:rPr sz="1400" b="0" dirty="0">
+                <a:solidFill>
+                  <a:srgbClr val="B6993A"/>
+                </a:solidFill>
+                <a:latin typeface="Arial"/>
+              </a:rPr>
+              <a:t>HF </a:t>
+            </a:r>
+            <a:r>
+              <a:rPr lang="en-US" sz="1400" b="0" dirty="0">
+                <a:solidFill>
+                  <a:srgbClr val="B6993A"/>
+                </a:solidFill>
+                <a:latin typeface="Arial"/>
+              </a:rPr>
+              <a:t>S</a:t>
+            </a:r>
+            <a:r>
+              <a:rPr sz="1400" b="0" dirty="0">
+                <a:solidFill>
+                  <a:srgbClr val="B6993A"/>
+                </a:solidFill>
+                <a:latin typeface="Arial"/>
+              </a:rPr>
+              <a:t>upervision</a:t>
+            </a:r>
+            <a:r>
+              <a:rPr lang="en-US" sz="1400" b="0" dirty="0">
+                <a:solidFill>
+                  <a:srgbClr val="B6993A"/>
+                </a:solidFill>
+                <a:latin typeface="Arial"/>
+              </a:rPr>
+              <a:t> </a:t>
+            </a:r>
+            <a:r>
+              <a:rPr sz="1400" b="0" dirty="0">
+                <a:solidFill>
+                  <a:srgbClr val="B6993A"/>
+                </a:solidFill>
+                <a:latin typeface="Arial"/>
+              </a:rPr>
+              <a:t>(</a:t>
+            </a:r>
+            <a:r>
+              <a:rPr lang="en-US" sz="1400" b="0" dirty="0">
+                <a:solidFill>
+                  <a:srgbClr val="B6993A"/>
+                </a:solidFill>
+                <a:latin typeface="Arial"/>
+              </a:rPr>
+              <a:t>O</a:t>
+            </a:r>
+            <a:r>
+              <a:rPr sz="1400" b="0" dirty="0">
+                <a:solidFill>
+                  <a:srgbClr val="B6993A"/>
+                </a:solidFill>
+                <a:latin typeface="Arial"/>
+              </a:rPr>
+              <a:t>ptional)</a:t>
+            </a:r>
+          </a:p>
+        </p:txBody>
+      </p:sp>
+      <p:sp>
+        <p:nvSpPr>
+          <p:cNvPr id="413" name="C-W supervision junction"/>
           <p:cNvSpPr/>
           <p:nvPr/>
         </p:nvSpPr>
         <p:spPr>
           <a:xfrm>
-            <a:off x="7493000" y="3975100"/>
-            <a:ext cx="2794000" cy="457200"/>
+            <a:off x="8121650" y="2495550"/>
+            <a:ext cx="38100" cy="38100"/>
+          </a:xfrm>
+          <a:prstGeom prst="ellipse">
+            <a:avLst/>
+          </a:prstGeom>
+          <a:solidFill>
+            <a:srgbClr val="32631C"/>
+          </a:solidFill>
+          <a:ln>
+            <a:noFill/>
+          </a:ln>
+        </p:spPr>
+        <p:txBody>
+          <a:bodyPr/>
+          <a:lstStyle/>
+          <a:p>
+            <a:endParaRPr lang="en-US"/>
+          </a:p>
+        </p:txBody>
+      </p:sp>
+      <p:sp>
+        <p:nvSpPr>
+          <p:cNvPr id="417" name="Classification training group title"/>
+          <p:cNvSpPr txBox="1"/>
+          <p:nvPr/>
+        </p:nvSpPr>
+        <p:spPr>
+          <a:xfrm>
+            <a:off x="9648092" y="1091475"/>
+            <a:ext cx="2641600" cy="292100"/>
+          </a:xfrm>
+          <a:prstGeom prst="rect">
+            <a:avLst/>
+          </a:prstGeom>
+          <a:noFill/>
+        </p:spPr>
+        <p:txBody>
+          <a:bodyPr wrap="none" lIns="0" tIns="0" rIns="0" bIns="0" anchor="b">
+            <a:noAutofit/>
+          </a:bodyPr>
+          <a:lstStyle/>
+          <a:p>
+            <a:pPr algn="ctr"/>
+            <a:r>
+              <a:rPr sz="1600" dirty="0">
+                <a:latin typeface="Arial"/>
+              </a:rPr>
+              <a:t>Training </a:t>
+            </a:r>
+            <a:r>
+              <a:rPr lang="en-US" sz="1600" dirty="0">
+                <a:latin typeface="Arial"/>
+              </a:rPr>
+              <a:t>S</a:t>
+            </a:r>
+            <a:r>
+              <a:rPr sz="1600" dirty="0">
+                <a:latin typeface="Arial"/>
+              </a:rPr>
+              <a:t>upervision</a:t>
+            </a:r>
+          </a:p>
+        </p:txBody>
+      </p:sp>
+      <mc:AlternateContent xmlns:mc="http://schemas.openxmlformats.org/markup-compatibility/2006">
+        <mc:Choice xmlns:a14="http://schemas.microsoft.com/office/drawing/2010/main" Requires="a14">
+          <p:sp>
+            <p:nvSpPr>
+              <p:cNvPr id="418" name="HF training source"/>
+              <p:cNvSpPr txBox="1"/>
+              <p:nvPr/>
+            </p:nvSpPr>
+            <p:spPr>
+              <a:xfrm>
+                <a:off x="9105900" y="2562879"/>
+                <a:ext cx="1549400" cy="203200"/>
+              </a:xfrm>
+              <a:prstGeom prst="rect">
+                <a:avLst/>
+              </a:prstGeom>
+              <a:noFill/>
+            </p:spPr>
+            <p:txBody>
+              <a:bodyPr wrap="none" lIns="0" tIns="0" rIns="0" bIns="0" anchor="b">
+                <a:noAutofit/>
+              </a:bodyPr>
+              <a:lstStyle/>
+              <a:p>
+                <a:pPr algn="ctr"/>
+                <a14:m>
+                  <m:oMath xmlns:m="http://schemas.openxmlformats.org/officeDocument/2006/math">
+                    <m:sSup>
+                      <m:sSupPr>
+                        <m:ctrlPr>
+                          <a:rPr lang="en-US" sz="1600" b="1" i="0" dirty="0">
+                            <a:solidFill>
+                              <a:srgbClr val="B6993A"/>
+                            </a:solidFill>
+                            <a:latin typeface="Arial" panose="020B0604020202020204" pitchFamily="34" charset="0"/>
+                            <a:cs typeface="Arial" panose="020B0604020202020204" pitchFamily="34" charset="0"/>
+                          </a:rPr>
+                        </m:ctrlPr>
+                      </m:sSupPr>
+                      <m:e>
+                        <m:r>
+                          <m:rPr>
+                            <m:nor/>
+                          </m:rPr>
+                          <a:rPr lang="en-US" sz="1600" b="1" i="0" dirty="0">
+                            <a:solidFill>
+                              <a:srgbClr val="B6993A"/>
+                            </a:solidFill>
+                            <a:latin typeface="Arial" panose="020B0604020202020204" pitchFamily="34" charset="0"/>
+                            <a:cs typeface="Arial" panose="020B0604020202020204" pitchFamily="34" charset="0"/>
+                          </a:rPr>
+                          <m:t>H</m:t>
+                        </m:r>
+                        <m:r>
+                          <m:rPr>
+                            <m:nor/>
+                          </m:rPr>
+                          <a:rPr lang="en-US" sz="1600" b="1" i="0" dirty="0" smtClean="0">
+                            <a:solidFill>
+                              <a:srgbClr val="B6993A"/>
+                            </a:solidFill>
+                            <a:latin typeface="Arial" panose="020B0604020202020204" pitchFamily="34" charset="0"/>
+                            <a:cs typeface="Arial" panose="020B0604020202020204" pitchFamily="34" charset="0"/>
+                          </a:rPr>
+                          <m:t>F train</m:t>
+                        </m:r>
+                      </m:e>
+                      <m:sup>
+                        <m:r>
+                          <a:rPr lang="ar-AE" sz="1600" b="1" i="1">
+                            <a:solidFill>
+                              <a:srgbClr val="B6993A"/>
+                            </a:solidFill>
+                            <a:latin typeface="Cambria Math" panose="02040503050406030204" pitchFamily="18" charset="0"/>
+                            <a:cs typeface="Arial" panose="020B0604020202020204" pitchFamily="34" charset="0"/>
+                          </a:rPr>
+                          <m:t>∗</m:t>
+                        </m:r>
+                      </m:sup>
+                    </m:sSup>
+                    <m:r>
+                      <a:rPr lang="en-US" sz="1600" b="0" i="0" smtClean="0">
+                        <a:solidFill>
+                          <a:srgbClr val="B6993A"/>
+                        </a:solidFill>
+                        <a:latin typeface="Cambria Math" panose="02040503050406030204" pitchFamily="18" charset="0"/>
+                        <a:cs typeface="Arial" panose="020B0604020202020204" pitchFamily="34" charset="0"/>
+                      </a:rPr>
+                      <m:t> </m:t>
+                    </m:r>
+                  </m:oMath>
+                </a14:m>
+                <a:r>
+                  <a:rPr lang="en-US" sz="1600" dirty="0">
+                    <a:solidFill>
+                      <a:srgbClr val="B6993A"/>
+                    </a:solidFill>
+                    <a:latin typeface="Arial"/>
+                  </a:rPr>
+                  <a:t>(Optional)</a:t>
+                </a:r>
+              </a:p>
+            </p:txBody>
+          </p:sp>
+        </mc:Choice>
+        <mc:Fallback>
+          <p:sp>
+            <p:nvSpPr>
+              <p:cNvPr id="418" name="HF training source"/>
+              <p:cNvSpPr txBox="1">
+                <a:spLocks noRot="1" noChangeAspect="1" noMove="1" noResize="1" noEditPoints="1" noAdjustHandles="1" noChangeArrowheads="1" noChangeShapeType="1" noTextEdit="1"/>
+              </p:cNvSpPr>
+              <p:nvPr/>
+            </p:nvSpPr>
+            <p:spPr>
+              <a:xfrm>
+                <a:off x="9105900" y="2562879"/>
+                <a:ext cx="1549400" cy="203200"/>
+              </a:xfrm>
+              <a:prstGeom prst="rect">
+                <a:avLst/>
+              </a:prstGeom>
+              <a:blipFill>
+                <a:blip r:embed="rId22"/>
+                <a:stretch>
+                  <a:fillRect l="-13008" t="-47059" r="-15447" b="-64706"/>
+                </a:stretch>
+              </a:blipFill>
+            </p:spPr>
+            <p:txBody>
+              <a:bodyPr/>
+              <a:lstStyle/>
+              <a:p>
+                <a:r>
+                  <a:rPr lang="en-US">
+                    <a:noFill/>
+                  </a:rPr>
+                  <a:t> </a:t>
+                </a:r>
+              </a:p>
+            </p:txBody>
+          </p:sp>
+        </mc:Fallback>
+      </mc:AlternateContent>
+      <p:sp>
+        <p:nvSpPr>
+          <p:cNvPr id="420" name="Optional HF train C-W junction"/>
+          <p:cNvSpPr/>
+          <p:nvPr/>
+        </p:nvSpPr>
+        <p:spPr>
+          <a:xfrm>
+            <a:off x="8451850" y="2495550"/>
+            <a:ext cx="38100" cy="38100"/>
+          </a:xfrm>
+          <a:prstGeom prst="ellipse">
+            <a:avLst/>
+          </a:prstGeom>
+          <a:solidFill>
+            <a:srgbClr val="B6993A"/>
+          </a:solidFill>
+          <a:ln>
+            <a:noFill/>
+          </a:ln>
+        </p:spPr>
+        <p:txBody>
+          <a:bodyPr/>
+          <a:lstStyle/>
+          <a:p>
+            <a:endParaRPr lang="en-US"/>
+          </a:p>
+        </p:txBody>
+      </p:sp>
+      <p:sp>
+        <p:nvSpPr>
+          <p:cNvPr id="700" name="Non-junction crossover bridge"/>
+          <p:cNvSpPr/>
+          <p:nvPr/>
+        </p:nvSpPr>
+        <p:spPr>
+          <a:xfrm>
+            <a:off x="9359900" y="2768600"/>
+            <a:ext cx="76200" cy="101600"/>
+          </a:xfrm>
+          <a:custGeom>
+            <a:avLst/>
+            <a:gdLst/>
+            <a:ahLst/>
+            <a:cxnLst/>
+            <a:rect l="0" t="0" r="r" b="b"/>
+            <a:pathLst>
+              <a:path w="76200" h="101600" fill="none">
+                <a:moveTo>
+                  <a:pt x="0" y="101600"/>
+                </a:moveTo>
+                <a:cubicBezTo>
+                  <a:pt x="76200" y="101600"/>
+                  <a:pt x="76200" y="0"/>
+                  <a:pt x="0" y="0"/>
+                </a:cubicBezTo>
+              </a:path>
+            </a:pathLst>
+          </a:custGeom>
+          <a:noFill/>
+          <a:ln w="57150">
+            <a:solidFill>
+              <a:srgbClr val="FFFFFF"/>
+            </a:solidFill>
+            <a:prstDash val="solid"/>
+            <a:round/>
+          </a:ln>
+        </p:spPr>
+        <p:txBody>
+          <a:bodyPr/>
+          <a:lstStyle/>
+          <a:p>
+            <a:endParaRPr lang="en-US"/>
+          </a:p>
+        </p:txBody>
+      </p:sp>
+      <p:sp>
+        <p:nvSpPr>
+          <p:cNvPr id="702" name="Non-junction crossover bridge"/>
+          <p:cNvSpPr/>
+          <p:nvPr/>
+        </p:nvSpPr>
+        <p:spPr>
+          <a:xfrm>
+            <a:off x="10655300" y="2819400"/>
+            <a:ext cx="76200" cy="101600"/>
+          </a:xfrm>
+          <a:custGeom>
+            <a:avLst/>
+            <a:gdLst/>
+            <a:ahLst/>
+            <a:cxnLst/>
+            <a:rect l="0" t="0" r="r" b="b"/>
+            <a:pathLst>
+              <a:path w="76200" h="101600" fill="none">
+                <a:moveTo>
+                  <a:pt x="0" y="0"/>
+                </a:moveTo>
+                <a:cubicBezTo>
+                  <a:pt x="76200" y="0"/>
+                  <a:pt x="76200" y="101600"/>
+                  <a:pt x="0" y="101600"/>
+                </a:cubicBezTo>
+              </a:path>
+            </a:pathLst>
+          </a:custGeom>
+          <a:noFill/>
+          <a:ln w="57150">
+            <a:solidFill>
+              <a:srgbClr val="FFFFFF"/>
+            </a:solidFill>
+            <a:prstDash val="solid"/>
+            <a:round/>
+          </a:ln>
+        </p:spPr>
+        <p:txBody>
+          <a:bodyPr/>
+          <a:lstStyle/>
+          <a:p>
+            <a:endParaRPr lang="en-US"/>
+          </a:p>
+        </p:txBody>
+      </p:sp>
+      <p:sp>
+        <p:nvSpPr>
+          <p:cNvPr id="703" name="Non-junction crossover bridge"/>
+          <p:cNvSpPr/>
+          <p:nvPr/>
+        </p:nvSpPr>
+        <p:spPr>
+          <a:xfrm>
+            <a:off x="10655300" y="3117850"/>
+            <a:ext cx="76200" cy="101600"/>
+          </a:xfrm>
+          <a:custGeom>
+            <a:avLst/>
+            <a:gdLst/>
+            <a:ahLst/>
+            <a:cxnLst/>
+            <a:rect l="0" t="0" r="r" b="b"/>
+            <a:pathLst>
+              <a:path w="76200" h="101600" fill="none">
+                <a:moveTo>
+                  <a:pt x="0" y="0"/>
+                </a:moveTo>
+                <a:cubicBezTo>
+                  <a:pt x="76200" y="0"/>
+                  <a:pt x="76200" y="101600"/>
+                  <a:pt x="0" y="101600"/>
+                </a:cubicBezTo>
+              </a:path>
+            </a:pathLst>
+          </a:custGeom>
+          <a:noFill/>
+          <a:ln w="57150">
+            <a:solidFill>
+              <a:srgbClr val="FFFFFF"/>
+            </a:solidFill>
+            <a:prstDash val="solid"/>
+            <a:round/>
+          </a:ln>
+        </p:spPr>
+        <p:txBody>
+          <a:bodyPr/>
+          <a:lstStyle/>
+          <a:p>
+            <a:endParaRPr lang="en-US"/>
+          </a:p>
+        </p:txBody>
+      </p:sp>
+      <p:cxnSp>
+        <p:nvCxnSpPr>
+          <p:cNvPr id="10" name="Elbow Connector 9">
+            <a:extLst>
+              <a:ext uri="{FF2B5EF4-FFF2-40B4-BE49-F238E27FC236}">
+                <a16:creationId xmlns:a16="http://schemas.microsoft.com/office/drawing/2014/main" id="{5E5C8166-0405-0BFC-BC1F-2D02FB0C533D}"/>
+              </a:ext>
+            </a:extLst>
+          </p:cNvPr>
+          <p:cNvCxnSpPr>
+            <a:cxnSpLocks/>
+          </p:cNvCxnSpPr>
+          <p:nvPr/>
+        </p:nvCxnSpPr>
+        <p:spPr>
+          <a:xfrm flipV="1">
+            <a:off x="2406630" y="1435100"/>
+            <a:ext cx="984270" cy="1106045"/>
+          </a:xfrm>
+          <a:prstGeom prst="bentConnector3">
+            <a:avLst>
+              <a:gd name="adj1" fmla="val 73124"/>
+            </a:avLst>
+          </a:prstGeom>
+          <a:ln w="28575">
+            <a:solidFill>
+              <a:schemeClr val="tx1"/>
+            </a:solidFill>
+            <a:tailEnd type="arrow"/>
+          </a:ln>
+        </p:spPr>
+        <p:style>
+          <a:lnRef idx="2">
+            <a:schemeClr val="accent1"/>
+          </a:lnRef>
+          <a:fillRef idx="0">
+            <a:schemeClr val="accent1"/>
+          </a:fillRef>
+          <a:effectRef idx="1">
+            <a:schemeClr val="accent1"/>
+          </a:effectRef>
+          <a:fontRef idx="minor">
+            <a:schemeClr val="tx1"/>
+          </a:fontRef>
+        </p:style>
+      </p:cxnSp>
+      <p:cxnSp>
+        <p:nvCxnSpPr>
+          <p:cNvPr id="26" name="Elbow Connector 25">
+            <a:extLst>
+              <a:ext uri="{FF2B5EF4-FFF2-40B4-BE49-F238E27FC236}">
+                <a16:creationId xmlns:a16="http://schemas.microsoft.com/office/drawing/2014/main" id="{5BCBE0E5-1964-3719-918D-A226B488B53F}"/>
+              </a:ext>
+            </a:extLst>
+          </p:cNvPr>
+          <p:cNvCxnSpPr>
+            <a:cxnSpLocks/>
+            <a:endCxn id="12" idx="1"/>
+          </p:cNvCxnSpPr>
+          <p:nvPr/>
+        </p:nvCxnSpPr>
+        <p:spPr>
+          <a:xfrm>
+            <a:off x="2432570" y="2541145"/>
+            <a:ext cx="958330" cy="193094"/>
+          </a:xfrm>
+          <a:prstGeom prst="bentConnector3">
+            <a:avLst>
+              <a:gd name="adj1" fmla="val 72331"/>
+            </a:avLst>
+          </a:prstGeom>
+          <a:ln w="28575">
+            <a:solidFill>
+              <a:schemeClr val="tx1"/>
+            </a:solidFill>
+            <a:tailEnd type="arrow"/>
+          </a:ln>
+        </p:spPr>
+        <p:style>
+          <a:lnRef idx="2">
+            <a:schemeClr val="accent1"/>
+          </a:lnRef>
+          <a:fillRef idx="0">
+            <a:schemeClr val="accent1"/>
+          </a:fillRef>
+          <a:effectRef idx="1">
+            <a:schemeClr val="accent1"/>
+          </a:effectRef>
+          <a:fontRef idx="minor">
+            <a:schemeClr val="tx1"/>
+          </a:fontRef>
+        </p:style>
+      </p:cxnSp>
+      <p:cxnSp>
+        <p:nvCxnSpPr>
+          <p:cNvPr id="49" name="Elbow Connector 48">
+            <a:extLst>
+              <a:ext uri="{FF2B5EF4-FFF2-40B4-BE49-F238E27FC236}">
+                <a16:creationId xmlns:a16="http://schemas.microsoft.com/office/drawing/2014/main" id="{C0D8B77B-1315-C6B5-429B-18EDF9686F56}"/>
+              </a:ext>
+            </a:extLst>
+          </p:cNvPr>
+          <p:cNvCxnSpPr>
+            <a:cxnSpLocks/>
+            <a:stCxn id="12" idx="2"/>
+          </p:cNvCxnSpPr>
+          <p:nvPr/>
+        </p:nvCxnSpPr>
+        <p:spPr>
+          <a:xfrm rot="16200000" flipH="1">
+            <a:off x="4573352" y="2859887"/>
+            <a:ext cx="403696" cy="711200"/>
+          </a:xfrm>
+          <a:prstGeom prst="bentConnector3">
+            <a:avLst>
+              <a:gd name="adj1" fmla="val 63832"/>
+            </a:avLst>
+          </a:prstGeom>
+          <a:ln>
+            <a:solidFill>
+              <a:schemeClr val="tx1"/>
+            </a:solidFill>
+            <a:prstDash val="sysDash"/>
+            <a:tailEnd type="triangle"/>
+          </a:ln>
+        </p:spPr>
+        <p:style>
+          <a:lnRef idx="2">
+            <a:schemeClr val="accent1"/>
+          </a:lnRef>
+          <a:fillRef idx="0">
+            <a:schemeClr val="accent1"/>
+          </a:fillRef>
+          <a:effectRef idx="1">
+            <a:schemeClr val="accent1"/>
+          </a:effectRef>
+          <a:fontRef idx="minor">
+            <a:schemeClr val="tx1"/>
+          </a:fontRef>
+        </p:style>
+      </p:cxnSp>
+      <p:cxnSp>
+        <p:nvCxnSpPr>
+          <p:cNvPr id="53" name="Elbow Connector 52">
+            <a:extLst>
+              <a:ext uri="{FF2B5EF4-FFF2-40B4-BE49-F238E27FC236}">
+                <a16:creationId xmlns:a16="http://schemas.microsoft.com/office/drawing/2014/main" id="{B965E38A-D0E0-039B-6AD6-5D78492240B7}"/>
+              </a:ext>
+            </a:extLst>
+          </p:cNvPr>
+          <p:cNvCxnSpPr>
+            <a:cxnSpLocks/>
+            <a:stCxn id="12" idx="2"/>
+          </p:cNvCxnSpPr>
+          <p:nvPr/>
+        </p:nvCxnSpPr>
+        <p:spPr>
+          <a:xfrm rot="16200000" flipH="1">
+            <a:off x="5568274" y="1864964"/>
+            <a:ext cx="413098" cy="2710447"/>
+          </a:xfrm>
+          <a:prstGeom prst="bentConnector3">
+            <a:avLst>
+              <a:gd name="adj1" fmla="val 62324"/>
+            </a:avLst>
+          </a:prstGeom>
+          <a:ln>
+            <a:solidFill>
+              <a:srgbClr val="7030A0"/>
+            </a:solidFill>
+            <a:prstDash val="sysDash"/>
+            <a:tailEnd type="triangle"/>
+          </a:ln>
+        </p:spPr>
+        <p:style>
+          <a:lnRef idx="2">
+            <a:schemeClr val="accent1"/>
+          </a:lnRef>
+          <a:fillRef idx="0">
+            <a:schemeClr val="accent1"/>
+          </a:fillRef>
+          <a:effectRef idx="1">
+            <a:schemeClr val="accent1"/>
+          </a:effectRef>
+          <a:fontRef idx="minor">
+            <a:schemeClr val="tx1"/>
+          </a:fontRef>
+        </p:style>
+      </p:cxnSp>
+      <p:cxnSp>
+        <p:nvCxnSpPr>
+          <p:cNvPr id="60" name="Elbow Connector 59">
+            <a:extLst>
+              <a:ext uri="{FF2B5EF4-FFF2-40B4-BE49-F238E27FC236}">
+                <a16:creationId xmlns:a16="http://schemas.microsoft.com/office/drawing/2014/main" id="{17013CA8-4FE1-BC26-3403-1663F64857C5}"/>
+              </a:ext>
+            </a:extLst>
+          </p:cNvPr>
+          <p:cNvCxnSpPr>
+            <a:cxnSpLocks/>
+            <a:stCxn id="4" idx="3"/>
+            <a:endCxn id="13" idx="1"/>
+          </p:cNvCxnSpPr>
+          <p:nvPr/>
+        </p:nvCxnSpPr>
+        <p:spPr>
+          <a:xfrm flipV="1">
+            <a:off x="5448300" y="873125"/>
+            <a:ext cx="762000" cy="561975"/>
+          </a:xfrm>
+          <a:prstGeom prst="bentConnector3">
+            <a:avLst>
+              <a:gd name="adj1" fmla="val 50000"/>
+            </a:avLst>
+          </a:prstGeom>
+          <a:ln w="28575">
+            <a:solidFill>
+              <a:schemeClr val="tx1"/>
+            </a:solidFill>
+            <a:tailEnd type="arrow"/>
+          </a:ln>
+        </p:spPr>
+        <p:style>
+          <a:lnRef idx="2">
+            <a:schemeClr val="accent1"/>
+          </a:lnRef>
+          <a:fillRef idx="0">
+            <a:schemeClr val="accent1"/>
+          </a:fillRef>
+          <a:effectRef idx="1">
+            <a:schemeClr val="accent1"/>
+          </a:effectRef>
+          <a:fontRef idx="minor">
+            <a:schemeClr val="tx1"/>
+          </a:fontRef>
+        </p:style>
+      </p:cxnSp>
+      <p:cxnSp>
+        <p:nvCxnSpPr>
+          <p:cNvPr id="63" name="Elbow Connector 62">
+            <a:extLst>
+              <a:ext uri="{FF2B5EF4-FFF2-40B4-BE49-F238E27FC236}">
+                <a16:creationId xmlns:a16="http://schemas.microsoft.com/office/drawing/2014/main" id="{2813691E-BA76-E932-292F-D2DEADEF4EAE}"/>
+              </a:ext>
+            </a:extLst>
+          </p:cNvPr>
+          <p:cNvCxnSpPr>
+            <a:cxnSpLocks/>
+            <a:stCxn id="4" idx="3"/>
+            <a:endCxn id="28" idx="1"/>
+          </p:cNvCxnSpPr>
+          <p:nvPr/>
+        </p:nvCxnSpPr>
+        <p:spPr>
+          <a:xfrm>
+            <a:off x="5448300" y="1435100"/>
+            <a:ext cx="762000" cy="648010"/>
+          </a:xfrm>
+          <a:prstGeom prst="bentConnector3">
+            <a:avLst>
+              <a:gd name="adj1" fmla="val 50000"/>
+            </a:avLst>
+          </a:prstGeom>
+          <a:ln w="28575">
+            <a:solidFill>
+              <a:schemeClr val="tx1"/>
+            </a:solidFill>
+            <a:tailEnd type="arrow"/>
+          </a:ln>
+        </p:spPr>
+        <p:style>
+          <a:lnRef idx="2">
+            <a:schemeClr val="accent1"/>
+          </a:lnRef>
+          <a:fillRef idx="0">
+            <a:schemeClr val="accent1"/>
+          </a:fillRef>
+          <a:effectRef idx="1">
+            <a:schemeClr val="accent1"/>
+          </a:effectRef>
+          <a:fontRef idx="minor">
+            <a:schemeClr val="tx1"/>
+          </a:fontRef>
+        </p:style>
+      </p:cxnSp>
+      <p:cxnSp>
+        <p:nvCxnSpPr>
+          <p:cNvPr id="75" name="Elbow Connector 74">
+            <a:extLst>
+              <a:ext uri="{FF2B5EF4-FFF2-40B4-BE49-F238E27FC236}">
+                <a16:creationId xmlns:a16="http://schemas.microsoft.com/office/drawing/2014/main" id="{D0E5029F-3612-52DC-7F96-9915C2284272}"/>
+              </a:ext>
+            </a:extLst>
+          </p:cNvPr>
+          <p:cNvCxnSpPr>
+            <a:cxnSpLocks/>
+            <a:stCxn id="4" idx="3"/>
+            <a:endCxn id="14" idx="1"/>
+          </p:cNvCxnSpPr>
+          <p:nvPr/>
+        </p:nvCxnSpPr>
+        <p:spPr>
+          <a:xfrm flipV="1">
+            <a:off x="5448300" y="1315721"/>
+            <a:ext cx="762000" cy="119379"/>
+          </a:xfrm>
+          <a:prstGeom prst="bentConnector3">
+            <a:avLst>
+              <a:gd name="adj1" fmla="val 50000"/>
+            </a:avLst>
+          </a:prstGeom>
+          <a:ln w="28575">
+            <a:solidFill>
+              <a:schemeClr val="tx1"/>
+            </a:solidFill>
+            <a:tailEnd type="arrow"/>
+          </a:ln>
+        </p:spPr>
+        <p:style>
+          <a:lnRef idx="2">
+            <a:schemeClr val="accent1"/>
+          </a:lnRef>
+          <a:fillRef idx="0">
+            <a:schemeClr val="accent1"/>
+          </a:fillRef>
+          <a:effectRef idx="1">
+            <a:schemeClr val="accent1"/>
+          </a:effectRef>
+          <a:fontRef idx="minor">
+            <a:schemeClr val="tx1"/>
+          </a:fontRef>
+        </p:style>
+      </p:cxnSp>
+      <p:sp>
+        <p:nvSpPr>
+          <p:cNvPr id="28" name="Rectangle 27">
+            <a:extLst>
+              <a:ext uri="{FF2B5EF4-FFF2-40B4-BE49-F238E27FC236}">
+                <a16:creationId xmlns:a16="http://schemas.microsoft.com/office/drawing/2014/main" id="{14554C06-8AD1-9F3E-F2A5-EF79EDFA84CE}"/>
+              </a:ext>
+            </a:extLst>
+          </p:cNvPr>
+          <p:cNvSpPr/>
+          <p:nvPr/>
+        </p:nvSpPr>
+        <p:spPr>
+          <a:xfrm>
+            <a:off x="6210300" y="1900230"/>
+            <a:ext cx="2489200" cy="365760"/>
           </a:xfrm>
           <a:prstGeom prst="rect">
             <a:avLst/>
@@ -7965,248 +9344,1091 @@
           </a:fontRef>
         </p:style>
         <p:txBody>
-          <a:bodyPr anchor="ctr" wrap="none" lIns="0" rIns="0" tIns="0" bIns="0">
+          <a:bodyPr wrap="none" rtlCol="0" anchor="ctr">
             <a:noAutofit/>
           </a:bodyPr>
           <a:lstStyle/>
           <a:p>
             <a:pPr algn="ctr"/>
-            <ns0:m xmlns:ns0="http://schemas.microsoft.com/office/drawing/2010/main">
-              <ns0:oMathPara xmlns:ns0="http://schemas.openxmlformats.org/officeDocument/2006/math">
-                <ns0:oMath>
-                  <ns0:sSub>
-                    <ns0:sSubPr>
-                      <ns0:ctrlPr>
-                        <a:rPr lang="en-US" b="0" i="1" smtClean="0" sz="1800">
-                          <a:solidFill>
-                            <a:schemeClr val="accent6">
-                              <a:lumMod val="50000"/>
-                            </a:schemeClr>
-                          </a:solidFill>
-                          <a:latin typeface="Cambria Math" panose="02040503050406030204" pitchFamily="18" charset="0"/>
-                          <a:ea typeface="Cambria Math" panose="02040503050406030204" pitchFamily="18" charset="0"/>
-                        </a:rPr>
-                      </ns0:ctrlPr>
-                    </ns0:sSubPr>
-                    <ns0:e>
-                      <ns0:r>
-                        <a:rPr lang="en-US" b="0" i="1" smtClean="0" sz="1800">
-                          <a:solidFill>
-                            <a:schemeClr val="accent6">
-                              <a:lumMod val="50000"/>
-                            </a:schemeClr>
-                          </a:solidFill>
-                          <a:latin typeface="Cambria Math" panose="02040503050406030204" pitchFamily="18" charset="0"/>
-                          <a:ea typeface="Cambria Math" panose="02040503050406030204" pitchFamily="18" charset="0"/>
-                        </a:rPr>
-                        <ns0:t>ℒ</ns0:t>
-                      </ns0:r>
-                    </ns0:e>
-                    <ns0:sub>
-                      <ns0:r>
-                        <ns0:rPr>
-                          <ns0:sty ns0:val="p"/>
-                        </ns0:rPr>
-                        <a:rPr lang="en-US" b="0" i="1" smtClean="0" sz="1800">
-                          <a:solidFill>
-                            <a:schemeClr val="accent6">
-                              <a:lumMod val="50000"/>
-                            </a:schemeClr>
-                          </a:solidFill>
-                          <a:latin typeface="Cambria Math" panose="02040503050406030204" pitchFamily="18" charset="0"/>
-                          <a:ea typeface="Cambria Math" panose="02040503050406030204" pitchFamily="18" charset="0"/>
-                        </a:rPr>
-                        <ns0:t>cls</ns0:t>
-                      </ns0:r>
-                    </ns0:sub>
-                  </ns0:sSub>
-                </ns0:oMath>
-              </ns0:oMathPara>
-            </ns0:m>
-          </a:p>
-          <a:p>
-            <a:pPr algn="ctr"/>
             <a:r>
-              <a:rPr sz="1200" lang="en-US">
+              <a:rPr lang="en-US" sz="1600" dirty="0">
                 <a:solidFill>
-                  <a:srgbClr val="32631C"/>
+                  <a:srgbClr val="000000"/>
                 </a:solidFill>
-                <a:latin typeface="Arial"/>
+                <a:latin typeface="Consolas" panose="020B0609020204030204" pitchFamily="49" charset="0"/>
+                <a:cs typeface="Consolas" panose="020B0609020204030204" pitchFamily="49" charset="0"/>
               </a:rPr>
-              <a:t>Native + C/W</a:t>
+              <a:t>C</a:t>
             </a:r>
+            <a:r>
+              <a:rPr lang="en-US" sz="1600" dirty="0">
+                <a:solidFill>
+                  <a:srgbClr val="000000"/>
+                </a:solidFill>
+                <a:latin typeface="Arial" panose="020B0604020202020204" pitchFamily="34" charset="0"/>
+                <a:cs typeface="Arial" panose="020B0604020202020204" pitchFamily="34" charset="0"/>
+              </a:rPr>
+              <a:t>: Crackles</a:t>
+            </a:r>
+            <a:endParaRPr lang="en-US" sz="1600" dirty="0">
+              <a:solidFill>
+                <a:srgbClr val="000000"/>
+              </a:solidFill>
+              <a:latin typeface="Consolas" panose="020B0609020204030204" pitchFamily="49" charset="0"/>
+              <a:cs typeface="Consolas" panose="020B0609020204030204" pitchFamily="49" charset="0"/>
+            </a:endParaRPr>
           </a:p>
         </p:txBody>
       </p:sp>
       <p:sp>
         <p:nvSpPr>
-          <p:cNvPr id="158" name="Classification loss to total objective"/>
+          <p:cNvPr id="82" name="Rectangle 81">
+            <a:extLst>
+              <a:ext uri="{FF2B5EF4-FFF2-40B4-BE49-F238E27FC236}">
+                <a16:creationId xmlns:a16="http://schemas.microsoft.com/office/drawing/2014/main" id="{9D721FBD-D72A-90C1-14FE-49B5C3785A3D}"/>
+              </a:ext>
+            </a:extLst>
+          </p:cNvPr>
           <p:cNvSpPr/>
           <p:nvPr/>
         </p:nvSpPr>
         <p:spPr>
           <a:xfrm>
-            <a:off x="8890000" y="4432300"/>
-            <a:ext cx="635000" cy="241300"/>
+            <a:off x="6210300" y="2346960"/>
+            <a:ext cx="2489200" cy="365760"/>
           </a:xfrm>
-          <a:custGeom>
+          <a:prstGeom prst="rect">
             <a:avLst/>
-            <a:gdLst/>
-            <a:ahLst/>
-            <a:cxnLst/>
-            <a:rect l="0" t="0" r="r" b="b"/>
-            <a:pathLst>
-              <a:path w="635000" h="241300" fill="none" stroke="1">
-                <a:moveTo>
-                  <a:pt x="0" y="0"/>
-                </a:moveTo>
-                <a:lnTo>
-                  <a:pt x="0" y="114300"/>
-                </a:lnTo>
-                <a:lnTo>
-                  <a:pt x="635000" y="114300"/>
-                </a:lnTo>
-                <a:lnTo>
-                  <a:pt x="635000" y="241300"/>
-                </a:lnTo>
-              </a:path>
-            </a:pathLst>
-          </a:custGeom>
-          <a:noFill/>
-          <a:ln w="19050">
+          </a:prstGeom>
+          <a:solidFill>
+            <a:schemeClr val="accent6">
+              <a:lumMod val="20000"/>
+              <a:lumOff val="80000"/>
+            </a:schemeClr>
+          </a:solidFill>
+          <a:ln>
             <a:solidFill>
               <a:schemeClr val="accent6">
                 <a:lumMod val="50000"/>
               </a:schemeClr>
             </a:solidFill>
-            <a:prstDash val="dash"/>
-            <a:round/>
-            <a:tailEnd type="triangle" w="sm" len="sm"/>
           </a:ln>
         </p:spPr>
+        <p:style>
+          <a:lnRef idx="2">
+            <a:schemeClr val="accent1">
+              <a:shade val="15000"/>
+            </a:schemeClr>
+          </a:lnRef>
+          <a:fillRef idx="1">
+            <a:schemeClr val="accent1"/>
+          </a:fillRef>
+          <a:effectRef idx="0">
+            <a:schemeClr val="accent1"/>
+          </a:effectRef>
+          <a:fontRef idx="minor">
+            <a:schemeClr val="lt1"/>
+          </a:fontRef>
+        </p:style>
+        <p:txBody>
+          <a:bodyPr wrap="none" rtlCol="0" anchor="ctr">
+            <a:noAutofit/>
+          </a:bodyPr>
+          <a:lstStyle/>
+          <a:p>
+            <a:pPr algn="ctr"/>
+            <a:r>
+              <a:rPr lang="en-US" sz="1600" i="1" dirty="0">
+                <a:solidFill>
+                  <a:srgbClr val="000000"/>
+                </a:solidFill>
+                <a:latin typeface="Consolas" panose="020B0609020204030204" pitchFamily="49" charset="0"/>
+                <a:cs typeface="Consolas" panose="020B0609020204030204" pitchFamily="49" charset="0"/>
+              </a:rPr>
+              <a:t>W</a:t>
+            </a:r>
+            <a:r>
+              <a:rPr lang="en-US" sz="1600" dirty="0">
+                <a:solidFill>
+                  <a:srgbClr val="000000"/>
+                </a:solidFill>
+                <a:latin typeface="Arial" panose="020B0604020202020204" pitchFamily="34" charset="0"/>
+                <a:cs typeface="Arial" panose="020B0604020202020204" pitchFamily="34" charset="0"/>
+              </a:rPr>
+              <a:t>: Wheezes</a:t>
+            </a:r>
+            <a:endParaRPr lang="en-US" sz="1600" dirty="0">
+              <a:solidFill>
+                <a:srgbClr val="000000"/>
+              </a:solidFill>
+              <a:latin typeface="Consolas" panose="020B0609020204030204" pitchFamily="49" charset="0"/>
+              <a:cs typeface="Consolas" panose="020B0609020204030204" pitchFamily="49" charset="0"/>
+            </a:endParaRPr>
+          </a:p>
+        </p:txBody>
       </p:sp>
-      <p:sp>
-        <p:nvSpPr>
-          <p:cNvPr id="159" name="PAFA regularization to total objective"/>
-          <p:cNvSpPr/>
+      <p:cxnSp>
+        <p:nvCxnSpPr>
+          <p:cNvPr id="85" name="Elbow Connector 84">
+            <a:extLst>
+              <a:ext uri="{FF2B5EF4-FFF2-40B4-BE49-F238E27FC236}">
+                <a16:creationId xmlns:a16="http://schemas.microsoft.com/office/drawing/2014/main" id="{CFA21CE9-265B-BAA7-57E9-370B5E862A09}"/>
+              </a:ext>
+            </a:extLst>
+          </p:cNvPr>
+          <p:cNvCxnSpPr>
+            <a:cxnSpLocks/>
+            <a:stCxn id="4" idx="3"/>
+            <a:endCxn id="82" idx="1"/>
+          </p:cNvCxnSpPr>
           <p:nvPr/>
-        </p:nvSpPr>
+        </p:nvCxnSpPr>
         <p:spPr>
           <a:xfrm>
-            <a:off x="6110224" y="4432300"/>
-            <a:ext cx="13" cy="241300"/>
+            <a:off x="5448300" y="1435100"/>
+            <a:ext cx="762000" cy="1094740"/>
           </a:xfrm>
-          <a:custGeom>
-            <a:avLst/>
-            <a:gdLst/>
-            <a:ahLst/>
-            <a:cxnLst/>
-            <a:rect l="0" t="0" r="r" b="b"/>
-            <a:pathLst>
-              <a:path w="13" h="241300" fill="none" stroke="1">
-                <a:moveTo>
-                  <a:pt x="0" y="0"/>
-                </a:moveTo>
-                <a:lnTo>
-                  <a:pt x="0" y="241300"/>
-                </a:lnTo>
-              </a:path>
-            </a:pathLst>
-          </a:custGeom>
-          <a:noFill/>
-          <a:ln w="19050">
+          <a:prstGeom prst="bentConnector3">
+            <a:avLst>
+              <a:gd name="adj1" fmla="val 50000"/>
+            </a:avLst>
+          </a:prstGeom>
+          <a:ln w="28575">
             <a:solidFill>
-              <a:srgbClr val="7030A0"/>
+              <a:schemeClr val="tx1"/>
             </a:solidFill>
-            <a:prstDash val="dash"/>
-            <a:round/>
-            <a:tailEnd type="triangle" w="sm" len="sm"/>
+            <a:tailEnd type="arrow"/>
           </a:ln>
         </p:spPr>
-      </p:sp>
-      <p:sp>
-        <p:nvSpPr>
-          <p:cNvPr id="160" name="Optional HF C/W supervision"/>
-          <p:cNvSpPr/>
+        <p:style>
+          <a:lnRef idx="2">
+            <a:schemeClr val="accent1"/>
+          </a:lnRef>
+          <a:fillRef idx="0">
+            <a:schemeClr val="accent1"/>
+          </a:fillRef>
+          <a:effectRef idx="1">
+            <a:schemeClr val="accent1"/>
+          </a:effectRef>
+          <a:fontRef idx="minor">
+            <a:schemeClr val="tx1"/>
+          </a:fontRef>
+        </p:style>
+      </p:cxnSp>
+      <p:cxnSp>
+        <p:nvCxnSpPr>
+          <p:cNvPr id="92" name="Elbow Connector 91">
+            <a:extLst>
+              <a:ext uri="{FF2B5EF4-FFF2-40B4-BE49-F238E27FC236}">
+                <a16:creationId xmlns:a16="http://schemas.microsoft.com/office/drawing/2014/main" id="{7602C22B-B0EA-A7DD-4883-1E7A2E3A8372}"/>
+              </a:ext>
+            </a:extLst>
+          </p:cNvPr>
+          <p:cNvCxnSpPr>
+            <a:cxnSpLocks/>
+            <a:stCxn id="13" idx="3"/>
+          </p:cNvCxnSpPr>
           <p:nvPr/>
-        </p:nvSpPr>
+        </p:nvCxnSpPr>
         <p:spPr>
           <a:xfrm>
-            <a:off x="7340600" y="3848100"/>
-            <a:ext cx="977900" cy="825500"/>
+            <a:off x="8699500" y="873125"/>
+            <a:ext cx="298848" cy="261260"/>
           </a:xfrm>
-          <a:custGeom>
+          <a:prstGeom prst="bentConnector3">
+            <a:avLst>
+              <a:gd name="adj1" fmla="val 50000"/>
+            </a:avLst>
+          </a:prstGeom>
+          <a:ln>
+            <a:solidFill>
+              <a:srgbClr val="03520D"/>
+            </a:solidFill>
+            <a:prstDash val="sysDash"/>
+            <a:tailEnd type="none"/>
+          </a:ln>
+        </p:spPr>
+        <p:style>
+          <a:lnRef idx="2">
+            <a:schemeClr val="accent1"/>
+          </a:lnRef>
+          <a:fillRef idx="0">
+            <a:schemeClr val="accent1"/>
+          </a:fillRef>
+          <a:effectRef idx="1">
+            <a:schemeClr val="accent1"/>
+          </a:effectRef>
+          <a:fontRef idx="minor">
+            <a:schemeClr val="tx1"/>
+          </a:fontRef>
+        </p:style>
+      </p:cxnSp>
+      <p:cxnSp>
+        <p:nvCxnSpPr>
+          <p:cNvPr id="98" name="Elbow Connector 97">
+            <a:extLst>
+              <a:ext uri="{FF2B5EF4-FFF2-40B4-BE49-F238E27FC236}">
+                <a16:creationId xmlns:a16="http://schemas.microsoft.com/office/drawing/2014/main" id="{D00800EA-DA9A-6EB6-3AE2-51B9F28F56D3}"/>
+              </a:ext>
+            </a:extLst>
+          </p:cNvPr>
+          <p:cNvCxnSpPr>
+            <a:cxnSpLocks/>
+            <a:stCxn id="14" idx="3"/>
+          </p:cNvCxnSpPr>
+          <p:nvPr/>
+        </p:nvCxnSpPr>
+        <p:spPr>
+          <a:xfrm flipV="1">
+            <a:off x="8699500" y="1238525"/>
+            <a:ext cx="300404" cy="77196"/>
+          </a:xfrm>
+          <a:prstGeom prst="bentConnector3">
+            <a:avLst>
+              <a:gd name="adj1" fmla="val 50000"/>
+            </a:avLst>
+          </a:prstGeom>
+          <a:ln>
+            <a:solidFill>
+              <a:schemeClr val="accent6">
+                <a:lumMod val="50000"/>
+              </a:schemeClr>
+            </a:solidFill>
+            <a:prstDash val="sysDash"/>
+            <a:tailEnd type="none"/>
+          </a:ln>
+        </p:spPr>
+        <p:style>
+          <a:lnRef idx="2">
+            <a:schemeClr val="accent1"/>
+          </a:lnRef>
+          <a:fillRef idx="0">
+            <a:schemeClr val="accent1"/>
+          </a:fillRef>
+          <a:effectRef idx="1">
+            <a:schemeClr val="accent1"/>
+          </a:effectRef>
+          <a:fontRef idx="minor">
+            <a:schemeClr val="tx1"/>
+          </a:fontRef>
+        </p:style>
+      </p:cxnSp>
+      <p:cxnSp>
+        <p:nvCxnSpPr>
+          <p:cNvPr id="124" name="Elbow Connector 123">
+            <a:extLst>
+              <a:ext uri="{FF2B5EF4-FFF2-40B4-BE49-F238E27FC236}">
+                <a16:creationId xmlns:a16="http://schemas.microsoft.com/office/drawing/2014/main" id="{64723286-2259-6A76-E5EE-528B5D43CEC0}"/>
+              </a:ext>
+            </a:extLst>
+          </p:cNvPr>
+          <p:cNvCxnSpPr>
+            <a:cxnSpLocks/>
+          </p:cNvCxnSpPr>
+          <p:nvPr/>
+        </p:nvCxnSpPr>
+        <p:spPr>
+          <a:xfrm>
+            <a:off x="8698903" y="2082801"/>
+            <a:ext cx="324447" cy="171449"/>
+          </a:xfrm>
+          <a:prstGeom prst="bentConnector3">
+            <a:avLst>
+              <a:gd name="adj1" fmla="val 50000"/>
+            </a:avLst>
+          </a:prstGeom>
+          <a:ln>
+            <a:solidFill>
+              <a:srgbClr val="03520D"/>
+            </a:solidFill>
+            <a:prstDash val="sysDash"/>
+            <a:tailEnd type="none"/>
+          </a:ln>
+        </p:spPr>
+        <p:style>
+          <a:lnRef idx="2">
+            <a:schemeClr val="accent1"/>
+          </a:lnRef>
+          <a:fillRef idx="0">
+            <a:schemeClr val="accent1"/>
+          </a:fillRef>
+          <a:effectRef idx="1">
+            <a:schemeClr val="accent1"/>
+          </a:effectRef>
+          <a:fontRef idx="minor">
+            <a:schemeClr val="tx1"/>
+          </a:fontRef>
+        </p:style>
+      </p:cxnSp>
+      <p:cxnSp>
+        <p:nvCxnSpPr>
+          <p:cNvPr id="127" name="Elbow Connector 126">
+            <a:extLst>
+              <a:ext uri="{FF2B5EF4-FFF2-40B4-BE49-F238E27FC236}">
+                <a16:creationId xmlns:a16="http://schemas.microsoft.com/office/drawing/2014/main" id="{39893EC8-2F5C-CD62-EACD-CE3FA43CBA42}"/>
+              </a:ext>
+            </a:extLst>
+          </p:cNvPr>
+          <p:cNvCxnSpPr>
+            <a:cxnSpLocks/>
+            <a:stCxn id="82" idx="3"/>
+          </p:cNvCxnSpPr>
+          <p:nvPr/>
+        </p:nvCxnSpPr>
+        <p:spPr>
+          <a:xfrm flipV="1">
+            <a:off x="8699500" y="2352896"/>
+            <a:ext cx="324892" cy="176944"/>
+          </a:xfrm>
+          <a:prstGeom prst="bentConnector3">
+            <a:avLst>
+              <a:gd name="adj1" fmla="val 50000"/>
+            </a:avLst>
+          </a:prstGeom>
+          <a:ln>
+            <a:solidFill>
+              <a:srgbClr val="03520D"/>
+            </a:solidFill>
+            <a:prstDash val="sysDash"/>
+            <a:tailEnd type="none"/>
+          </a:ln>
+        </p:spPr>
+        <p:style>
+          <a:lnRef idx="2">
+            <a:schemeClr val="accent1"/>
+          </a:lnRef>
+          <a:fillRef idx="0">
+            <a:schemeClr val="accent1"/>
+          </a:fillRef>
+          <a:effectRef idx="1">
+            <a:schemeClr val="accent1"/>
+          </a:effectRef>
+          <a:fontRef idx="minor">
+            <a:schemeClr val="tx1"/>
+          </a:fontRef>
+        </p:style>
+      </p:cxnSp>
+      <p:grpSp>
+        <p:nvGrpSpPr>
+          <p:cNvPr id="590" name="Group 589">
+            <a:extLst>
+              <a:ext uri="{FF2B5EF4-FFF2-40B4-BE49-F238E27FC236}">
+                <a16:creationId xmlns:a16="http://schemas.microsoft.com/office/drawing/2014/main" id="{634B69C7-BC6E-866F-EB68-7FE48A6764E5}"/>
+              </a:ext>
+            </a:extLst>
+          </p:cNvPr>
+          <p:cNvGrpSpPr/>
+          <p:nvPr/>
+        </p:nvGrpSpPr>
+        <p:grpSpPr>
+          <a:xfrm>
+            <a:off x="8815800" y="905002"/>
+            <a:ext cx="864213" cy="565330"/>
+            <a:chOff x="8859340" y="905002"/>
+            <a:chExt cx="864213" cy="565330"/>
+          </a:xfrm>
+        </p:grpSpPr>
+        <p:pic>
+          <p:nvPicPr>
+            <p:cNvPr id="106" name="Picture 105" descr="OR Gate Icon - Free PNG &amp; SVG 881194 - Noun Project">
+              <a:extLst>
+                <a:ext uri="{FF2B5EF4-FFF2-40B4-BE49-F238E27FC236}">
+                  <a16:creationId xmlns:a16="http://schemas.microsoft.com/office/drawing/2014/main" id="{197AA47D-3C56-50EC-4F63-20D44C2DF555}"/>
+                </a:ext>
+              </a:extLst>
+            </p:cNvPr>
+            <p:cNvPicPr>
+              <a:picLocks noChangeAspect="1"/>
+            </p:cNvPicPr>
+            <p:nvPr/>
+          </p:nvPicPr>
+          <p:blipFill>
+            <a:blip r:embed="rId23">
+              <a:duotone>
+                <a:schemeClr val="accent3">
+                  <a:shade val="45000"/>
+                  <a:satMod val="135000"/>
+                </a:schemeClr>
+                <a:prstClr val="white"/>
+              </a:duotone>
+            </a:blip>
+            <a:stretch>
+              <a:fillRect/>
+            </a:stretch>
+          </p:blipFill>
+          <p:spPr>
+            <a:xfrm>
+              <a:off x="8859340" y="905002"/>
+              <a:ext cx="651788" cy="565330"/>
+            </a:xfrm>
+            <a:prstGeom prst="rect">
+              <a:avLst/>
+            </a:prstGeom>
+          </p:spPr>
+        </p:pic>
+        <p:sp>
+          <p:nvSpPr>
+            <p:cNvPr id="580" name="TextBox 579">
+              <a:extLst>
+                <a:ext uri="{FF2B5EF4-FFF2-40B4-BE49-F238E27FC236}">
+                  <a16:creationId xmlns:a16="http://schemas.microsoft.com/office/drawing/2014/main" id="{66B0724F-60C2-23CE-C852-45053CBCC3E6}"/>
+                </a:ext>
+              </a:extLst>
+            </p:cNvPr>
+            <p:cNvSpPr txBox="1"/>
+            <p:nvPr/>
+          </p:nvSpPr>
+          <p:spPr>
+            <a:xfrm>
+              <a:off x="9018668" y="1087508"/>
+              <a:ext cx="704885" cy="215444"/>
+            </a:xfrm>
+            <a:prstGeom prst="rect">
+              <a:avLst/>
+            </a:prstGeom>
+            <a:noFill/>
+          </p:spPr>
+          <p:txBody>
+            <a:bodyPr wrap="square" rtlCol="0">
+              <a:spAutoFit/>
+            </a:bodyPr>
+            <a:lstStyle/>
+            <a:p>
+              <a:r>
+                <a:rPr lang="en-US" sz="800" dirty="0">
+                  <a:latin typeface="Helvetica" pitchFamily="2" charset="0"/>
+                </a:rPr>
+                <a:t>OR</a:t>
+              </a:r>
+            </a:p>
+          </p:txBody>
+        </p:sp>
+      </p:grpSp>
+      <p:grpSp>
+        <p:nvGrpSpPr>
+          <p:cNvPr id="583" name="Group 582">
+            <a:extLst>
+              <a:ext uri="{FF2B5EF4-FFF2-40B4-BE49-F238E27FC236}">
+                <a16:creationId xmlns:a16="http://schemas.microsoft.com/office/drawing/2014/main" id="{C4C9984D-7327-3699-90CD-ECA3A2FC1BD2}"/>
+              </a:ext>
+            </a:extLst>
+          </p:cNvPr>
+          <p:cNvGrpSpPr/>
+          <p:nvPr/>
+        </p:nvGrpSpPr>
+        <p:grpSpPr>
+          <a:xfrm>
+            <a:off x="8850540" y="2033215"/>
+            <a:ext cx="624208" cy="541123"/>
+            <a:chOff x="8907142" y="2037569"/>
+            <a:chExt cx="624208" cy="541123"/>
+          </a:xfrm>
+        </p:grpSpPr>
+        <p:pic>
+          <p:nvPicPr>
+            <p:cNvPr id="108" name="Picture 107" descr="AND Gate Icon - Free PNG &amp; SVG 881189 - Noun Project">
+              <a:extLst>
+                <a:ext uri="{FF2B5EF4-FFF2-40B4-BE49-F238E27FC236}">
+                  <a16:creationId xmlns:a16="http://schemas.microsoft.com/office/drawing/2014/main" id="{54BAD3A4-BE41-0C3F-9C7D-AB3CFCF565AF}"/>
+                </a:ext>
+              </a:extLst>
+            </p:cNvPr>
+            <p:cNvPicPr>
+              <a:picLocks noChangeAspect="1"/>
+            </p:cNvPicPr>
+            <p:nvPr/>
+          </p:nvPicPr>
+          <p:blipFill>
+            <a:blip r:embed="rId24">
+              <a:duotone>
+                <a:schemeClr val="accent3">
+                  <a:shade val="45000"/>
+                  <a:satMod val="135000"/>
+                </a:schemeClr>
+                <a:prstClr val="white"/>
+              </a:duotone>
+            </a:blip>
+            <a:stretch>
+              <a:fillRect/>
+            </a:stretch>
+          </p:blipFill>
+          <p:spPr>
+            <a:xfrm>
+              <a:off x="8907142" y="2037569"/>
+              <a:ext cx="624208" cy="541123"/>
+            </a:xfrm>
+            <a:prstGeom prst="rect">
+              <a:avLst/>
+            </a:prstGeom>
+          </p:spPr>
+        </p:pic>
+        <p:sp>
+          <p:nvSpPr>
+            <p:cNvPr id="582" name="TextBox 581">
+              <a:extLst>
+                <a:ext uri="{FF2B5EF4-FFF2-40B4-BE49-F238E27FC236}">
+                  <a16:creationId xmlns:a16="http://schemas.microsoft.com/office/drawing/2014/main" id="{2FD7644A-1BA6-5A5E-A4EE-2AD95DE9B92C}"/>
+                </a:ext>
+              </a:extLst>
+            </p:cNvPr>
+            <p:cNvSpPr txBox="1"/>
+            <p:nvPr/>
+          </p:nvSpPr>
+          <p:spPr>
+            <a:xfrm>
+              <a:off x="9033327" y="2215336"/>
+              <a:ext cx="402696" cy="200055"/>
+            </a:xfrm>
+            <a:prstGeom prst="rect">
+              <a:avLst/>
+            </a:prstGeom>
+            <a:noFill/>
+          </p:spPr>
+          <p:txBody>
+            <a:bodyPr wrap="square" rtlCol="0">
+              <a:spAutoFit/>
+            </a:bodyPr>
+            <a:lstStyle/>
+            <a:p>
+              <a:r>
+                <a:rPr lang="en-US" sz="700" dirty="0">
+                  <a:latin typeface="Helvetica" pitchFamily="2" charset="0"/>
+                </a:rPr>
+                <a:t>AND</a:t>
+              </a:r>
+            </a:p>
+          </p:txBody>
+        </p:sp>
+      </p:grpSp>
+      <p:grpSp>
+        <p:nvGrpSpPr>
+          <p:cNvPr id="584" name="Group 583">
+            <a:extLst>
+              <a:ext uri="{FF2B5EF4-FFF2-40B4-BE49-F238E27FC236}">
+                <a16:creationId xmlns:a16="http://schemas.microsoft.com/office/drawing/2014/main" id="{0B2E4784-0642-E076-0828-10A3FF576906}"/>
+              </a:ext>
+            </a:extLst>
+          </p:cNvPr>
+          <p:cNvGrpSpPr/>
+          <p:nvPr/>
+        </p:nvGrpSpPr>
+        <p:grpSpPr>
+          <a:xfrm>
+            <a:off x="9306645" y="1436235"/>
+            <a:ext cx="624208" cy="541123"/>
+            <a:chOff x="8902788" y="2037569"/>
+            <a:chExt cx="624208" cy="541123"/>
+          </a:xfrm>
+        </p:grpSpPr>
+        <p:pic>
+          <p:nvPicPr>
+            <p:cNvPr id="585" name="Picture 584" descr="AND Gate Icon - Free PNG &amp; SVG 881189 - Noun Project">
+              <a:extLst>
+                <a:ext uri="{FF2B5EF4-FFF2-40B4-BE49-F238E27FC236}">
+                  <a16:creationId xmlns:a16="http://schemas.microsoft.com/office/drawing/2014/main" id="{EE5EE8A8-F9B9-436F-72DB-A8BB80A1DAEE}"/>
+                </a:ext>
+              </a:extLst>
+            </p:cNvPr>
+            <p:cNvPicPr>
+              <a:picLocks noChangeAspect="1"/>
+            </p:cNvPicPr>
+            <p:nvPr/>
+          </p:nvPicPr>
+          <p:blipFill>
+            <a:blip r:embed="rId24">
+              <a:duotone>
+                <a:schemeClr val="accent3">
+                  <a:shade val="45000"/>
+                  <a:satMod val="135000"/>
+                </a:schemeClr>
+                <a:prstClr val="white"/>
+              </a:duotone>
+            </a:blip>
+            <a:stretch>
+              <a:fillRect/>
+            </a:stretch>
+          </p:blipFill>
+          <p:spPr>
+            <a:xfrm>
+              <a:off x="8902788" y="2037569"/>
+              <a:ext cx="624208" cy="541123"/>
+            </a:xfrm>
+            <a:prstGeom prst="rect">
+              <a:avLst/>
+            </a:prstGeom>
+          </p:spPr>
+        </p:pic>
+        <p:sp>
+          <p:nvSpPr>
+            <p:cNvPr id="586" name="TextBox 585">
+              <a:extLst>
+                <a:ext uri="{FF2B5EF4-FFF2-40B4-BE49-F238E27FC236}">
+                  <a16:creationId xmlns:a16="http://schemas.microsoft.com/office/drawing/2014/main" id="{0EF6F1B4-4A16-0F65-0302-74263386A90E}"/>
+                </a:ext>
+              </a:extLst>
+            </p:cNvPr>
+            <p:cNvSpPr txBox="1"/>
+            <p:nvPr/>
+          </p:nvSpPr>
+          <p:spPr>
+            <a:xfrm>
+              <a:off x="9033327" y="2215336"/>
+              <a:ext cx="402696" cy="200055"/>
+            </a:xfrm>
+            <a:prstGeom prst="rect">
+              <a:avLst/>
+            </a:prstGeom>
+            <a:noFill/>
+          </p:spPr>
+          <p:txBody>
+            <a:bodyPr wrap="square" rtlCol="0">
+              <a:spAutoFit/>
+            </a:bodyPr>
+            <a:lstStyle/>
+            <a:p>
+              <a:r>
+                <a:rPr lang="en-US" sz="700" dirty="0">
+                  <a:latin typeface="Helvetica" pitchFamily="2" charset="0"/>
+                </a:rPr>
+                <a:t>AND</a:t>
+              </a:r>
+            </a:p>
+          </p:txBody>
+        </p:sp>
+      </p:grpSp>
+      <p:cxnSp>
+        <p:nvCxnSpPr>
+          <p:cNvPr id="588" name="Straight Connector 587">
+            <a:extLst>
+              <a:ext uri="{FF2B5EF4-FFF2-40B4-BE49-F238E27FC236}">
+                <a16:creationId xmlns:a16="http://schemas.microsoft.com/office/drawing/2014/main" id="{24C66130-FD09-B597-4BCE-369285FADFB5}"/>
+              </a:ext>
+            </a:extLst>
+          </p:cNvPr>
+          <p:cNvCxnSpPr>
+            <a:cxnSpLocks/>
+          </p:cNvCxnSpPr>
+          <p:nvPr/>
+        </p:nvCxnSpPr>
+        <p:spPr>
+          <a:xfrm flipH="1">
+            <a:off x="9391832" y="1174399"/>
+            <a:ext cx="0" cy="484632"/>
+          </a:xfrm>
+          <a:prstGeom prst="line">
             <a:avLst/>
-            <a:gdLst/>
-            <a:ahLst/>
-            <a:cxnLst/>
-            <a:rect l="0" t="0" r="r" b="b"/>
-            <a:pathLst>
-              <a:path w="977900" h="825500" fill="none" stroke="1">
-                <a:moveTo>
-                  <a:pt x="152400" y="0"/>
-                </a:moveTo>
-                <a:lnTo>
-                  <a:pt x="0" y="0"/>
-                </a:lnTo>
-                <a:lnTo>
-                  <a:pt x="0" y="622300"/>
-                </a:lnTo>
-                <a:lnTo>
-                  <a:pt x="977900" y="622300"/>
-                </a:lnTo>
-                <a:lnTo>
-                  <a:pt x="977900" y="825500"/>
-                </a:lnTo>
-              </a:path>
-            </a:pathLst>
-          </a:custGeom>
-          <a:noFill/>
-          <a:ln w="19050">
+          </a:prstGeom>
+          <a:ln>
+            <a:solidFill>
+              <a:srgbClr val="03520D"/>
+            </a:solidFill>
+            <a:prstDash val="sysDash"/>
+          </a:ln>
+        </p:spPr>
+        <p:style>
+          <a:lnRef idx="2">
+            <a:schemeClr val="accent1"/>
+          </a:lnRef>
+          <a:fillRef idx="0">
+            <a:schemeClr val="accent1"/>
+          </a:fillRef>
+          <a:effectRef idx="1">
+            <a:schemeClr val="accent1"/>
+          </a:effectRef>
+          <a:fontRef idx="minor">
+            <a:schemeClr val="tx1"/>
+          </a:fontRef>
+        </p:style>
+      </p:cxnSp>
+      <p:cxnSp>
+        <p:nvCxnSpPr>
+          <p:cNvPr id="591" name="Straight Connector 590">
+            <a:extLst>
+              <a:ext uri="{FF2B5EF4-FFF2-40B4-BE49-F238E27FC236}">
+                <a16:creationId xmlns:a16="http://schemas.microsoft.com/office/drawing/2014/main" id="{E1F71B8A-F34C-7402-397F-6553176686C6}"/>
+              </a:ext>
+            </a:extLst>
+          </p:cNvPr>
+          <p:cNvCxnSpPr>
+            <a:cxnSpLocks/>
+          </p:cNvCxnSpPr>
+          <p:nvPr/>
+        </p:nvCxnSpPr>
+        <p:spPr>
+          <a:xfrm flipH="1">
+            <a:off x="9389292" y="1747028"/>
+            <a:ext cx="0" cy="548640"/>
+          </a:xfrm>
+          <a:prstGeom prst="line">
+            <a:avLst/>
+          </a:prstGeom>
+          <a:ln>
+            <a:solidFill>
+              <a:srgbClr val="03520D"/>
+            </a:solidFill>
+            <a:prstDash val="sysDash"/>
+          </a:ln>
+        </p:spPr>
+        <p:style>
+          <a:lnRef idx="2">
+            <a:schemeClr val="accent1"/>
+          </a:lnRef>
+          <a:fillRef idx="0">
+            <a:schemeClr val="accent1"/>
+          </a:fillRef>
+          <a:effectRef idx="1">
+            <a:schemeClr val="accent1"/>
+          </a:effectRef>
+          <a:fontRef idx="minor">
+            <a:schemeClr val="tx1"/>
+          </a:fontRef>
+        </p:style>
+      </p:cxnSp>
+      <p:cxnSp>
+        <p:nvCxnSpPr>
+          <p:cNvPr id="594" name="Straight Connector 593">
+            <a:extLst>
+              <a:ext uri="{FF2B5EF4-FFF2-40B4-BE49-F238E27FC236}">
+                <a16:creationId xmlns:a16="http://schemas.microsoft.com/office/drawing/2014/main" id="{DE8D9D30-34A9-0DDA-D155-64E703980362}"/>
+              </a:ext>
+            </a:extLst>
+          </p:cNvPr>
+          <p:cNvCxnSpPr>
+            <a:cxnSpLocks/>
+          </p:cNvCxnSpPr>
+          <p:nvPr/>
+        </p:nvCxnSpPr>
+        <p:spPr>
+          <a:xfrm>
+            <a:off x="9839880" y="1707404"/>
+            <a:ext cx="192024" cy="0"/>
+          </a:xfrm>
+          <a:prstGeom prst="line">
+            <a:avLst/>
+          </a:prstGeom>
+          <a:ln>
+            <a:solidFill>
+              <a:srgbClr val="03520D"/>
+            </a:solidFill>
+            <a:prstDash val="sysDash"/>
+          </a:ln>
+        </p:spPr>
+        <p:style>
+          <a:lnRef idx="2">
+            <a:schemeClr val="accent1"/>
+          </a:lnRef>
+          <a:fillRef idx="0">
+            <a:schemeClr val="accent1"/>
+          </a:fillRef>
+          <a:effectRef idx="1">
+            <a:schemeClr val="accent1"/>
+          </a:effectRef>
+          <a:fontRef idx="minor">
+            <a:schemeClr val="tx1"/>
+          </a:fontRef>
+        </p:style>
+      </p:cxnSp>
+      <p:cxnSp>
+        <p:nvCxnSpPr>
+          <p:cNvPr id="597" name="Straight Connector 596">
+            <a:extLst>
+              <a:ext uri="{FF2B5EF4-FFF2-40B4-BE49-F238E27FC236}">
+                <a16:creationId xmlns:a16="http://schemas.microsoft.com/office/drawing/2014/main" id="{364466EE-362F-B754-9663-A7BC8A6E255F}"/>
+              </a:ext>
+            </a:extLst>
+          </p:cNvPr>
+          <p:cNvCxnSpPr>
+            <a:cxnSpLocks/>
+          </p:cNvCxnSpPr>
+          <p:nvPr/>
+        </p:nvCxnSpPr>
+        <p:spPr>
+          <a:xfrm>
+            <a:off x="9389292" y="2304122"/>
+            <a:ext cx="640080" cy="0"/>
+          </a:xfrm>
+          <a:prstGeom prst="line">
+            <a:avLst/>
+          </a:prstGeom>
+          <a:ln>
             <a:solidFill>
               <a:srgbClr val="B6993A"/>
             </a:solidFill>
-            <a:prstDash val="dash"/>
-            <a:round/>
-            <a:tailEnd type="triangle" w="sm" len="sm"/>
+            <a:prstDash val="sysDash"/>
           </a:ln>
         </p:spPr>
-      </p:sp>
-      <p:sp>
-        <p:nvSpPr>
-          <p:cNvPr id="161" name="Optional HF label"/>
-          <p:cNvSpPr txBox="1"/>
+        <p:style>
+          <a:lnRef idx="2">
+            <a:schemeClr val="accent1"/>
+          </a:lnRef>
+          <a:fillRef idx="0">
+            <a:schemeClr val="accent1"/>
+          </a:fillRef>
+          <a:effectRef idx="1">
+            <a:schemeClr val="accent1"/>
+          </a:effectRef>
+          <a:fontRef idx="minor">
+            <a:schemeClr val="tx1"/>
+          </a:fontRef>
+        </p:style>
+      </p:cxnSp>
+      <p:cxnSp>
+        <p:nvCxnSpPr>
+          <p:cNvPr id="605" name="Elbow Connector 604">
+            <a:extLst>
+              <a:ext uri="{FF2B5EF4-FFF2-40B4-BE49-F238E27FC236}">
+                <a16:creationId xmlns:a16="http://schemas.microsoft.com/office/drawing/2014/main" id="{AB3BE6E1-2744-5CE7-5189-0B922704CD45}"/>
+              </a:ext>
+            </a:extLst>
+          </p:cNvPr>
+          <p:cNvCxnSpPr>
+            <a:cxnSpLocks/>
+          </p:cNvCxnSpPr>
           <p:nvPr/>
-        </p:nvSpPr>
+        </p:nvCxnSpPr>
         <p:spPr>
+          <a:xfrm flipH="1">
+            <a:off x="8998348" y="1616402"/>
+            <a:ext cx="2852848" cy="1810335"/>
+          </a:xfrm>
+          <a:prstGeom prst="bentConnector4">
+            <a:avLst>
+              <a:gd name="adj1" fmla="val -8013"/>
+              <a:gd name="adj2" fmla="val 74771"/>
+            </a:avLst>
+          </a:prstGeom>
+          <a:ln>
+            <a:solidFill>
+              <a:schemeClr val="accent6">
+                <a:lumMod val="50000"/>
+              </a:schemeClr>
+            </a:solidFill>
+            <a:prstDash val="sysDash"/>
+            <a:tailEnd type="triangle"/>
+          </a:ln>
+        </p:spPr>
+        <p:style>
+          <a:lnRef idx="2">
+            <a:schemeClr val="accent1"/>
+          </a:lnRef>
+          <a:fillRef idx="0">
+            <a:schemeClr val="accent1"/>
+          </a:fillRef>
+          <a:effectRef idx="1">
+            <a:schemeClr val="accent1"/>
+          </a:effectRef>
+          <a:fontRef idx="minor">
+            <a:schemeClr val="tx1"/>
+          </a:fontRef>
+        </p:style>
+      </p:cxnSp>
+      <p:cxnSp>
+        <p:nvCxnSpPr>
+          <p:cNvPr id="613" name="Elbow Connector 612">
+            <a:extLst>
+              <a:ext uri="{FF2B5EF4-FFF2-40B4-BE49-F238E27FC236}">
+                <a16:creationId xmlns:a16="http://schemas.microsoft.com/office/drawing/2014/main" id="{78FB81AF-62F3-E17D-DA6B-C42745CC0D36}"/>
+              </a:ext>
+            </a:extLst>
+          </p:cNvPr>
+          <p:cNvCxnSpPr>
+            <a:cxnSpLocks/>
+            <a:stCxn id="219" idx="3"/>
+          </p:cNvCxnSpPr>
+          <p:nvPr/>
+        </p:nvCxnSpPr>
+        <p:spPr>
+          <a:xfrm flipH="1">
+            <a:off x="11358282" y="2295345"/>
+            <a:ext cx="483372" cy="1131392"/>
+          </a:xfrm>
+          <a:prstGeom prst="bentConnector4">
+            <a:avLst>
+              <a:gd name="adj1" fmla="val -22812"/>
+              <a:gd name="adj2" fmla="val 50475"/>
+            </a:avLst>
+          </a:prstGeom>
+          <a:ln>
+            <a:solidFill>
+              <a:srgbClr val="B6993A"/>
+            </a:solidFill>
+            <a:prstDash val="sysDash"/>
+            <a:tailEnd type="triangle"/>
+          </a:ln>
+        </p:spPr>
+        <p:style>
+          <a:lnRef idx="2">
+            <a:schemeClr val="accent1"/>
+          </a:lnRef>
+          <a:fillRef idx="0">
+            <a:schemeClr val="accent1"/>
+          </a:fillRef>
+          <a:effectRef idx="1">
+            <a:schemeClr val="accent1"/>
+          </a:effectRef>
+          <a:fontRef idx="minor">
+            <a:schemeClr val="tx1"/>
+          </a:fontRef>
+        </p:style>
+      </p:cxnSp>
+      <p:grpSp>
+        <p:nvGrpSpPr>
+          <p:cNvPr id="21" name="Group 20">
+            <a:extLst>
+              <a:ext uri="{FF2B5EF4-FFF2-40B4-BE49-F238E27FC236}">
+                <a16:creationId xmlns:a16="http://schemas.microsoft.com/office/drawing/2014/main" id="{68156F4E-F143-CB63-2C40-792405E32195}"/>
+              </a:ext>
+            </a:extLst>
+          </p:cNvPr>
+          <p:cNvGrpSpPr/>
+          <p:nvPr/>
+        </p:nvGrpSpPr>
+        <p:grpSpPr>
           <a:xfrm>
-            <a:off x="6908800" y="4464050"/>
-            <a:ext cx="1346200" cy="203200"/>
+            <a:off x="1052513" y="1725930"/>
+            <a:ext cx="1371600" cy="1663700"/>
+            <a:chOff x="914400" y="2374900"/>
+            <a:chExt cx="1371600" cy="1663700"/>
           </a:xfrm>
-          <a:prstGeom prst="rect">
-            <a:avLst/>
-          </a:prstGeom>
-          <a:noFill/>
-        </p:spPr>
-        <p:txBody>
-          <a:bodyPr wrap="none" rtlCol="0" anchor="ctr" lIns="0" rIns="0" tIns="0" bIns="0">
-            <a:noAutofit/>
-          </a:bodyPr>
-          <a:lstStyle/>
-          <a:p>
-            <a:pPr algn="ctr"/>
-            <a:r>
-              <a:rPr lang="en-US" sz="1200" b="0" i="0">
-                <a:solidFill>
-                  <a:srgbClr val="B6993A"/>
-                </a:solidFill>
-                <a:latin typeface="Arial"/>
-              </a:rPr>
-              <a:t>HF C/W (optional)</a:t>
-            </a:r>
-          </a:p>
-        </p:txBody>
-      </p:sp>
+        </p:grpSpPr>
+        <p:sp>
+          <p:nvSpPr>
+            <p:cNvPr id="5" name="Trapezoid 4">
+              <a:extLst>
+                <a:ext uri="{FF2B5EF4-FFF2-40B4-BE49-F238E27FC236}">
+                  <a16:creationId xmlns:a16="http://schemas.microsoft.com/office/drawing/2014/main" id="{E88512CF-F65D-A594-8804-E4CF7DAE210E}"/>
+                </a:ext>
+              </a:extLst>
+            </p:cNvPr>
+            <p:cNvSpPr/>
+            <p:nvPr/>
+          </p:nvSpPr>
+          <p:spPr>
+            <a:xfrm>
+              <a:off x="914400" y="2374900"/>
+              <a:ext cx="1371600" cy="1663700"/>
+            </a:xfrm>
+            <a:custGeom>
+              <a:avLst/>
+              <a:gdLst/>
+              <a:ahLst/>
+              <a:cxnLst/>
+              <a:rect l="0" t="0" r="r" b="b"/>
+              <a:pathLst>
+                <a:path w="1371600" h="1663700">
+                  <a:moveTo>
+                    <a:pt x="0" y="0"/>
+                  </a:moveTo>
+                  <a:lnTo>
+                    <a:pt x="1371600" y="279400"/>
+                  </a:lnTo>
+                  <a:lnTo>
+                    <a:pt x="1371600" y="1384300"/>
+                  </a:lnTo>
+                  <a:lnTo>
+                    <a:pt x="0" y="1663700"/>
+                  </a:lnTo>
+                  <a:close/>
+                </a:path>
+              </a:pathLst>
+            </a:custGeom>
+            <a:solidFill>
+              <a:schemeClr val="bg2"/>
+            </a:solidFill>
+            <a:ln w="19050">
+              <a:solidFill>
+                <a:srgbClr val="3E6D85"/>
+              </a:solidFill>
+            </a:ln>
+          </p:spPr>
+          <p:style>
+            <a:lnRef idx="2">
+              <a:schemeClr val="accent1">
+                <a:shade val="15000"/>
+              </a:schemeClr>
+            </a:lnRef>
+            <a:fillRef idx="1">
+              <a:schemeClr val="accent1"/>
+            </a:fillRef>
+            <a:effectRef idx="0">
+              <a:schemeClr val="accent1"/>
+            </a:effectRef>
+            <a:fontRef idx="minor">
+              <a:schemeClr val="lt1"/>
+            </a:fontRef>
+          </p:style>
+          <p:txBody>
+            <a:bodyPr rtlCol="0" anchor="ctr"/>
+            <a:lstStyle/>
+            <a:p>
+              <a:pPr algn="ctr"/>
+              <a:endParaRPr lang="en-US" dirty="0">
+                <a:latin typeface="Arial" panose="020B0604020202020204" pitchFamily="34" charset="0"/>
+                <a:cs typeface="Arial" panose="020B0604020202020204" pitchFamily="34" charset="0"/>
+              </a:endParaRPr>
+            </a:p>
+          </p:txBody>
+        </p:sp>
+        <p:sp>
+          <p:nvSpPr>
+            <p:cNvPr id="8" name="TextBox 7">
+              <a:extLst>
+                <a:ext uri="{FF2B5EF4-FFF2-40B4-BE49-F238E27FC236}">
+                  <a16:creationId xmlns:a16="http://schemas.microsoft.com/office/drawing/2014/main" id="{0D7D9726-5393-837A-CC69-6739933CDFA6}"/>
+                </a:ext>
+              </a:extLst>
+            </p:cNvPr>
+            <p:cNvSpPr txBox="1"/>
+            <p:nvPr/>
+          </p:nvSpPr>
+          <p:spPr>
+            <a:xfrm>
+              <a:off x="1003300" y="2717800"/>
+              <a:ext cx="1206500" cy="977900"/>
+            </a:xfrm>
+            <a:prstGeom prst="rect">
+              <a:avLst/>
+            </a:prstGeom>
+            <a:noFill/>
+          </p:spPr>
+          <p:txBody>
+            <a:bodyPr wrap="none" rtlCol="0">
+              <a:spAutoFit/>
+            </a:bodyPr>
+            <a:lstStyle/>
+            <a:p>
+              <a:r>
+                <a:rPr lang="en-US" b="1" dirty="0">
+                  <a:latin typeface="Arial" panose="020B0604020202020204" pitchFamily="34" charset="0"/>
+                  <a:cs typeface="Arial" panose="020B0604020202020204" pitchFamily="34" charset="0"/>
+                </a:rPr>
+                <a:t>BEATs </a:t>
+              </a:r>
+            </a:p>
+            <a:p>
+              <a:r>
+                <a:rPr lang="en-US" b="1" dirty="0">
+                  <a:latin typeface="Arial" panose="020B0604020202020204" pitchFamily="34" charset="0"/>
+                  <a:cs typeface="Arial" panose="020B0604020202020204" pitchFamily="34" charset="0"/>
+                </a:rPr>
+                <a:t>Encoder</a:t>
+              </a:r>
+            </a:p>
+            <a:p>
+              <a:r>
+                <a:rPr lang="en-US" sz="1400" dirty="0">
+                  <a:solidFill>
+                    <a:srgbClr val="3E6D85"/>
+                  </a:solidFill>
+                  <a:latin typeface="Arial" panose="020B0604020202020204" pitchFamily="34" charset="0"/>
+                  <a:cs typeface="Arial" panose="020B0604020202020204" pitchFamily="34" charset="0"/>
+                </a:rPr>
+                <a:t>(Pretrained)</a:t>
+              </a:r>
+            </a:p>
+          </p:txBody>
+        </p:sp>
+      </p:grpSp>
     </p:spTree>
     <p:extLst>
       <p:ext uri="{BB962C8B-B14F-4D97-AF65-F5344CB8AC3E}">
@@ -8533,4 +10755,319 @@
     </a:ext>
   </a:extLst>
 </a:theme>
+</file>
+
+<file path=ppt/theme/theme2.xml><?xml version="1.0" encoding="utf-8"?>
+<a:theme xmlns:a="http://schemas.openxmlformats.org/drawingml/2006/main" name="Office Theme">
+  <a:themeElements>
+    <a:clrScheme name="Office">
+      <a:dk1>
+        <a:sysClr val="windowText" lastClr="000000"/>
+      </a:dk1>
+      <a:lt1>
+        <a:sysClr val="window" lastClr="FFFFFF"/>
+      </a:lt1>
+      <a:dk2>
+        <a:srgbClr val="0E2841"/>
+      </a:dk2>
+      <a:lt2>
+        <a:srgbClr val="E8E8E8"/>
+      </a:lt2>
+      <a:accent1>
+        <a:srgbClr val="156082"/>
+      </a:accent1>
+      <a:accent2>
+        <a:srgbClr val="E97132"/>
+      </a:accent2>
+      <a:accent3>
+        <a:srgbClr val="196B24"/>
+      </a:accent3>
+      <a:accent4>
+        <a:srgbClr val="0F9ED5"/>
+      </a:accent4>
+      <a:accent5>
+        <a:srgbClr val="A02B93"/>
+      </a:accent5>
+      <a:accent6>
+        <a:srgbClr val="4EA72E"/>
+      </a:accent6>
+      <a:hlink>
+        <a:srgbClr val="467886"/>
+      </a:hlink>
+      <a:folHlink>
+        <a:srgbClr val="96607D"/>
+      </a:folHlink>
+    </a:clrScheme>
+    <a:fontScheme name="Office">
+      <a:majorFont>
+        <a:latin typeface="Aptos Display" panose="02110004020202020204"/>
+        <a:ea typeface=""/>
+        <a:cs typeface=""/>
+        <a:font script="Jpan" typeface="游ゴシック Light"/>
+        <a:font script="Hang" typeface="맑은 고딕"/>
+        <a:font script="Hans" typeface="等线 Light"/>
+        <a:font script="Hant" typeface="新細明體"/>
+        <a:font script="Arab" typeface="Times New Roman"/>
+        <a:font script="Hebr" typeface="Times New Roman"/>
+        <a:font script="Thai" typeface="Angsana New"/>
+        <a:font script="Ethi" typeface="Nyala"/>
+        <a:font script="Beng" typeface="Vrinda"/>
+        <a:font script="Gujr" typeface="Shruti"/>
+        <a:font script="Khmr" typeface="MoolBoran"/>
+        <a:font script="Knda" typeface="Tunga"/>
+        <a:font script="Guru" typeface="Raavi"/>
+        <a:font script="Cans" typeface="Euphemia"/>
+        <a:font script="Cher" typeface="Plantagenet Cherokee"/>
+        <a:font script="Yiii" typeface="Microsoft Yi Baiti"/>
+        <a:font script="Tibt" typeface="Microsoft Himalaya"/>
+        <a:font script="Thaa" typeface="MV Boli"/>
+        <a:font script="Deva" typeface="Mangal"/>
+        <a:font script="Telu" typeface="Gautami"/>
+        <a:font script="Taml" typeface="Latha"/>
+        <a:font script="Syrc" typeface="Estrangelo Edessa"/>
+        <a:font script="Orya" typeface="Kalinga"/>
+        <a:font script="Mlym" typeface="Kartika"/>
+        <a:font script="Laoo" typeface="DokChampa"/>
+        <a:font script="Sinh" typeface="Iskoola Pota"/>
+        <a:font script="Mong" typeface="Mongolian Baiti"/>
+        <a:font script="Viet" typeface="Times New Roman"/>
+        <a:font script="Uigh" typeface="Microsoft Uighur"/>
+        <a:font script="Geor" typeface="Sylfaen"/>
+        <a:font script="Armn" typeface="Arial"/>
+        <a:font script="Bugi" typeface="Leelawadee UI"/>
+        <a:font script="Bopo" typeface="Microsoft JhengHei"/>
+        <a:font script="Java" typeface="Javanese Text"/>
+        <a:font script="Lisu" typeface="Segoe UI"/>
+        <a:font script="Mymr" typeface="Myanmar Text"/>
+        <a:font script="Nkoo" typeface="Ebrima"/>
+        <a:font script="Olck" typeface="Nirmala UI"/>
+        <a:font script="Osma" typeface="Ebrima"/>
+        <a:font script="Phag" typeface="Phagspa"/>
+        <a:font script="Syrn" typeface="Estrangelo Edessa"/>
+        <a:font script="Syrj" typeface="Estrangelo Edessa"/>
+        <a:font script="Syre" typeface="Estrangelo Edessa"/>
+        <a:font script="Sora" typeface="Nirmala UI"/>
+        <a:font script="Tale" typeface="Microsoft Tai Le"/>
+        <a:font script="Talu" typeface="Microsoft New Tai Lue"/>
+        <a:font script="Tfng" typeface="Ebrima"/>
+      </a:majorFont>
+      <a:minorFont>
+        <a:latin typeface="Aptos" panose="02110004020202020204"/>
+        <a:ea typeface=""/>
+        <a:cs typeface=""/>
+        <a:font script="Jpan" typeface="游ゴシック"/>
+        <a:font script="Hang" typeface="맑은 고딕"/>
+        <a:font script="Hans" typeface="等线"/>
+        <a:font script="Hant" typeface="新細明體"/>
+        <a:font script="Arab" typeface="Arial"/>
+        <a:font script="Hebr" typeface="Arial"/>
+        <a:font script="Thai" typeface="Cordia New"/>
+        <a:font script="Ethi" typeface="Nyala"/>
+        <a:font script="Beng" typeface="Vrinda"/>
+        <a:font script="Gujr" typeface="Shruti"/>
+        <a:font script="Khmr" typeface="DaunPenh"/>
+        <a:font script="Knda" typeface="Tunga"/>
+        <a:font script="Guru" typeface="Raavi"/>
+        <a:font script="Cans" typeface="Euphemia"/>
+        <a:font script="Cher" typeface="Plantagenet Cherokee"/>
+        <a:font script="Yiii" typeface="Microsoft Yi Baiti"/>
+        <a:font script="Tibt" typeface="Microsoft Himalaya"/>
+        <a:font script="Thaa" typeface="MV Boli"/>
+        <a:font script="Deva" typeface="Mangal"/>
+        <a:font script="Telu" typeface="Gautami"/>
+        <a:font script="Taml" typeface="Latha"/>
+        <a:font script="Syrc" typeface="Estrangelo Edessa"/>
+        <a:font script="Orya" typeface="Kalinga"/>
+        <a:font script="Mlym" typeface="Kartika"/>
+        <a:font script="Laoo" typeface="DokChampa"/>
+        <a:font script="Sinh" typeface="Iskoola Pota"/>
+        <a:font script="Mong" typeface="Mongolian Baiti"/>
+        <a:font script="Viet" typeface="Arial"/>
+        <a:font script="Uigh" typeface="Microsoft Uighur"/>
+        <a:font script="Geor" typeface="Sylfaen"/>
+        <a:font script="Armn" typeface="Arial"/>
+        <a:font script="Bugi" typeface="Leelawadee UI"/>
+        <a:font script="Bopo" typeface="Microsoft JhengHei"/>
+        <a:font script="Java" typeface="Javanese Text"/>
+        <a:font script="Lisu" typeface="Segoe UI"/>
+        <a:font script="Mymr" typeface="Myanmar Text"/>
+        <a:font script="Nkoo" typeface="Ebrima"/>
+        <a:font script="Olck" typeface="Nirmala UI"/>
+        <a:font script="Osma" typeface="Ebrima"/>
+        <a:font script="Phag" typeface="Phagspa"/>
+        <a:font script="Syrn" typeface="Estrangelo Edessa"/>
+        <a:font script="Syrj" typeface="Estrangelo Edessa"/>
+        <a:font script="Syre" typeface="Estrangelo Edessa"/>
+        <a:font script="Sora" typeface="Nirmala UI"/>
+        <a:font script="Tale" typeface="Microsoft Tai Le"/>
+        <a:font script="Talu" typeface="Microsoft New Tai Lue"/>
+        <a:font script="Tfng" typeface="Ebrima"/>
+      </a:minorFont>
+    </a:fontScheme>
+    <a:fmtScheme name="Office">
+      <a:fillStyleLst>
+        <a:solidFill>
+          <a:schemeClr val="phClr"/>
+        </a:solidFill>
+        <a:gradFill rotWithShape="1">
+          <a:gsLst>
+            <a:gs pos="0">
+              <a:schemeClr val="phClr">
+                <a:lumMod val="110000"/>
+                <a:satMod val="105000"/>
+                <a:tint val="67000"/>
+              </a:schemeClr>
+            </a:gs>
+            <a:gs pos="50000">
+              <a:schemeClr val="phClr">
+                <a:lumMod val="105000"/>
+                <a:satMod val="103000"/>
+                <a:tint val="73000"/>
+              </a:schemeClr>
+            </a:gs>
+            <a:gs pos="100000">
+              <a:schemeClr val="phClr">
+                <a:lumMod val="105000"/>
+                <a:satMod val="109000"/>
+                <a:tint val="81000"/>
+              </a:schemeClr>
+            </a:gs>
+          </a:gsLst>
+          <a:lin ang="5400000" scaled="0"/>
+        </a:gradFill>
+        <a:gradFill rotWithShape="1">
+          <a:gsLst>
+            <a:gs pos="0">
+              <a:schemeClr val="phClr">
+                <a:satMod val="103000"/>
+                <a:lumMod val="102000"/>
+                <a:tint val="94000"/>
+              </a:schemeClr>
+            </a:gs>
+            <a:gs pos="50000">
+              <a:schemeClr val="phClr">
+                <a:satMod val="110000"/>
+                <a:lumMod val="100000"/>
+                <a:shade val="100000"/>
+              </a:schemeClr>
+            </a:gs>
+            <a:gs pos="100000">
+              <a:schemeClr val="phClr">
+                <a:lumMod val="99000"/>
+                <a:satMod val="120000"/>
+                <a:shade val="78000"/>
+              </a:schemeClr>
+            </a:gs>
+          </a:gsLst>
+          <a:lin ang="5400000" scaled="0"/>
+        </a:gradFill>
+      </a:fillStyleLst>
+      <a:lnStyleLst>
+        <a:ln w="12700" cap="flat" cmpd="sng" algn="ctr">
+          <a:solidFill>
+            <a:schemeClr val="phClr"/>
+          </a:solidFill>
+          <a:prstDash val="solid"/>
+          <a:miter lim="800000"/>
+        </a:ln>
+        <a:ln w="19050" cap="flat" cmpd="sng" algn="ctr">
+          <a:solidFill>
+            <a:schemeClr val="phClr"/>
+          </a:solidFill>
+          <a:prstDash val="solid"/>
+          <a:miter lim="800000"/>
+        </a:ln>
+        <a:ln w="25400" cap="flat" cmpd="sng" algn="ctr">
+          <a:solidFill>
+            <a:schemeClr val="phClr"/>
+          </a:solidFill>
+          <a:prstDash val="solid"/>
+          <a:miter lim="800000"/>
+        </a:ln>
+      </a:lnStyleLst>
+      <a:effectStyleLst>
+        <a:effectStyle>
+          <a:effectLst/>
+        </a:effectStyle>
+        <a:effectStyle>
+          <a:effectLst/>
+        </a:effectStyle>
+        <a:effectStyle>
+          <a:effectLst>
+            <a:outerShdw blurRad="57150" dist="19050" dir="5400000" algn="ctr" rotWithShape="0">
+              <a:srgbClr val="000000">
+                <a:alpha val="63000"/>
+              </a:srgbClr>
+            </a:outerShdw>
+          </a:effectLst>
+        </a:effectStyle>
+      </a:effectStyleLst>
+      <a:bgFillStyleLst>
+        <a:solidFill>
+          <a:schemeClr val="phClr"/>
+        </a:solidFill>
+        <a:solidFill>
+          <a:schemeClr val="phClr">
+            <a:tint val="95000"/>
+            <a:satMod val="170000"/>
+          </a:schemeClr>
+        </a:solidFill>
+        <a:gradFill rotWithShape="1">
+          <a:gsLst>
+            <a:gs pos="0">
+              <a:schemeClr val="phClr">
+                <a:tint val="93000"/>
+                <a:satMod val="150000"/>
+                <a:shade val="98000"/>
+                <a:lumMod val="102000"/>
+              </a:schemeClr>
+            </a:gs>
+            <a:gs pos="50000">
+              <a:schemeClr val="phClr">
+                <a:tint val="98000"/>
+                <a:satMod val="130000"/>
+                <a:shade val="90000"/>
+                <a:lumMod val="103000"/>
+              </a:schemeClr>
+            </a:gs>
+            <a:gs pos="100000">
+              <a:schemeClr val="phClr">
+                <a:shade val="63000"/>
+                <a:satMod val="120000"/>
+              </a:schemeClr>
+            </a:gs>
+          </a:gsLst>
+          <a:lin ang="5400000" scaled="0"/>
+        </a:gradFill>
+      </a:bgFillStyleLst>
+    </a:fmtScheme>
+  </a:themeElements>
+  <a:objectDefaults>
+    <a:lnDef>
+      <a:spPr/>
+      <a:bodyPr/>
+      <a:lstStyle/>
+      <a:style>
+        <a:lnRef idx="2">
+          <a:schemeClr val="accent1"/>
+        </a:lnRef>
+        <a:fillRef idx="0">
+          <a:schemeClr val="accent1"/>
+        </a:fillRef>
+        <a:effectRef idx="1">
+          <a:schemeClr val="accent1"/>
+        </a:effectRef>
+        <a:fontRef idx="minor">
+          <a:schemeClr val="tx1"/>
+        </a:fontRef>
+      </a:style>
+    </a:lnDef>
+  </a:objectDefaults>
+  <a:extraClrSchemeLst/>
+  <a:extLst>
+    <a:ext uri="{05A4C25C-085E-4340-85A3-A5531E510DB2}">
+      <thm15:themeFamily xmlns:thm15="http://schemas.microsoft.com/office/thememl/2012/main" name="Office Theme" id="{2E142A2C-CD16-42D6-873A-C26D2A0506FA}" vid="{1BDDFF52-6CD6-40A5-AB3C-68EB2F1E4D0A}"/>
+    </a:ext>
+  </a:extLst>
+</a:theme>
 </file>